--- a/presentation/Система автоматизации оформления договоров автоэксперта на базе Telegram-бота.pptx
+++ b/presentation/Система автоматизации оформления договоров автоэксперта на базе Telegram-бота.pptx
@@ -2,7 +2,7 @@
 <file path=ppt/presentation.xml><?xml version="1.0" encoding="utf-8"?>
 <p:presentation xmlns:a="http://schemas.openxmlformats.org/drawingml/2006/main" xmlns:r="http://schemas.openxmlformats.org/officeDocument/2006/relationships" xmlns:p="http://schemas.openxmlformats.org/presentationml/2006/main" saveSubsetFonts="1">
   <p:sldMasterIdLst>
-    <p:sldMasterId id="2147483648" r:id="rId1"/>
+    <p:sldMasterId id="2147483756" r:id="rId1"/>
   </p:sldMasterIdLst>
   <p:sldIdLst>
     <p:sldId id="256" r:id="rId2"/>
@@ -401,12 +401,12 @@
         <c:gapWidth val="95"/>
         <c:gapDepth val="95"/>
         <c:shape val="box"/>
-        <c:axId val="164588160"/>
-        <c:axId val="163930880"/>
+        <c:axId val="156379776"/>
+        <c:axId val="156402048"/>
         <c:axId val="0"/>
       </c:bar3DChart>
       <c:catAx>
-        <c:axId val="164588160"/>
+        <c:axId val="156379776"/>
         <c:scaling>
           <c:orientation val="minMax"/>
         </c:scaling>
@@ -415,7 +415,7 @@
         <c:majorTickMark val="none"/>
         <c:minorTickMark val="none"/>
         <c:tickLblPos val="nextTo"/>
-        <c:crossAx val="163930880"/>
+        <c:crossAx val="156402048"/>
         <c:crosses val="autoZero"/>
         <c:auto val="1"/>
         <c:lblAlgn val="ctr"/>
@@ -423,7 +423,7 @@
         <c:noMultiLvlLbl val="0"/>
       </c:catAx>
       <c:valAx>
-        <c:axId val="163930880"/>
+        <c:axId val="156402048"/>
         <c:scaling>
           <c:orientation val="minMax"/>
         </c:scaling>
@@ -433,7 +433,7 @@
         <c:majorTickMark val="none"/>
         <c:minorTickMark val="none"/>
         <c:tickLblPos val="nextTo"/>
-        <c:crossAx val="164588160"/>
+        <c:crossAx val="156379776"/>
         <c:crosses val="autoZero"/>
         <c:crossBetween val="between"/>
       </c:valAx>
@@ -3890,6 +3890,13 @@
         </dgm:presLayoutVars>
       </dgm:prSet>
       <dgm:spPr/>
+      <dgm:t>
+        <a:bodyPr/>
+        <a:lstStyle/>
+        <a:p>
+          <a:endParaRPr lang="ru-RU"/>
+        </a:p>
+      </dgm:t>
     </dgm:pt>
     <dgm:pt modelId="{E866C0C8-431E-4122-B524-35E7948C6CFD}" type="pres">
       <dgm:prSet presAssocID="{D3CC5928-7533-4388-894E-589000F3FB00}" presName="node" presStyleLbl="node1" presStyleIdx="0" presStyleCnt="6" custScaleX="138702" custScaleY="138026" custLinFactNeighborX="-6697" custLinFactNeighborY="-57431">
@@ -3898,14 +3905,35 @@
         </dgm:presLayoutVars>
       </dgm:prSet>
       <dgm:spPr/>
+      <dgm:t>
+        <a:bodyPr/>
+        <a:lstStyle/>
+        <a:p>
+          <a:endParaRPr lang="ru-RU"/>
+        </a:p>
+      </dgm:t>
     </dgm:pt>
     <dgm:pt modelId="{6CC7DEBD-FA5B-4647-958F-96D0A64900B8}" type="pres">
       <dgm:prSet presAssocID="{A7FC6ABD-0B66-4A9B-A578-F0AB959B88C6}" presName="sibTrans" presStyleLbl="sibTrans1D1" presStyleIdx="0" presStyleCnt="5"/>
       <dgm:spPr/>
+      <dgm:t>
+        <a:bodyPr/>
+        <a:lstStyle/>
+        <a:p>
+          <a:endParaRPr lang="ru-RU"/>
+        </a:p>
+      </dgm:t>
     </dgm:pt>
     <dgm:pt modelId="{B49DFFE3-1AE9-4C22-8727-C2987451E329}" type="pres">
       <dgm:prSet presAssocID="{A7FC6ABD-0B66-4A9B-A578-F0AB959B88C6}" presName="connectorText" presStyleLbl="sibTrans1D1" presStyleIdx="0" presStyleCnt="5"/>
       <dgm:spPr/>
+      <dgm:t>
+        <a:bodyPr/>
+        <a:lstStyle/>
+        <a:p>
+          <a:endParaRPr lang="ru-RU"/>
+        </a:p>
+      </dgm:t>
     </dgm:pt>
     <dgm:pt modelId="{F29BA002-7484-4DD0-A08B-B04592E35419}" type="pres">
       <dgm:prSet presAssocID="{7C89F327-50F4-401C-B8D7-DE967E268125}" presName="node" presStyleLbl="node1" presStyleIdx="1" presStyleCnt="6" custLinFactNeighborX="4020" custLinFactNeighborY="-34864">
@@ -3914,14 +3942,35 @@
         </dgm:presLayoutVars>
       </dgm:prSet>
       <dgm:spPr/>
+      <dgm:t>
+        <a:bodyPr/>
+        <a:lstStyle/>
+        <a:p>
+          <a:endParaRPr lang="ru-RU"/>
+        </a:p>
+      </dgm:t>
     </dgm:pt>
     <dgm:pt modelId="{D050378D-DC1A-47AB-86E6-D73F4FE60BC8}" type="pres">
       <dgm:prSet presAssocID="{10022CFA-964B-4D99-92C1-CA6B806C9C47}" presName="sibTrans" presStyleLbl="sibTrans1D1" presStyleIdx="1" presStyleCnt="5"/>
       <dgm:spPr/>
+      <dgm:t>
+        <a:bodyPr/>
+        <a:lstStyle/>
+        <a:p>
+          <a:endParaRPr lang="ru-RU"/>
+        </a:p>
+      </dgm:t>
     </dgm:pt>
     <dgm:pt modelId="{E7EFA8E3-A3E5-418B-97A0-7EB16FB7ED9E}" type="pres">
       <dgm:prSet presAssocID="{10022CFA-964B-4D99-92C1-CA6B806C9C47}" presName="connectorText" presStyleLbl="sibTrans1D1" presStyleIdx="1" presStyleCnt="5"/>
       <dgm:spPr/>
+      <dgm:t>
+        <a:bodyPr/>
+        <a:lstStyle/>
+        <a:p>
+          <a:endParaRPr lang="ru-RU"/>
+        </a:p>
+      </dgm:t>
     </dgm:pt>
     <dgm:pt modelId="{5C0F8DD4-9CF8-4298-A2FF-88B00DB1B37F}" type="pres">
       <dgm:prSet presAssocID="{2661FD70-8A37-4C8D-A6C1-B951D30E51C9}" presName="node" presStyleLbl="node1" presStyleIdx="2" presStyleCnt="6" custLinFactNeighborX="-3065" custLinFactNeighborY="1685">
@@ -3930,14 +3979,35 @@
         </dgm:presLayoutVars>
       </dgm:prSet>
       <dgm:spPr/>
+      <dgm:t>
+        <a:bodyPr/>
+        <a:lstStyle/>
+        <a:p>
+          <a:endParaRPr lang="ru-RU"/>
+        </a:p>
+      </dgm:t>
     </dgm:pt>
     <dgm:pt modelId="{DDB7171E-8BB5-4E04-8105-4F9A669E1FEA}" type="pres">
       <dgm:prSet presAssocID="{24EAA7B5-0663-407F-AF39-313B8E7B9A3B}" presName="sibTrans" presStyleLbl="sibTrans1D1" presStyleIdx="2" presStyleCnt="5"/>
       <dgm:spPr/>
+      <dgm:t>
+        <a:bodyPr/>
+        <a:lstStyle/>
+        <a:p>
+          <a:endParaRPr lang="ru-RU"/>
+        </a:p>
+      </dgm:t>
     </dgm:pt>
     <dgm:pt modelId="{0AD55FBB-7B1B-4770-8EB7-A4B2FE08A79E}" type="pres">
       <dgm:prSet presAssocID="{24EAA7B5-0663-407F-AF39-313B8E7B9A3B}" presName="connectorText" presStyleLbl="sibTrans1D1" presStyleIdx="2" presStyleCnt="5"/>
       <dgm:spPr/>
+      <dgm:t>
+        <a:bodyPr/>
+        <a:lstStyle/>
+        <a:p>
+          <a:endParaRPr lang="ru-RU"/>
+        </a:p>
+      </dgm:t>
     </dgm:pt>
     <dgm:pt modelId="{747FCBAD-2B2E-4889-B49C-21AAC4895953}" type="pres">
       <dgm:prSet presAssocID="{722A6767-0814-44A9-B4D5-6911B5DBCFD7}" presName="node" presStyleLbl="node1" presStyleIdx="3" presStyleCnt="6">
@@ -3946,14 +4016,35 @@
         </dgm:presLayoutVars>
       </dgm:prSet>
       <dgm:spPr/>
+      <dgm:t>
+        <a:bodyPr/>
+        <a:lstStyle/>
+        <a:p>
+          <a:endParaRPr lang="ru-RU"/>
+        </a:p>
+      </dgm:t>
     </dgm:pt>
     <dgm:pt modelId="{A411F963-DBC7-4E96-9C59-1A176F57B5A3}" type="pres">
       <dgm:prSet presAssocID="{BDD440F6-1A5F-4CAB-BDB2-6206401454BA}" presName="sibTrans" presStyleLbl="sibTrans1D1" presStyleIdx="3" presStyleCnt="5"/>
       <dgm:spPr/>
+      <dgm:t>
+        <a:bodyPr/>
+        <a:lstStyle/>
+        <a:p>
+          <a:endParaRPr lang="ru-RU"/>
+        </a:p>
+      </dgm:t>
     </dgm:pt>
     <dgm:pt modelId="{93EC3D21-41D0-4BD6-A68B-6A2F73F3EC40}" type="pres">
       <dgm:prSet presAssocID="{BDD440F6-1A5F-4CAB-BDB2-6206401454BA}" presName="connectorText" presStyleLbl="sibTrans1D1" presStyleIdx="3" presStyleCnt="5"/>
       <dgm:spPr/>
+      <dgm:t>
+        <a:bodyPr/>
+        <a:lstStyle/>
+        <a:p>
+          <a:endParaRPr lang="ru-RU"/>
+        </a:p>
+      </dgm:t>
     </dgm:pt>
     <dgm:pt modelId="{85C14B27-60C7-4496-9B9A-325791272309}" type="pres">
       <dgm:prSet presAssocID="{D9D0E497-BC27-49FA-A810-C2A1E8FFC849}" presName="node" presStyleLbl="node1" presStyleIdx="4" presStyleCnt="6">
@@ -3962,14 +4053,35 @@
         </dgm:presLayoutVars>
       </dgm:prSet>
       <dgm:spPr/>
+      <dgm:t>
+        <a:bodyPr/>
+        <a:lstStyle/>
+        <a:p>
+          <a:endParaRPr lang="ru-RU"/>
+        </a:p>
+      </dgm:t>
     </dgm:pt>
     <dgm:pt modelId="{DBCA69D7-E81B-4156-BF11-2926E0E87156}" type="pres">
       <dgm:prSet presAssocID="{C7ECFE65-B760-4F9D-8BC6-088C1D1E9441}" presName="sibTrans" presStyleLbl="sibTrans1D1" presStyleIdx="4" presStyleCnt="5"/>
       <dgm:spPr/>
+      <dgm:t>
+        <a:bodyPr/>
+        <a:lstStyle/>
+        <a:p>
+          <a:endParaRPr lang="ru-RU"/>
+        </a:p>
+      </dgm:t>
     </dgm:pt>
     <dgm:pt modelId="{968981E8-4173-49A7-B1C2-F1774578C962}" type="pres">
       <dgm:prSet presAssocID="{C7ECFE65-B760-4F9D-8BC6-088C1D1E9441}" presName="connectorText" presStyleLbl="sibTrans1D1" presStyleIdx="4" presStyleCnt="5"/>
       <dgm:spPr/>
+      <dgm:t>
+        <a:bodyPr/>
+        <a:lstStyle/>
+        <a:p>
+          <a:endParaRPr lang="ru-RU"/>
+        </a:p>
+      </dgm:t>
     </dgm:pt>
     <dgm:pt modelId="{40510BF0-9144-4394-A7CB-B6818F1C5120}" type="pres">
       <dgm:prSet presAssocID="{9CE3A29E-6B19-4DEA-B657-316A691489D6}" presName="node" presStyleLbl="node1" presStyleIdx="5" presStyleCnt="6">
@@ -3978,32 +4090,39 @@
         </dgm:presLayoutVars>
       </dgm:prSet>
       <dgm:spPr/>
+      <dgm:t>
+        <a:bodyPr/>
+        <a:lstStyle/>
+        <a:p>
+          <a:endParaRPr lang="ru-RU"/>
+        </a:p>
+      </dgm:t>
     </dgm:pt>
   </dgm:ptLst>
   <dgm:cxnLst>
+    <dgm:cxn modelId="{9771999F-CF20-465F-8C2B-3280ABA1BA33}" type="presOf" srcId="{7C89F327-50F4-401C-B8D7-DE967E268125}" destId="{F29BA002-7484-4DD0-A08B-B04592E35419}" srcOrd="0" destOrd="0" presId="urn:microsoft.com/office/officeart/2005/8/layout/bProcess3"/>
+    <dgm:cxn modelId="{2E775F2A-0E03-4CAE-B055-DCE19ECFC424}" srcId="{742F5270-4742-4348-A93E-9CA140E6F2BA}" destId="{2661FD70-8A37-4C8D-A6C1-B951D30E51C9}" srcOrd="2" destOrd="0" parTransId="{B883E453-BCAA-4AC4-A1F5-E6E91653864B}" sibTransId="{24EAA7B5-0663-407F-AF39-313B8E7B9A3B}"/>
+    <dgm:cxn modelId="{D638A362-4AD4-4BF5-AE38-BED0967D0D15}" type="presOf" srcId="{742F5270-4742-4348-A93E-9CA140E6F2BA}" destId="{F1F65FF3-920A-460E-990E-7D6F39E81CAC}" srcOrd="0" destOrd="0" presId="urn:microsoft.com/office/officeart/2005/8/layout/bProcess3"/>
+    <dgm:cxn modelId="{0E6CC04E-EE39-43CC-980D-0887E9B6BB80}" type="presOf" srcId="{10022CFA-964B-4D99-92C1-CA6B806C9C47}" destId="{D050378D-DC1A-47AB-86E6-D73F4FE60BC8}" srcOrd="0" destOrd="0" presId="urn:microsoft.com/office/officeart/2005/8/layout/bProcess3"/>
+    <dgm:cxn modelId="{6E8E7DEA-6D42-448E-B101-C72C78E615AF}" type="presOf" srcId="{10022CFA-964B-4D99-92C1-CA6B806C9C47}" destId="{E7EFA8E3-A3E5-418B-97A0-7EB16FB7ED9E}" srcOrd="1" destOrd="0" presId="urn:microsoft.com/office/officeart/2005/8/layout/bProcess3"/>
+    <dgm:cxn modelId="{48DD968A-4202-4B75-8BAE-970D924B25BE}" type="presOf" srcId="{24EAA7B5-0663-407F-AF39-313B8E7B9A3B}" destId="{DDB7171E-8BB5-4E04-8105-4F9A669E1FEA}" srcOrd="0" destOrd="0" presId="urn:microsoft.com/office/officeart/2005/8/layout/bProcess3"/>
+    <dgm:cxn modelId="{2E7C0A51-8DEA-4FBF-AC0F-E7945FC8CBE7}" type="presOf" srcId="{C7ECFE65-B760-4F9D-8BC6-088C1D1E9441}" destId="{DBCA69D7-E81B-4156-BF11-2926E0E87156}" srcOrd="0" destOrd="0" presId="urn:microsoft.com/office/officeart/2005/8/layout/bProcess3"/>
+    <dgm:cxn modelId="{9A9F5285-E5AD-4421-BE87-B04B03D2436E}" type="presOf" srcId="{D9D0E497-BC27-49FA-A810-C2A1E8FFC849}" destId="{85C14B27-60C7-4496-9B9A-325791272309}" srcOrd="0" destOrd="0" presId="urn:microsoft.com/office/officeart/2005/8/layout/bProcess3"/>
+    <dgm:cxn modelId="{4F9F377D-2E4F-4916-BE1E-0C7D4F329825}" type="presOf" srcId="{A7FC6ABD-0B66-4A9B-A578-F0AB959B88C6}" destId="{6CC7DEBD-FA5B-4647-958F-96D0A64900B8}" srcOrd="0" destOrd="0" presId="urn:microsoft.com/office/officeart/2005/8/layout/bProcess3"/>
+    <dgm:cxn modelId="{A03B59FD-7862-4FB0-8905-07985A8BC6F2}" srcId="{742F5270-4742-4348-A93E-9CA140E6F2BA}" destId="{7C89F327-50F4-401C-B8D7-DE967E268125}" srcOrd="1" destOrd="0" parTransId="{7577FF7E-80EA-4C46-BC67-7DB1501F8DCE}" sibTransId="{10022CFA-964B-4D99-92C1-CA6B806C9C47}"/>
+    <dgm:cxn modelId="{EAB5DAE4-95E9-4D12-A67A-E0663A8DDE40}" type="presOf" srcId="{D3CC5928-7533-4388-894E-589000F3FB00}" destId="{E866C0C8-431E-4122-B524-35E7948C6CFD}" srcOrd="0" destOrd="0" presId="urn:microsoft.com/office/officeart/2005/8/layout/bProcess3"/>
+    <dgm:cxn modelId="{8A731492-0C74-432B-9241-7C30F9A7D0FA}" type="presOf" srcId="{C7ECFE65-B760-4F9D-8BC6-088C1D1E9441}" destId="{968981E8-4173-49A7-B1C2-F1774578C962}" srcOrd="1" destOrd="0" presId="urn:microsoft.com/office/officeart/2005/8/layout/bProcess3"/>
+    <dgm:cxn modelId="{1FD31DAC-8698-4F7F-A0CB-E7CC520F8072}" type="presOf" srcId="{2661FD70-8A37-4C8D-A6C1-B951D30E51C9}" destId="{5C0F8DD4-9CF8-4298-A2FF-88B00DB1B37F}" srcOrd="0" destOrd="0" presId="urn:microsoft.com/office/officeart/2005/8/layout/bProcess3"/>
+    <dgm:cxn modelId="{04C09A9D-E4CA-47CC-BCDF-4A43C597BDFA}" type="presOf" srcId="{9CE3A29E-6B19-4DEA-B657-316A691489D6}" destId="{40510BF0-9144-4394-A7CB-B6818F1C5120}" srcOrd="0" destOrd="0" presId="urn:microsoft.com/office/officeart/2005/8/layout/bProcess3"/>
     <dgm:cxn modelId="{35DBAA5A-9FC4-4B84-9D27-D1D9D04DBF79}" srcId="{742F5270-4742-4348-A93E-9CA140E6F2BA}" destId="{722A6767-0814-44A9-B4D5-6911B5DBCFD7}" srcOrd="3" destOrd="0" parTransId="{C10D3230-5B01-4568-87A2-FFC9F0C0E9C6}" sibTransId="{BDD440F6-1A5F-4CAB-BDB2-6206401454BA}"/>
+    <dgm:cxn modelId="{2BAC4F11-1ABB-4BBC-A16B-0CA41D08BE0E}" type="presOf" srcId="{24EAA7B5-0663-407F-AF39-313B8E7B9A3B}" destId="{0AD55FBB-7B1B-4770-8EB7-A4B2FE08A79E}" srcOrd="1" destOrd="0" presId="urn:microsoft.com/office/officeart/2005/8/layout/bProcess3"/>
+    <dgm:cxn modelId="{2DEC4466-53DF-4C4C-A520-1C23B7BECA2B}" srcId="{742F5270-4742-4348-A93E-9CA140E6F2BA}" destId="{D3CC5928-7533-4388-894E-589000F3FB00}" srcOrd="0" destOrd="0" parTransId="{F67356C0-212B-486F-9E4C-526F9A1DFF29}" sibTransId="{A7FC6ABD-0B66-4A9B-A578-F0AB959B88C6}"/>
+    <dgm:cxn modelId="{35CDB95E-33D3-47A6-94F0-2FC6C3B867A5}" srcId="{742F5270-4742-4348-A93E-9CA140E6F2BA}" destId="{D9D0E497-BC27-49FA-A810-C2A1E8FFC849}" srcOrd="4" destOrd="0" parTransId="{27F8289D-B72B-406F-9C60-5E111AD01ABB}" sibTransId="{C7ECFE65-B760-4F9D-8BC6-088C1D1E9441}"/>
+    <dgm:cxn modelId="{F320CD19-DB71-4E7E-A7EB-F8EFA93741F8}" type="presOf" srcId="{A7FC6ABD-0B66-4A9B-A578-F0AB959B88C6}" destId="{B49DFFE3-1AE9-4C22-8727-C2987451E329}" srcOrd="1" destOrd="0" presId="urn:microsoft.com/office/officeart/2005/8/layout/bProcess3"/>
+    <dgm:cxn modelId="{27567543-714A-4D46-B4AE-727274627E4B}" srcId="{742F5270-4742-4348-A93E-9CA140E6F2BA}" destId="{9CE3A29E-6B19-4DEA-B657-316A691489D6}" srcOrd="5" destOrd="0" parTransId="{9ABB03D3-CC33-4389-BEE1-38604A0075AF}" sibTransId="{8C8565D9-D04D-40DE-A370-A429878F515C}"/>
+    <dgm:cxn modelId="{FEB5716D-B217-427D-A0F5-1BDEC8BAE939}" type="presOf" srcId="{BDD440F6-1A5F-4CAB-BDB2-6206401454BA}" destId="{93EC3D21-41D0-4BD6-A68B-6A2F73F3EC40}" srcOrd="1" destOrd="0" presId="urn:microsoft.com/office/officeart/2005/8/layout/bProcess3"/>
     <dgm:cxn modelId="{C9ABCBD1-1BBE-4256-82A3-C2AE56FB8AC7}" type="presOf" srcId="{722A6767-0814-44A9-B4D5-6911B5DBCFD7}" destId="{747FCBAD-2B2E-4889-B49C-21AAC4895953}" srcOrd="0" destOrd="0" presId="urn:microsoft.com/office/officeart/2005/8/layout/bProcess3"/>
-    <dgm:cxn modelId="{27567543-714A-4D46-B4AE-727274627E4B}" srcId="{742F5270-4742-4348-A93E-9CA140E6F2BA}" destId="{9CE3A29E-6B19-4DEA-B657-316A691489D6}" srcOrd="5" destOrd="0" parTransId="{9ABB03D3-CC33-4389-BEE1-38604A0075AF}" sibTransId="{8C8565D9-D04D-40DE-A370-A429878F515C}"/>
-    <dgm:cxn modelId="{2BAC4F11-1ABB-4BBC-A16B-0CA41D08BE0E}" type="presOf" srcId="{24EAA7B5-0663-407F-AF39-313B8E7B9A3B}" destId="{0AD55FBB-7B1B-4770-8EB7-A4B2FE08A79E}" srcOrd="1" destOrd="0" presId="urn:microsoft.com/office/officeart/2005/8/layout/bProcess3"/>
-    <dgm:cxn modelId="{0E6CC04E-EE39-43CC-980D-0887E9B6BB80}" type="presOf" srcId="{10022CFA-964B-4D99-92C1-CA6B806C9C47}" destId="{D050378D-DC1A-47AB-86E6-D73F4FE60BC8}" srcOrd="0" destOrd="0" presId="urn:microsoft.com/office/officeart/2005/8/layout/bProcess3"/>
-    <dgm:cxn modelId="{35CDB95E-33D3-47A6-94F0-2FC6C3B867A5}" srcId="{742F5270-4742-4348-A93E-9CA140E6F2BA}" destId="{D9D0E497-BC27-49FA-A810-C2A1E8FFC849}" srcOrd="4" destOrd="0" parTransId="{27F8289D-B72B-406F-9C60-5E111AD01ABB}" sibTransId="{C7ECFE65-B760-4F9D-8BC6-088C1D1E9441}"/>
-    <dgm:cxn modelId="{9771999F-CF20-465F-8C2B-3280ABA1BA33}" type="presOf" srcId="{7C89F327-50F4-401C-B8D7-DE967E268125}" destId="{F29BA002-7484-4DD0-A08B-B04592E35419}" srcOrd="0" destOrd="0" presId="urn:microsoft.com/office/officeart/2005/8/layout/bProcess3"/>
-    <dgm:cxn modelId="{D638A362-4AD4-4BF5-AE38-BED0967D0D15}" type="presOf" srcId="{742F5270-4742-4348-A93E-9CA140E6F2BA}" destId="{F1F65FF3-920A-460E-990E-7D6F39E81CAC}" srcOrd="0" destOrd="0" presId="urn:microsoft.com/office/officeart/2005/8/layout/bProcess3"/>
-    <dgm:cxn modelId="{4F9F377D-2E4F-4916-BE1E-0C7D4F329825}" type="presOf" srcId="{A7FC6ABD-0B66-4A9B-A578-F0AB959B88C6}" destId="{6CC7DEBD-FA5B-4647-958F-96D0A64900B8}" srcOrd="0" destOrd="0" presId="urn:microsoft.com/office/officeart/2005/8/layout/bProcess3"/>
     <dgm:cxn modelId="{2B2DF966-1A03-46C6-8E78-77B82EA20AF0}" type="presOf" srcId="{BDD440F6-1A5F-4CAB-BDB2-6206401454BA}" destId="{A411F963-DBC7-4E96-9C59-1A176F57B5A3}" srcOrd="0" destOrd="0" presId="urn:microsoft.com/office/officeart/2005/8/layout/bProcess3"/>
-    <dgm:cxn modelId="{EAB5DAE4-95E9-4D12-A67A-E0663A8DDE40}" type="presOf" srcId="{D3CC5928-7533-4388-894E-589000F3FB00}" destId="{E866C0C8-431E-4122-B524-35E7948C6CFD}" srcOrd="0" destOrd="0" presId="urn:microsoft.com/office/officeart/2005/8/layout/bProcess3"/>
-    <dgm:cxn modelId="{A03B59FD-7862-4FB0-8905-07985A8BC6F2}" srcId="{742F5270-4742-4348-A93E-9CA140E6F2BA}" destId="{7C89F327-50F4-401C-B8D7-DE967E268125}" srcOrd="1" destOrd="0" parTransId="{7577FF7E-80EA-4C46-BC67-7DB1501F8DCE}" sibTransId="{10022CFA-964B-4D99-92C1-CA6B806C9C47}"/>
-    <dgm:cxn modelId="{2E7C0A51-8DEA-4FBF-AC0F-E7945FC8CBE7}" type="presOf" srcId="{C7ECFE65-B760-4F9D-8BC6-088C1D1E9441}" destId="{DBCA69D7-E81B-4156-BF11-2926E0E87156}" srcOrd="0" destOrd="0" presId="urn:microsoft.com/office/officeart/2005/8/layout/bProcess3"/>
-    <dgm:cxn modelId="{48DD968A-4202-4B75-8BAE-970D924B25BE}" type="presOf" srcId="{24EAA7B5-0663-407F-AF39-313B8E7B9A3B}" destId="{DDB7171E-8BB5-4E04-8105-4F9A669E1FEA}" srcOrd="0" destOrd="0" presId="urn:microsoft.com/office/officeart/2005/8/layout/bProcess3"/>
-    <dgm:cxn modelId="{F320CD19-DB71-4E7E-A7EB-F8EFA93741F8}" type="presOf" srcId="{A7FC6ABD-0B66-4A9B-A578-F0AB959B88C6}" destId="{B49DFFE3-1AE9-4C22-8727-C2987451E329}" srcOrd="1" destOrd="0" presId="urn:microsoft.com/office/officeart/2005/8/layout/bProcess3"/>
-    <dgm:cxn modelId="{1FD31DAC-8698-4F7F-A0CB-E7CC520F8072}" type="presOf" srcId="{2661FD70-8A37-4C8D-A6C1-B951D30E51C9}" destId="{5C0F8DD4-9CF8-4298-A2FF-88B00DB1B37F}" srcOrd="0" destOrd="0" presId="urn:microsoft.com/office/officeart/2005/8/layout/bProcess3"/>
-    <dgm:cxn modelId="{2DEC4466-53DF-4C4C-A520-1C23B7BECA2B}" srcId="{742F5270-4742-4348-A93E-9CA140E6F2BA}" destId="{D3CC5928-7533-4388-894E-589000F3FB00}" srcOrd="0" destOrd="0" parTransId="{F67356C0-212B-486F-9E4C-526F9A1DFF29}" sibTransId="{A7FC6ABD-0B66-4A9B-A578-F0AB959B88C6}"/>
-    <dgm:cxn modelId="{04C09A9D-E4CA-47CC-BCDF-4A43C597BDFA}" type="presOf" srcId="{9CE3A29E-6B19-4DEA-B657-316A691489D6}" destId="{40510BF0-9144-4394-A7CB-B6818F1C5120}" srcOrd="0" destOrd="0" presId="urn:microsoft.com/office/officeart/2005/8/layout/bProcess3"/>
-    <dgm:cxn modelId="{2E775F2A-0E03-4CAE-B055-DCE19ECFC424}" srcId="{742F5270-4742-4348-A93E-9CA140E6F2BA}" destId="{2661FD70-8A37-4C8D-A6C1-B951D30E51C9}" srcOrd="2" destOrd="0" parTransId="{B883E453-BCAA-4AC4-A1F5-E6E91653864B}" sibTransId="{24EAA7B5-0663-407F-AF39-313B8E7B9A3B}"/>
-    <dgm:cxn modelId="{6E8E7DEA-6D42-448E-B101-C72C78E615AF}" type="presOf" srcId="{10022CFA-964B-4D99-92C1-CA6B806C9C47}" destId="{E7EFA8E3-A3E5-418B-97A0-7EB16FB7ED9E}" srcOrd="1" destOrd="0" presId="urn:microsoft.com/office/officeart/2005/8/layout/bProcess3"/>
-    <dgm:cxn modelId="{9A9F5285-E5AD-4421-BE87-B04B03D2436E}" type="presOf" srcId="{D9D0E497-BC27-49FA-A810-C2A1E8FFC849}" destId="{85C14B27-60C7-4496-9B9A-325791272309}" srcOrd="0" destOrd="0" presId="urn:microsoft.com/office/officeart/2005/8/layout/bProcess3"/>
-    <dgm:cxn modelId="{FEB5716D-B217-427D-A0F5-1BDEC8BAE939}" type="presOf" srcId="{BDD440F6-1A5F-4CAB-BDB2-6206401454BA}" destId="{93EC3D21-41D0-4BD6-A68B-6A2F73F3EC40}" srcOrd="1" destOrd="0" presId="urn:microsoft.com/office/officeart/2005/8/layout/bProcess3"/>
-    <dgm:cxn modelId="{8A731492-0C74-432B-9241-7C30F9A7D0FA}" type="presOf" srcId="{C7ECFE65-B760-4F9D-8BC6-088C1D1E9441}" destId="{968981E8-4173-49A7-B1C2-F1774578C962}" srcOrd="1" destOrd="0" presId="urn:microsoft.com/office/officeart/2005/8/layout/bProcess3"/>
     <dgm:cxn modelId="{D8F560D4-1E41-4350-8191-EB4F9C66917D}" type="presParOf" srcId="{F1F65FF3-920A-460E-990E-7D6F39E81CAC}" destId="{E866C0C8-431E-4122-B524-35E7948C6CFD}" srcOrd="0" destOrd="0" presId="urn:microsoft.com/office/officeart/2005/8/layout/bProcess3"/>
     <dgm:cxn modelId="{307FBF9D-F505-4737-ABDF-3749327BC546}" type="presParOf" srcId="{F1F65FF3-920A-460E-990E-7D6F39E81CAC}" destId="{6CC7DEBD-FA5B-4647-958F-96D0A64900B8}" srcOrd="1" destOrd="0" presId="urn:microsoft.com/office/officeart/2005/8/layout/bProcess3"/>
     <dgm:cxn modelId="{16EABEF9-25B5-40C4-94F7-05B886B4D80A}" type="presParOf" srcId="{6CC7DEBD-FA5B-4647-958F-96D0A64900B8}" destId="{B49DFFE3-1AE9-4C22-8727-C2987451E329}" srcOrd="0" destOrd="0" presId="urn:microsoft.com/office/officeart/2005/8/layout/bProcess3"/>
@@ -4241,6 +4360,13 @@
         </dgm:presLayoutVars>
       </dgm:prSet>
       <dgm:spPr/>
+      <dgm:t>
+        <a:bodyPr/>
+        <a:lstStyle/>
+        <a:p>
+          <a:endParaRPr lang="ru-RU"/>
+        </a:p>
+      </dgm:t>
     </dgm:pt>
     <dgm:pt modelId="{0DE8CD17-9326-47FA-9268-DE73922D406E}" type="pres">
       <dgm:prSet presAssocID="{BF3833C5-96B6-474E-BAED-3524E01210B0}" presName="node" presStyleLbl="node1" presStyleIdx="0" presStyleCnt="5" custScaleX="84788" custLinFactNeighborX="-69898" custLinFactNeighborY="-114">
@@ -4260,10 +4386,24 @@
     <dgm:pt modelId="{E18439A4-D895-458D-832D-A7454E163F0A}" type="pres">
       <dgm:prSet presAssocID="{950E4386-2837-4AFA-97CF-87ACDD9F94C9}" presName="sibTrans" presStyleLbl="sibTrans2D1" presStyleIdx="0" presStyleCnt="4"/>
       <dgm:spPr/>
+      <dgm:t>
+        <a:bodyPr/>
+        <a:lstStyle/>
+        <a:p>
+          <a:endParaRPr lang="ru-RU"/>
+        </a:p>
+      </dgm:t>
     </dgm:pt>
     <dgm:pt modelId="{FDAFE5AB-4181-4451-A169-334805834916}" type="pres">
       <dgm:prSet presAssocID="{950E4386-2837-4AFA-97CF-87ACDD9F94C9}" presName="connectorText" presStyleLbl="sibTrans2D1" presStyleIdx="0" presStyleCnt="4"/>
       <dgm:spPr/>
+      <dgm:t>
+        <a:bodyPr/>
+        <a:lstStyle/>
+        <a:p>
+          <a:endParaRPr lang="ru-RU"/>
+        </a:p>
+      </dgm:t>
     </dgm:pt>
     <dgm:pt modelId="{D1B281A0-515A-4812-8BEE-C5BC882CF29A}" type="pres">
       <dgm:prSet presAssocID="{4CB57F35-24AA-44B6-978A-CA5A1F303BC3}" presName="node" presStyleLbl="node1" presStyleIdx="1" presStyleCnt="5" custScaleX="84471" custLinFactNeighborX="-2356" custLinFactNeighborY="2849">
@@ -4283,10 +4423,24 @@
     <dgm:pt modelId="{7D64F9D0-F65B-4C82-BFDD-B2D7B74C584B}" type="pres">
       <dgm:prSet presAssocID="{A98203AC-CBCC-4184-A31C-23DA8A9C145D}" presName="sibTrans" presStyleLbl="sibTrans2D1" presStyleIdx="1" presStyleCnt="4"/>
       <dgm:spPr/>
+      <dgm:t>
+        <a:bodyPr/>
+        <a:lstStyle/>
+        <a:p>
+          <a:endParaRPr lang="ru-RU"/>
+        </a:p>
+      </dgm:t>
     </dgm:pt>
     <dgm:pt modelId="{E62B172C-3F23-4086-B210-734492D8D347}" type="pres">
       <dgm:prSet presAssocID="{A98203AC-CBCC-4184-A31C-23DA8A9C145D}" presName="connectorText" presStyleLbl="sibTrans2D1" presStyleIdx="1" presStyleCnt="4"/>
       <dgm:spPr/>
+      <dgm:t>
+        <a:bodyPr/>
+        <a:lstStyle/>
+        <a:p>
+          <a:endParaRPr lang="ru-RU"/>
+        </a:p>
+      </dgm:t>
     </dgm:pt>
     <dgm:pt modelId="{59FE72C3-E144-4123-981C-B121EB3ED0C8}" type="pres">
       <dgm:prSet presAssocID="{ADA72263-AB6A-46DC-966E-E46EFA689372}" presName="node" presStyleLbl="node1" presStyleIdx="2" presStyleCnt="5" custScaleX="78507" custLinFactNeighborX="-8949" custLinFactNeighborY="2849">
@@ -4306,10 +4460,24 @@
     <dgm:pt modelId="{4AACD831-027C-40DA-8470-2D325E39C512}" type="pres">
       <dgm:prSet presAssocID="{A1FA5922-4760-4C00-8564-7F7CEE847B09}" presName="sibTrans" presStyleLbl="sibTrans2D1" presStyleIdx="2" presStyleCnt="4"/>
       <dgm:spPr/>
+      <dgm:t>
+        <a:bodyPr/>
+        <a:lstStyle/>
+        <a:p>
+          <a:endParaRPr lang="ru-RU"/>
+        </a:p>
+      </dgm:t>
     </dgm:pt>
     <dgm:pt modelId="{DC15D332-83E8-4926-8777-8BD10E60D60F}" type="pres">
       <dgm:prSet presAssocID="{A1FA5922-4760-4C00-8564-7F7CEE847B09}" presName="connectorText" presStyleLbl="sibTrans2D1" presStyleIdx="2" presStyleCnt="4"/>
       <dgm:spPr/>
+      <dgm:t>
+        <a:bodyPr/>
+        <a:lstStyle/>
+        <a:p>
+          <a:endParaRPr lang="ru-RU"/>
+        </a:p>
+      </dgm:t>
     </dgm:pt>
     <dgm:pt modelId="{1DE16948-26ED-4AF1-99C6-2DF09E4B1ADF}" type="pres">
       <dgm:prSet presAssocID="{82B5B27B-3F20-445F-B612-77A8F6CE6E21}" presName="node" presStyleLbl="node1" presStyleIdx="3" presStyleCnt="5" custScaleX="87696" custLinFactNeighborX="-13203" custLinFactNeighborY="1384">
@@ -4329,10 +4497,24 @@
     <dgm:pt modelId="{1BD61378-8977-41E5-90CD-2BEF633C8F59}" type="pres">
       <dgm:prSet presAssocID="{0A983B2F-9CBC-439E-9278-865445CC3E41}" presName="sibTrans" presStyleLbl="sibTrans2D1" presStyleIdx="3" presStyleCnt="4"/>
       <dgm:spPr/>
+      <dgm:t>
+        <a:bodyPr/>
+        <a:lstStyle/>
+        <a:p>
+          <a:endParaRPr lang="ru-RU"/>
+        </a:p>
+      </dgm:t>
     </dgm:pt>
     <dgm:pt modelId="{EABFBD9F-054F-47B6-A482-4E998E234679}" type="pres">
       <dgm:prSet presAssocID="{0A983B2F-9CBC-439E-9278-865445CC3E41}" presName="connectorText" presStyleLbl="sibTrans2D1" presStyleIdx="3" presStyleCnt="4"/>
       <dgm:spPr/>
+      <dgm:t>
+        <a:bodyPr/>
+        <a:lstStyle/>
+        <a:p>
+          <a:endParaRPr lang="ru-RU"/>
+        </a:p>
+      </dgm:t>
     </dgm:pt>
     <dgm:pt modelId="{767460B3-F7EC-41F1-9AB9-92A22C3CB032}" type="pres">
       <dgm:prSet presAssocID="{C66E093C-30F8-4584-A5DC-CEC3D2280528}" presName="node" presStyleLbl="node1" presStyleIdx="4" presStyleCnt="5" custScaleX="82401" custLinFactNeighborX="-14497" custLinFactNeighborY="1384">
@@ -4368,8 +4550,8 @@
     <dgm:cxn modelId="{43D08E98-EE3F-45BB-B830-A4E89C56E89C}" type="presOf" srcId="{A1FA5922-4760-4C00-8564-7F7CEE847B09}" destId="{4AACD831-027C-40DA-8470-2D325E39C512}" srcOrd="0" destOrd="0" presId="urn:microsoft.com/office/officeart/2005/8/layout/process5"/>
     <dgm:cxn modelId="{6434638C-0EF3-4130-A352-FBA509690373}" type="presOf" srcId="{950E4386-2837-4AFA-97CF-87ACDD9F94C9}" destId="{E18439A4-D895-458D-832D-A7454E163F0A}" srcOrd="0" destOrd="0" presId="urn:microsoft.com/office/officeart/2005/8/layout/process5"/>
     <dgm:cxn modelId="{ECF10B7F-7EE2-427A-95B6-20E51C8DE5B4}" srcId="{3F57D5FD-A62B-4734-98B9-F2A178BC4474}" destId="{BF3833C5-96B6-474E-BAED-3524E01210B0}" srcOrd="0" destOrd="0" parTransId="{92D23B2C-1E44-45B3-9BAC-81993C024BE4}" sibTransId="{950E4386-2837-4AFA-97CF-87ACDD9F94C9}"/>
+    <dgm:cxn modelId="{E1FA69BF-38D8-41A5-9A94-BF8663D74CF3}" type="presOf" srcId="{BF3833C5-96B6-474E-BAED-3524E01210B0}" destId="{0DE8CD17-9326-47FA-9268-DE73922D406E}" srcOrd="0" destOrd="0" presId="urn:microsoft.com/office/officeart/2005/8/layout/process5"/>
     <dgm:cxn modelId="{B6E37531-08B8-4DEF-A87B-102524FD5BFC}" type="presOf" srcId="{0A983B2F-9CBC-439E-9278-865445CC3E41}" destId="{EABFBD9F-054F-47B6-A482-4E998E234679}" srcOrd="1" destOrd="0" presId="urn:microsoft.com/office/officeart/2005/8/layout/process5"/>
-    <dgm:cxn modelId="{E1FA69BF-38D8-41A5-9A94-BF8663D74CF3}" type="presOf" srcId="{BF3833C5-96B6-474E-BAED-3524E01210B0}" destId="{0DE8CD17-9326-47FA-9268-DE73922D406E}" srcOrd="0" destOrd="0" presId="urn:microsoft.com/office/officeart/2005/8/layout/process5"/>
     <dgm:cxn modelId="{B85B0664-BB5A-44B8-8B4E-D1C776A5926C}" type="presParOf" srcId="{BEA29702-C24F-4E39-9C2E-03D5514F7EB3}" destId="{0DE8CD17-9326-47FA-9268-DE73922D406E}" srcOrd="0" destOrd="0" presId="urn:microsoft.com/office/officeart/2005/8/layout/process5"/>
     <dgm:cxn modelId="{531FECF6-086A-46ED-AECD-0409CD2CD56D}" type="presParOf" srcId="{BEA29702-C24F-4E39-9C2E-03D5514F7EB3}" destId="{E18439A4-D895-458D-832D-A7454E163F0A}" srcOrd="1" destOrd="0" presId="urn:microsoft.com/office/officeart/2005/8/layout/process5"/>
     <dgm:cxn modelId="{B93C98DC-B79E-463A-9A8A-46AA16E80519}" type="presParOf" srcId="{E18439A4-D895-458D-832D-A7454E163F0A}" destId="{FDAFE5AB-4181-4451-A169-334805834916}" srcOrd="0" destOrd="0" presId="urn:microsoft.com/office/officeart/2005/8/layout/process5"/>
@@ -4526,24 +4708,13 @@
         </a:prstGeom>
         <a:gradFill rotWithShape="0">
           <a:gsLst>
-            <a:gs pos="0">
+            <a:gs pos="20000">
               <a:schemeClr val="accent1">
                 <a:hueOff val="0"/>
                 <a:satOff val="0"/>
                 <a:lumOff val="0"/>
                 <a:alphaOff val="0"/>
-                <a:tint val="50000"/>
-                <a:satMod val="300000"/>
-              </a:schemeClr>
-            </a:gs>
-            <a:gs pos="35000">
-              <a:schemeClr val="accent1">
-                <a:hueOff val="0"/>
-                <a:satOff val="0"/>
-                <a:lumOff val="0"/>
-                <a:alphaOff val="0"/>
-                <a:tint val="37000"/>
-                <a:satMod val="300000"/>
+                <a:tint val="9000"/>
               </a:schemeClr>
             </a:gs>
             <a:gs pos="100000">
@@ -4552,20 +4723,22 @@
                 <a:satOff val="0"/>
                 <a:lumOff val="0"/>
                 <a:alphaOff val="0"/>
-                <a:tint val="15000"/>
-                <a:satMod val="350000"/>
+                <a:tint val="70000"/>
+                <a:satMod val="100000"/>
               </a:schemeClr>
             </a:gs>
           </a:gsLst>
-          <a:lin ang="16200000" scaled="1"/>
+          <a:path path="circle">
+            <a:fillToRect l="-15000" t="-15000" r="115000" b="115000"/>
+          </a:path>
         </a:gradFill>
         <a:ln>
           <a:noFill/>
         </a:ln>
         <a:effectLst>
-          <a:outerShdw blurRad="40000" dist="20000" dir="5400000" rotWithShape="0">
+          <a:outerShdw blurRad="130000" dist="101600" dir="2700000" algn="tl" rotWithShape="0">
             <a:srgbClr val="000000">
-              <a:alpha val="38000"/>
+              <a:alpha val="35000"/>
             </a:srgbClr>
           </a:outerShdw>
         </a:effectLst>
@@ -4720,24 +4893,13 @@
         </a:prstGeom>
         <a:gradFill rotWithShape="0">
           <a:gsLst>
-            <a:gs pos="0">
+            <a:gs pos="20000">
               <a:schemeClr val="accent1">
                 <a:hueOff val="0"/>
                 <a:satOff val="0"/>
                 <a:lumOff val="0"/>
                 <a:alphaOff val="0"/>
-                <a:tint val="50000"/>
-                <a:satMod val="300000"/>
-              </a:schemeClr>
-            </a:gs>
-            <a:gs pos="35000">
-              <a:schemeClr val="accent1">
-                <a:hueOff val="0"/>
-                <a:satOff val="0"/>
-                <a:lumOff val="0"/>
-                <a:alphaOff val="0"/>
-                <a:tint val="37000"/>
-                <a:satMod val="300000"/>
+                <a:tint val="9000"/>
               </a:schemeClr>
             </a:gs>
             <a:gs pos="100000">
@@ -4746,20 +4908,22 @@
                 <a:satOff val="0"/>
                 <a:lumOff val="0"/>
                 <a:alphaOff val="0"/>
-                <a:tint val="15000"/>
-                <a:satMod val="350000"/>
+                <a:tint val="70000"/>
+                <a:satMod val="100000"/>
               </a:schemeClr>
             </a:gs>
           </a:gsLst>
-          <a:lin ang="16200000" scaled="1"/>
+          <a:path path="circle">
+            <a:fillToRect l="-15000" t="-15000" r="115000" b="115000"/>
+          </a:path>
         </a:gradFill>
         <a:ln>
           <a:noFill/>
         </a:ln>
         <a:effectLst>
-          <a:outerShdw blurRad="40000" dist="20000" dir="5400000" rotWithShape="0">
+          <a:outerShdw blurRad="130000" dist="101600" dir="2700000" algn="tl" rotWithShape="0">
             <a:srgbClr val="000000">
-              <a:alpha val="38000"/>
+              <a:alpha val="35000"/>
             </a:srgbClr>
           </a:outerShdw>
         </a:effectLst>
@@ -4918,24 +5082,13 @@
         </a:prstGeom>
         <a:gradFill rotWithShape="0">
           <a:gsLst>
-            <a:gs pos="0">
+            <a:gs pos="20000">
               <a:schemeClr val="accent1">
                 <a:hueOff val="0"/>
                 <a:satOff val="0"/>
                 <a:lumOff val="0"/>
                 <a:alphaOff val="0"/>
-                <a:tint val="50000"/>
-                <a:satMod val="300000"/>
-              </a:schemeClr>
-            </a:gs>
-            <a:gs pos="35000">
-              <a:schemeClr val="accent1">
-                <a:hueOff val="0"/>
-                <a:satOff val="0"/>
-                <a:lumOff val="0"/>
-                <a:alphaOff val="0"/>
-                <a:tint val="37000"/>
-                <a:satMod val="300000"/>
+                <a:tint val="9000"/>
               </a:schemeClr>
             </a:gs>
             <a:gs pos="100000">
@@ -4944,20 +5097,22 @@
                 <a:satOff val="0"/>
                 <a:lumOff val="0"/>
                 <a:alphaOff val="0"/>
-                <a:tint val="15000"/>
-                <a:satMod val="350000"/>
+                <a:tint val="70000"/>
+                <a:satMod val="100000"/>
               </a:schemeClr>
             </a:gs>
           </a:gsLst>
-          <a:lin ang="16200000" scaled="1"/>
+          <a:path path="circle">
+            <a:fillToRect l="-15000" t="-15000" r="115000" b="115000"/>
+          </a:path>
         </a:gradFill>
         <a:ln>
           <a:noFill/>
         </a:ln>
         <a:effectLst>
-          <a:outerShdw blurRad="40000" dist="20000" dir="5400000" rotWithShape="0">
+          <a:outerShdw blurRad="130000" dist="101600" dir="2700000" algn="tl" rotWithShape="0">
             <a:srgbClr val="000000">
-              <a:alpha val="38000"/>
+              <a:alpha val="35000"/>
             </a:srgbClr>
           </a:outerShdw>
         </a:effectLst>
@@ -5106,24 +5261,13 @@
         </a:prstGeom>
         <a:gradFill rotWithShape="0">
           <a:gsLst>
-            <a:gs pos="0">
+            <a:gs pos="20000">
               <a:schemeClr val="accent1">
                 <a:hueOff val="0"/>
                 <a:satOff val="0"/>
                 <a:lumOff val="0"/>
                 <a:alphaOff val="0"/>
-                <a:tint val="50000"/>
-                <a:satMod val="300000"/>
-              </a:schemeClr>
-            </a:gs>
-            <a:gs pos="35000">
-              <a:schemeClr val="accent1">
-                <a:hueOff val="0"/>
-                <a:satOff val="0"/>
-                <a:lumOff val="0"/>
-                <a:alphaOff val="0"/>
-                <a:tint val="37000"/>
-                <a:satMod val="300000"/>
+                <a:tint val="9000"/>
               </a:schemeClr>
             </a:gs>
             <a:gs pos="100000">
@@ -5132,20 +5276,22 @@
                 <a:satOff val="0"/>
                 <a:lumOff val="0"/>
                 <a:alphaOff val="0"/>
-                <a:tint val="15000"/>
-                <a:satMod val="350000"/>
+                <a:tint val="70000"/>
+                <a:satMod val="100000"/>
               </a:schemeClr>
             </a:gs>
           </a:gsLst>
-          <a:lin ang="16200000" scaled="1"/>
+          <a:path path="circle">
+            <a:fillToRect l="-15000" t="-15000" r="115000" b="115000"/>
+          </a:path>
         </a:gradFill>
         <a:ln>
           <a:noFill/>
         </a:ln>
         <a:effectLst>
-          <a:outerShdw blurRad="40000" dist="20000" dir="5400000" rotWithShape="0">
+          <a:outerShdw blurRad="130000" dist="101600" dir="2700000" algn="tl" rotWithShape="0">
             <a:srgbClr val="000000">
-              <a:alpha val="38000"/>
+              <a:alpha val="35000"/>
             </a:srgbClr>
           </a:outerShdw>
         </a:effectLst>
@@ -5294,24 +5440,13 @@
         </a:prstGeom>
         <a:gradFill rotWithShape="0">
           <a:gsLst>
-            <a:gs pos="0">
+            <a:gs pos="20000">
               <a:schemeClr val="accent1">
                 <a:hueOff val="0"/>
                 <a:satOff val="0"/>
                 <a:lumOff val="0"/>
                 <a:alphaOff val="0"/>
-                <a:tint val="50000"/>
-                <a:satMod val="300000"/>
-              </a:schemeClr>
-            </a:gs>
-            <a:gs pos="35000">
-              <a:schemeClr val="accent1">
-                <a:hueOff val="0"/>
-                <a:satOff val="0"/>
-                <a:lumOff val="0"/>
-                <a:alphaOff val="0"/>
-                <a:tint val="37000"/>
-                <a:satMod val="300000"/>
+                <a:tint val="9000"/>
               </a:schemeClr>
             </a:gs>
             <a:gs pos="100000">
@@ -5320,20 +5455,22 @@
                 <a:satOff val="0"/>
                 <a:lumOff val="0"/>
                 <a:alphaOff val="0"/>
-                <a:tint val="15000"/>
-                <a:satMod val="350000"/>
+                <a:tint val="70000"/>
+                <a:satMod val="100000"/>
               </a:schemeClr>
             </a:gs>
           </a:gsLst>
-          <a:lin ang="16200000" scaled="1"/>
+          <a:path path="circle">
+            <a:fillToRect l="-15000" t="-15000" r="115000" b="115000"/>
+          </a:path>
         </a:gradFill>
         <a:ln>
           <a:noFill/>
         </a:ln>
         <a:effectLst>
-          <a:outerShdw blurRad="40000" dist="20000" dir="5400000" rotWithShape="0">
+          <a:outerShdw blurRad="130000" dist="101600" dir="2700000" algn="tl" rotWithShape="0">
             <a:srgbClr val="000000">
-              <a:alpha val="38000"/>
+              <a:alpha val="35000"/>
             </a:srgbClr>
           </a:outerShdw>
         </a:effectLst>
@@ -5407,24 +5544,13 @@
         </a:prstGeom>
         <a:gradFill rotWithShape="0">
           <a:gsLst>
-            <a:gs pos="0">
+            <a:gs pos="20000">
               <a:schemeClr val="accent1">
                 <a:hueOff val="0"/>
                 <a:satOff val="0"/>
                 <a:lumOff val="0"/>
                 <a:alphaOff val="0"/>
-                <a:tint val="50000"/>
-                <a:satMod val="300000"/>
-              </a:schemeClr>
-            </a:gs>
-            <a:gs pos="35000">
-              <a:schemeClr val="accent1">
-                <a:hueOff val="0"/>
-                <a:satOff val="0"/>
-                <a:lumOff val="0"/>
-                <a:alphaOff val="0"/>
-                <a:tint val="37000"/>
-                <a:satMod val="300000"/>
+                <a:tint val="9000"/>
               </a:schemeClr>
             </a:gs>
             <a:gs pos="100000">
@@ -5433,20 +5559,22 @@
                 <a:satOff val="0"/>
                 <a:lumOff val="0"/>
                 <a:alphaOff val="0"/>
-                <a:tint val="15000"/>
-                <a:satMod val="350000"/>
+                <a:tint val="70000"/>
+                <a:satMod val="100000"/>
               </a:schemeClr>
             </a:gs>
           </a:gsLst>
-          <a:lin ang="16200000" scaled="1"/>
+          <a:path path="circle">
+            <a:fillToRect l="-15000" t="-15000" r="115000" b="115000"/>
+          </a:path>
         </a:gradFill>
         <a:ln>
           <a:noFill/>
         </a:ln>
         <a:effectLst>
-          <a:outerShdw blurRad="40000" dist="20000" dir="5400000" rotWithShape="0">
+          <a:outerShdw blurRad="130000" dist="101600" dir="2700000" algn="tl" rotWithShape="0">
             <a:srgbClr val="000000">
-              <a:alpha val="38000"/>
+              <a:alpha val="35000"/>
             </a:srgbClr>
           </a:outerShdw>
         </a:effectLst>
@@ -5536,19 +5664,49 @@
                 <a:satOff val="0"/>
                 <a:lumOff val="0"/>
                 <a:alphaOff val="0"/>
-                <a:shade val="51000"/>
-                <a:satMod val="130000"/>
+                <a:shade val="60000"/>
               </a:schemeClr>
             </a:gs>
-            <a:gs pos="80000">
+            <a:gs pos="33000">
               <a:schemeClr val="accent1">
                 <a:alpha val="90000"/>
                 <a:hueOff val="0"/>
                 <a:satOff val="0"/>
                 <a:lumOff val="0"/>
                 <a:alphaOff val="0"/>
-                <a:shade val="93000"/>
-                <a:satMod val="130000"/>
+                <a:tint val="86500"/>
+              </a:schemeClr>
+            </a:gs>
+            <a:gs pos="46750">
+              <a:schemeClr val="accent1">
+                <a:alpha val="90000"/>
+                <a:hueOff val="0"/>
+                <a:satOff val="0"/>
+                <a:lumOff val="0"/>
+                <a:alphaOff val="0"/>
+                <a:tint val="71000"/>
+                <a:satMod val="112000"/>
+              </a:schemeClr>
+            </a:gs>
+            <a:gs pos="53000">
+              <a:schemeClr val="accent1">
+                <a:alpha val="90000"/>
+                <a:hueOff val="0"/>
+                <a:satOff val="0"/>
+                <a:lumOff val="0"/>
+                <a:alphaOff val="0"/>
+                <a:tint val="71000"/>
+                <a:satMod val="112000"/>
+              </a:schemeClr>
+            </a:gs>
+            <a:gs pos="68000">
+              <a:schemeClr val="accent1">
+                <a:alpha val="90000"/>
+                <a:hueOff val="0"/>
+                <a:satOff val="0"/>
+                <a:lumOff val="0"/>
+                <a:alphaOff val="0"/>
+                <a:tint val="86000"/>
               </a:schemeClr>
             </a:gs>
             <a:gs pos="100000">
@@ -5558,20 +5716,19 @@
                 <a:satOff val="0"/>
                 <a:lumOff val="0"/>
                 <a:alphaOff val="0"/>
-                <a:shade val="94000"/>
-                <a:satMod val="135000"/>
+                <a:shade val="60000"/>
               </a:schemeClr>
             </a:gs>
           </a:gsLst>
-          <a:lin ang="16200000" scaled="0"/>
+          <a:lin ang="8350000" scaled="1"/>
         </a:gradFill>
         <a:ln>
           <a:noFill/>
         </a:ln>
         <a:effectLst>
-          <a:outerShdw blurRad="40000" dist="23000" dir="5400000" rotWithShape="0">
+          <a:outerShdw blurRad="190500" dist="228600" dir="2700000" sy="90000" rotWithShape="0">
             <a:srgbClr val="000000">
-              <a:alpha val="35000"/>
+              <a:alpha val="25500"/>
             </a:srgbClr>
           </a:outerShdw>
         </a:effectLst>
@@ -5644,19 +5801,49 @@
                 <a:satOff val="0"/>
                 <a:lumOff val="0"/>
                 <a:alphaOff val="0"/>
-                <a:shade val="51000"/>
-                <a:satMod val="130000"/>
+                <a:shade val="60000"/>
               </a:schemeClr>
             </a:gs>
-            <a:gs pos="80000">
+            <a:gs pos="33000">
               <a:schemeClr val="accent1">
                 <a:shade val="90000"/>
                 <a:hueOff val="0"/>
                 <a:satOff val="0"/>
                 <a:lumOff val="0"/>
                 <a:alphaOff val="0"/>
-                <a:shade val="93000"/>
-                <a:satMod val="130000"/>
+                <a:tint val="86500"/>
+              </a:schemeClr>
+            </a:gs>
+            <a:gs pos="46750">
+              <a:schemeClr val="accent1">
+                <a:shade val="90000"/>
+                <a:hueOff val="0"/>
+                <a:satOff val="0"/>
+                <a:lumOff val="0"/>
+                <a:alphaOff val="0"/>
+                <a:tint val="71000"/>
+                <a:satMod val="112000"/>
+              </a:schemeClr>
+            </a:gs>
+            <a:gs pos="53000">
+              <a:schemeClr val="accent1">
+                <a:shade val="90000"/>
+                <a:hueOff val="0"/>
+                <a:satOff val="0"/>
+                <a:lumOff val="0"/>
+                <a:alphaOff val="0"/>
+                <a:tint val="71000"/>
+                <a:satMod val="112000"/>
+              </a:schemeClr>
+            </a:gs>
+            <a:gs pos="68000">
+              <a:schemeClr val="accent1">
+                <a:shade val="90000"/>
+                <a:hueOff val="0"/>
+                <a:satOff val="0"/>
+                <a:lumOff val="0"/>
+                <a:alphaOff val="0"/>
+                <a:tint val="86000"/>
               </a:schemeClr>
             </a:gs>
             <a:gs pos="100000">
@@ -5666,20 +5853,19 @@
                 <a:satOff val="0"/>
                 <a:lumOff val="0"/>
                 <a:alphaOff val="0"/>
-                <a:shade val="94000"/>
-                <a:satMod val="135000"/>
+                <a:shade val="60000"/>
               </a:schemeClr>
             </a:gs>
           </a:gsLst>
-          <a:lin ang="16200000" scaled="0"/>
+          <a:lin ang="8350000" scaled="1"/>
         </a:gradFill>
         <a:ln>
           <a:noFill/>
         </a:ln>
         <a:effectLst>
-          <a:outerShdw blurRad="40000" dist="23000" dir="5400000" rotWithShape="0">
+          <a:outerShdw blurRad="190500" dist="228600" dir="2700000" sy="90000" rotWithShape="0">
             <a:srgbClr val="000000">
-              <a:alpha val="35000"/>
+              <a:alpha val="25500"/>
             </a:srgbClr>
           </a:outerShdw>
         </a:effectLst>
@@ -5704,7 +5890,7 @@
         </a:bodyPr>
         <a:lstStyle/>
         <a:p>
-          <a:pPr lvl="0" algn="ctr" defTabSz="666750">
+          <a:pPr lvl="0" algn="ctr" defTabSz="711200">
             <a:lnSpc>
               <a:spcPct val="90000"/>
             </a:lnSpc>
@@ -5715,7 +5901,7 @@
               <a:spcPct val="35000"/>
             </a:spcAft>
           </a:pPr>
-          <a:endParaRPr lang="ru-RU" sz="1500" kern="1200"/>
+          <a:endParaRPr lang="ru-RU" sz="1600" kern="1200"/>
         </a:p>
       </dsp:txBody>
       <dsp:txXfrm>
@@ -5747,19 +5933,49 @@
                 <a:satOff val="0"/>
                 <a:lumOff val="0"/>
                 <a:alphaOff val="-10000"/>
-                <a:shade val="51000"/>
-                <a:satMod val="130000"/>
+                <a:shade val="60000"/>
               </a:schemeClr>
             </a:gs>
-            <a:gs pos="80000">
+            <a:gs pos="33000">
               <a:schemeClr val="accent1">
                 <a:alpha val="90000"/>
                 <a:hueOff val="0"/>
                 <a:satOff val="0"/>
                 <a:lumOff val="0"/>
                 <a:alphaOff val="-10000"/>
-                <a:shade val="93000"/>
-                <a:satMod val="130000"/>
+                <a:tint val="86500"/>
+              </a:schemeClr>
+            </a:gs>
+            <a:gs pos="46750">
+              <a:schemeClr val="accent1">
+                <a:alpha val="90000"/>
+                <a:hueOff val="0"/>
+                <a:satOff val="0"/>
+                <a:lumOff val="0"/>
+                <a:alphaOff val="-10000"/>
+                <a:tint val="71000"/>
+                <a:satMod val="112000"/>
+              </a:schemeClr>
+            </a:gs>
+            <a:gs pos="53000">
+              <a:schemeClr val="accent1">
+                <a:alpha val="90000"/>
+                <a:hueOff val="0"/>
+                <a:satOff val="0"/>
+                <a:lumOff val="0"/>
+                <a:alphaOff val="-10000"/>
+                <a:tint val="71000"/>
+                <a:satMod val="112000"/>
+              </a:schemeClr>
+            </a:gs>
+            <a:gs pos="68000">
+              <a:schemeClr val="accent1">
+                <a:alpha val="90000"/>
+                <a:hueOff val="0"/>
+                <a:satOff val="0"/>
+                <a:lumOff val="0"/>
+                <a:alphaOff val="-10000"/>
+                <a:tint val="86000"/>
               </a:schemeClr>
             </a:gs>
             <a:gs pos="100000">
@@ -5769,20 +5985,19 @@
                 <a:satOff val="0"/>
                 <a:lumOff val="0"/>
                 <a:alphaOff val="-10000"/>
-                <a:shade val="94000"/>
-                <a:satMod val="135000"/>
+                <a:shade val="60000"/>
               </a:schemeClr>
             </a:gs>
           </a:gsLst>
-          <a:lin ang="16200000" scaled="0"/>
+          <a:lin ang="8350000" scaled="1"/>
         </a:gradFill>
         <a:ln>
           <a:noFill/>
         </a:ln>
         <a:effectLst>
-          <a:outerShdw blurRad="40000" dist="23000" dir="5400000" rotWithShape="0">
+          <a:outerShdw blurRad="190500" dist="228600" dir="2700000" sy="90000" rotWithShape="0">
             <a:srgbClr val="000000">
-              <a:alpha val="35000"/>
+              <a:alpha val="25500"/>
             </a:srgbClr>
           </a:outerShdw>
         </a:effectLst>
@@ -5851,46 +6066,75 @@
             <a:gs pos="0">
               <a:schemeClr val="accent1">
                 <a:shade val="90000"/>
-                <a:hueOff val="125037"/>
-                <a:satOff val="-2309"/>
-                <a:lumOff val="10709"/>
+                <a:hueOff val="-61267"/>
+                <a:satOff val="-1102"/>
+                <a:lumOff val="8948"/>
                 <a:alphaOff val="0"/>
-                <a:shade val="51000"/>
-                <a:satMod val="130000"/>
+                <a:shade val="60000"/>
               </a:schemeClr>
             </a:gs>
-            <a:gs pos="80000">
+            <a:gs pos="33000">
               <a:schemeClr val="accent1">
                 <a:shade val="90000"/>
-                <a:hueOff val="125037"/>
-                <a:satOff val="-2309"/>
-                <a:lumOff val="10709"/>
+                <a:hueOff val="-61267"/>
+                <a:satOff val="-1102"/>
+                <a:lumOff val="8948"/>
                 <a:alphaOff val="0"/>
-                <a:shade val="93000"/>
-                <a:satMod val="130000"/>
+                <a:tint val="86500"/>
+              </a:schemeClr>
+            </a:gs>
+            <a:gs pos="46750">
+              <a:schemeClr val="accent1">
+                <a:shade val="90000"/>
+                <a:hueOff val="-61267"/>
+                <a:satOff val="-1102"/>
+                <a:lumOff val="8948"/>
+                <a:alphaOff val="0"/>
+                <a:tint val="71000"/>
+                <a:satMod val="112000"/>
+              </a:schemeClr>
+            </a:gs>
+            <a:gs pos="53000">
+              <a:schemeClr val="accent1">
+                <a:shade val="90000"/>
+                <a:hueOff val="-61267"/>
+                <a:satOff val="-1102"/>
+                <a:lumOff val="8948"/>
+                <a:alphaOff val="0"/>
+                <a:tint val="71000"/>
+                <a:satMod val="112000"/>
+              </a:schemeClr>
+            </a:gs>
+            <a:gs pos="68000">
+              <a:schemeClr val="accent1">
+                <a:shade val="90000"/>
+                <a:hueOff val="-61267"/>
+                <a:satOff val="-1102"/>
+                <a:lumOff val="8948"/>
+                <a:alphaOff val="0"/>
+                <a:tint val="86000"/>
               </a:schemeClr>
             </a:gs>
             <a:gs pos="100000">
               <a:schemeClr val="accent1">
                 <a:shade val="90000"/>
-                <a:hueOff val="125037"/>
-                <a:satOff val="-2309"/>
-                <a:lumOff val="10709"/>
+                <a:hueOff val="-61267"/>
+                <a:satOff val="-1102"/>
+                <a:lumOff val="8948"/>
                 <a:alphaOff val="0"/>
-                <a:shade val="94000"/>
-                <a:satMod val="135000"/>
+                <a:shade val="60000"/>
               </a:schemeClr>
             </a:gs>
           </a:gsLst>
-          <a:lin ang="16200000" scaled="0"/>
+          <a:lin ang="8350000" scaled="1"/>
         </a:gradFill>
         <a:ln>
           <a:noFill/>
         </a:ln>
         <a:effectLst>
-          <a:outerShdw blurRad="40000" dist="23000" dir="5400000" rotWithShape="0">
+          <a:outerShdw blurRad="190500" dist="228600" dir="2700000" sy="90000" rotWithShape="0">
             <a:srgbClr val="000000">
-              <a:alpha val="35000"/>
+              <a:alpha val="25500"/>
             </a:srgbClr>
           </a:outerShdw>
         </a:effectLst>
@@ -5915,7 +6159,7 @@
         </a:bodyPr>
         <a:lstStyle/>
         <a:p>
-          <a:pPr lvl="0" algn="ctr" defTabSz="666750">
+          <a:pPr lvl="0" algn="ctr" defTabSz="711200">
             <a:lnSpc>
               <a:spcPct val="90000"/>
             </a:lnSpc>
@@ -5926,7 +6170,7 @@
               <a:spcPct val="35000"/>
             </a:spcAft>
           </a:pPr>
-          <a:endParaRPr lang="ru-RU" sz="1500" kern="1200"/>
+          <a:endParaRPr lang="ru-RU" sz="1600" kern="1200"/>
         </a:p>
       </dsp:txBody>
       <dsp:txXfrm>
@@ -5958,19 +6202,49 @@
                 <a:satOff val="0"/>
                 <a:lumOff val="0"/>
                 <a:alphaOff val="-20000"/>
-                <a:shade val="51000"/>
-                <a:satMod val="130000"/>
+                <a:shade val="60000"/>
               </a:schemeClr>
             </a:gs>
-            <a:gs pos="80000">
+            <a:gs pos="33000">
               <a:schemeClr val="accent1">
                 <a:alpha val="90000"/>
                 <a:hueOff val="0"/>
                 <a:satOff val="0"/>
                 <a:lumOff val="0"/>
                 <a:alphaOff val="-20000"/>
-                <a:shade val="93000"/>
-                <a:satMod val="130000"/>
+                <a:tint val="86500"/>
+              </a:schemeClr>
+            </a:gs>
+            <a:gs pos="46750">
+              <a:schemeClr val="accent1">
+                <a:alpha val="90000"/>
+                <a:hueOff val="0"/>
+                <a:satOff val="0"/>
+                <a:lumOff val="0"/>
+                <a:alphaOff val="-20000"/>
+                <a:tint val="71000"/>
+                <a:satMod val="112000"/>
+              </a:schemeClr>
+            </a:gs>
+            <a:gs pos="53000">
+              <a:schemeClr val="accent1">
+                <a:alpha val="90000"/>
+                <a:hueOff val="0"/>
+                <a:satOff val="0"/>
+                <a:lumOff val="0"/>
+                <a:alphaOff val="-20000"/>
+                <a:tint val="71000"/>
+                <a:satMod val="112000"/>
+              </a:schemeClr>
+            </a:gs>
+            <a:gs pos="68000">
+              <a:schemeClr val="accent1">
+                <a:alpha val="90000"/>
+                <a:hueOff val="0"/>
+                <a:satOff val="0"/>
+                <a:lumOff val="0"/>
+                <a:alphaOff val="-20000"/>
+                <a:tint val="86000"/>
               </a:schemeClr>
             </a:gs>
             <a:gs pos="100000">
@@ -5980,20 +6254,19 @@
                 <a:satOff val="0"/>
                 <a:lumOff val="0"/>
                 <a:alphaOff val="-20000"/>
-                <a:shade val="94000"/>
-                <a:satMod val="135000"/>
+                <a:shade val="60000"/>
               </a:schemeClr>
             </a:gs>
           </a:gsLst>
-          <a:lin ang="16200000" scaled="0"/>
+          <a:lin ang="8350000" scaled="1"/>
         </a:gradFill>
         <a:ln>
           <a:noFill/>
         </a:ln>
         <a:effectLst>
-          <a:outerShdw blurRad="40000" dist="23000" dir="5400000" rotWithShape="0">
+          <a:outerShdw blurRad="190500" dist="228600" dir="2700000" sy="90000" rotWithShape="0">
             <a:srgbClr val="000000">
-              <a:alpha val="35000"/>
+              <a:alpha val="25500"/>
             </a:srgbClr>
           </a:outerShdw>
         </a:effectLst>
@@ -6066,46 +6339,75 @@
             <a:gs pos="0">
               <a:schemeClr val="accent1">
                 <a:shade val="90000"/>
-                <a:hueOff val="250074"/>
-                <a:satOff val="-4618"/>
-                <a:lumOff val="21418"/>
+                <a:hueOff val="-122535"/>
+                <a:satOff val="-2205"/>
+                <a:lumOff val="17897"/>
                 <a:alphaOff val="0"/>
-                <a:shade val="51000"/>
-                <a:satMod val="130000"/>
+                <a:shade val="60000"/>
               </a:schemeClr>
             </a:gs>
-            <a:gs pos="80000">
+            <a:gs pos="33000">
               <a:schemeClr val="accent1">
                 <a:shade val="90000"/>
-                <a:hueOff val="250074"/>
-                <a:satOff val="-4618"/>
-                <a:lumOff val="21418"/>
+                <a:hueOff val="-122535"/>
+                <a:satOff val="-2205"/>
+                <a:lumOff val="17897"/>
                 <a:alphaOff val="0"/>
-                <a:shade val="93000"/>
-                <a:satMod val="130000"/>
+                <a:tint val="86500"/>
+              </a:schemeClr>
+            </a:gs>
+            <a:gs pos="46750">
+              <a:schemeClr val="accent1">
+                <a:shade val="90000"/>
+                <a:hueOff val="-122535"/>
+                <a:satOff val="-2205"/>
+                <a:lumOff val="17897"/>
+                <a:alphaOff val="0"/>
+                <a:tint val="71000"/>
+                <a:satMod val="112000"/>
+              </a:schemeClr>
+            </a:gs>
+            <a:gs pos="53000">
+              <a:schemeClr val="accent1">
+                <a:shade val="90000"/>
+                <a:hueOff val="-122535"/>
+                <a:satOff val="-2205"/>
+                <a:lumOff val="17897"/>
+                <a:alphaOff val="0"/>
+                <a:tint val="71000"/>
+                <a:satMod val="112000"/>
+              </a:schemeClr>
+            </a:gs>
+            <a:gs pos="68000">
+              <a:schemeClr val="accent1">
+                <a:shade val="90000"/>
+                <a:hueOff val="-122535"/>
+                <a:satOff val="-2205"/>
+                <a:lumOff val="17897"/>
+                <a:alphaOff val="0"/>
+                <a:tint val="86000"/>
               </a:schemeClr>
             </a:gs>
             <a:gs pos="100000">
               <a:schemeClr val="accent1">
                 <a:shade val="90000"/>
-                <a:hueOff val="250074"/>
-                <a:satOff val="-4618"/>
-                <a:lumOff val="21418"/>
+                <a:hueOff val="-122535"/>
+                <a:satOff val="-2205"/>
+                <a:lumOff val="17897"/>
                 <a:alphaOff val="0"/>
-                <a:shade val="94000"/>
-                <a:satMod val="135000"/>
+                <a:shade val="60000"/>
               </a:schemeClr>
             </a:gs>
           </a:gsLst>
-          <a:lin ang="16200000" scaled="0"/>
+          <a:lin ang="8350000" scaled="1"/>
         </a:gradFill>
         <a:ln>
           <a:noFill/>
         </a:ln>
         <a:effectLst>
-          <a:outerShdw blurRad="40000" dist="23000" dir="5400000" rotWithShape="0">
+          <a:outerShdw blurRad="190500" dist="228600" dir="2700000" sy="90000" rotWithShape="0">
             <a:srgbClr val="000000">
-              <a:alpha val="35000"/>
+              <a:alpha val="25500"/>
             </a:srgbClr>
           </a:outerShdw>
         </a:effectLst>
@@ -6130,7 +6432,7 @@
         </a:bodyPr>
         <a:lstStyle/>
         <a:p>
-          <a:pPr lvl="0" algn="ctr" defTabSz="666750">
+          <a:pPr lvl="0" algn="ctr" defTabSz="711200">
             <a:lnSpc>
               <a:spcPct val="90000"/>
             </a:lnSpc>
@@ -6141,7 +6443,7 @@
               <a:spcPct val="35000"/>
             </a:spcAft>
           </a:pPr>
-          <a:endParaRPr lang="ru-RU" sz="1500" kern="1200"/>
+          <a:endParaRPr lang="ru-RU" sz="1600" kern="1200"/>
         </a:p>
       </dsp:txBody>
       <dsp:txXfrm>
@@ -6173,19 +6475,49 @@
                 <a:satOff val="0"/>
                 <a:lumOff val="0"/>
                 <a:alphaOff val="-30000"/>
-                <a:shade val="51000"/>
-                <a:satMod val="130000"/>
+                <a:shade val="60000"/>
               </a:schemeClr>
             </a:gs>
-            <a:gs pos="80000">
+            <a:gs pos="33000">
               <a:schemeClr val="accent1">
                 <a:alpha val="90000"/>
                 <a:hueOff val="0"/>
                 <a:satOff val="0"/>
                 <a:lumOff val="0"/>
                 <a:alphaOff val="-30000"/>
-                <a:shade val="93000"/>
-                <a:satMod val="130000"/>
+                <a:tint val="86500"/>
+              </a:schemeClr>
+            </a:gs>
+            <a:gs pos="46750">
+              <a:schemeClr val="accent1">
+                <a:alpha val="90000"/>
+                <a:hueOff val="0"/>
+                <a:satOff val="0"/>
+                <a:lumOff val="0"/>
+                <a:alphaOff val="-30000"/>
+                <a:tint val="71000"/>
+                <a:satMod val="112000"/>
+              </a:schemeClr>
+            </a:gs>
+            <a:gs pos="53000">
+              <a:schemeClr val="accent1">
+                <a:alpha val="90000"/>
+                <a:hueOff val="0"/>
+                <a:satOff val="0"/>
+                <a:lumOff val="0"/>
+                <a:alphaOff val="-30000"/>
+                <a:tint val="71000"/>
+                <a:satMod val="112000"/>
+              </a:schemeClr>
+            </a:gs>
+            <a:gs pos="68000">
+              <a:schemeClr val="accent1">
+                <a:alpha val="90000"/>
+                <a:hueOff val="0"/>
+                <a:satOff val="0"/>
+                <a:lumOff val="0"/>
+                <a:alphaOff val="-30000"/>
+                <a:tint val="86000"/>
               </a:schemeClr>
             </a:gs>
             <a:gs pos="100000">
@@ -6195,20 +6527,19 @@
                 <a:satOff val="0"/>
                 <a:lumOff val="0"/>
                 <a:alphaOff val="-30000"/>
-                <a:shade val="94000"/>
-                <a:satMod val="135000"/>
+                <a:shade val="60000"/>
               </a:schemeClr>
             </a:gs>
           </a:gsLst>
-          <a:lin ang="16200000" scaled="0"/>
+          <a:lin ang="8350000" scaled="1"/>
         </a:gradFill>
         <a:ln>
           <a:noFill/>
         </a:ln>
         <a:effectLst>
-          <a:outerShdw blurRad="40000" dist="23000" dir="5400000" rotWithShape="0">
+          <a:outerShdw blurRad="190500" dist="228600" dir="2700000" sy="90000" rotWithShape="0">
             <a:srgbClr val="000000">
-              <a:alpha val="35000"/>
+              <a:alpha val="25500"/>
             </a:srgbClr>
           </a:outerShdw>
         </a:effectLst>
@@ -6277,46 +6608,75 @@
             <a:gs pos="0">
               <a:schemeClr val="accent1">
                 <a:shade val="90000"/>
-                <a:hueOff val="375112"/>
-                <a:satOff val="-6927"/>
-                <a:lumOff val="32127"/>
+                <a:hueOff val="-183802"/>
+                <a:satOff val="-3307"/>
+                <a:lumOff val="26845"/>
                 <a:alphaOff val="0"/>
-                <a:shade val="51000"/>
-                <a:satMod val="130000"/>
+                <a:shade val="60000"/>
               </a:schemeClr>
             </a:gs>
-            <a:gs pos="80000">
+            <a:gs pos="33000">
               <a:schemeClr val="accent1">
                 <a:shade val="90000"/>
-                <a:hueOff val="375112"/>
-                <a:satOff val="-6927"/>
-                <a:lumOff val="32127"/>
+                <a:hueOff val="-183802"/>
+                <a:satOff val="-3307"/>
+                <a:lumOff val="26845"/>
                 <a:alphaOff val="0"/>
-                <a:shade val="93000"/>
-                <a:satMod val="130000"/>
+                <a:tint val="86500"/>
+              </a:schemeClr>
+            </a:gs>
+            <a:gs pos="46750">
+              <a:schemeClr val="accent1">
+                <a:shade val="90000"/>
+                <a:hueOff val="-183802"/>
+                <a:satOff val="-3307"/>
+                <a:lumOff val="26845"/>
+                <a:alphaOff val="0"/>
+                <a:tint val="71000"/>
+                <a:satMod val="112000"/>
+              </a:schemeClr>
+            </a:gs>
+            <a:gs pos="53000">
+              <a:schemeClr val="accent1">
+                <a:shade val="90000"/>
+                <a:hueOff val="-183802"/>
+                <a:satOff val="-3307"/>
+                <a:lumOff val="26845"/>
+                <a:alphaOff val="0"/>
+                <a:tint val="71000"/>
+                <a:satMod val="112000"/>
+              </a:schemeClr>
+            </a:gs>
+            <a:gs pos="68000">
+              <a:schemeClr val="accent1">
+                <a:shade val="90000"/>
+                <a:hueOff val="-183802"/>
+                <a:satOff val="-3307"/>
+                <a:lumOff val="26845"/>
+                <a:alphaOff val="0"/>
+                <a:tint val="86000"/>
               </a:schemeClr>
             </a:gs>
             <a:gs pos="100000">
               <a:schemeClr val="accent1">
                 <a:shade val="90000"/>
-                <a:hueOff val="375112"/>
-                <a:satOff val="-6927"/>
-                <a:lumOff val="32127"/>
+                <a:hueOff val="-183802"/>
+                <a:satOff val="-3307"/>
+                <a:lumOff val="26845"/>
                 <a:alphaOff val="0"/>
-                <a:shade val="94000"/>
-                <a:satMod val="135000"/>
+                <a:shade val="60000"/>
               </a:schemeClr>
             </a:gs>
           </a:gsLst>
-          <a:lin ang="16200000" scaled="0"/>
+          <a:lin ang="8350000" scaled="1"/>
         </a:gradFill>
         <a:ln>
           <a:noFill/>
         </a:ln>
         <a:effectLst>
-          <a:outerShdw blurRad="40000" dist="23000" dir="5400000" rotWithShape="0">
+          <a:outerShdw blurRad="190500" dist="228600" dir="2700000" sy="90000" rotWithShape="0">
             <a:srgbClr val="000000">
-              <a:alpha val="35000"/>
+              <a:alpha val="25500"/>
             </a:srgbClr>
           </a:outerShdw>
         </a:effectLst>
@@ -6341,7 +6701,7 @@
         </a:bodyPr>
         <a:lstStyle/>
         <a:p>
-          <a:pPr lvl="0" algn="ctr" defTabSz="666750">
+          <a:pPr lvl="0" algn="ctr" defTabSz="711200">
             <a:lnSpc>
               <a:spcPct val="90000"/>
             </a:lnSpc>
@@ -6352,7 +6712,7 @@
               <a:spcPct val="35000"/>
             </a:spcAft>
           </a:pPr>
-          <a:endParaRPr lang="ru-RU" sz="1500" kern="1200"/>
+          <a:endParaRPr lang="ru-RU" sz="1600" kern="1200"/>
         </a:p>
       </dsp:txBody>
       <dsp:txXfrm>
@@ -6384,19 +6744,49 @@
                 <a:satOff val="0"/>
                 <a:lumOff val="0"/>
                 <a:alphaOff val="-40000"/>
-                <a:shade val="51000"/>
-                <a:satMod val="130000"/>
+                <a:shade val="60000"/>
               </a:schemeClr>
             </a:gs>
-            <a:gs pos="80000">
+            <a:gs pos="33000">
               <a:schemeClr val="accent1">
                 <a:alpha val="90000"/>
                 <a:hueOff val="0"/>
                 <a:satOff val="0"/>
                 <a:lumOff val="0"/>
                 <a:alphaOff val="-40000"/>
-                <a:shade val="93000"/>
-                <a:satMod val="130000"/>
+                <a:tint val="86500"/>
+              </a:schemeClr>
+            </a:gs>
+            <a:gs pos="46750">
+              <a:schemeClr val="accent1">
+                <a:alpha val="90000"/>
+                <a:hueOff val="0"/>
+                <a:satOff val="0"/>
+                <a:lumOff val="0"/>
+                <a:alphaOff val="-40000"/>
+                <a:tint val="71000"/>
+                <a:satMod val="112000"/>
+              </a:schemeClr>
+            </a:gs>
+            <a:gs pos="53000">
+              <a:schemeClr val="accent1">
+                <a:alpha val="90000"/>
+                <a:hueOff val="0"/>
+                <a:satOff val="0"/>
+                <a:lumOff val="0"/>
+                <a:alphaOff val="-40000"/>
+                <a:tint val="71000"/>
+                <a:satMod val="112000"/>
+              </a:schemeClr>
+            </a:gs>
+            <a:gs pos="68000">
+              <a:schemeClr val="accent1">
+                <a:alpha val="90000"/>
+                <a:hueOff val="0"/>
+                <a:satOff val="0"/>
+                <a:lumOff val="0"/>
+                <a:alphaOff val="-40000"/>
+                <a:tint val="86000"/>
               </a:schemeClr>
             </a:gs>
             <a:gs pos="100000">
@@ -6406,20 +6796,19 @@
                 <a:satOff val="0"/>
                 <a:lumOff val="0"/>
                 <a:alphaOff val="-40000"/>
-                <a:shade val="94000"/>
-                <a:satMod val="135000"/>
+                <a:shade val="60000"/>
               </a:schemeClr>
             </a:gs>
           </a:gsLst>
-          <a:lin ang="16200000" scaled="0"/>
+          <a:lin ang="8350000" scaled="1"/>
         </a:gradFill>
         <a:ln>
           <a:noFill/>
         </a:ln>
         <a:effectLst>
-          <a:outerShdw blurRad="40000" dist="23000" dir="5400000" rotWithShape="0">
+          <a:outerShdw blurRad="190500" dist="228600" dir="2700000" sy="90000" rotWithShape="0">
             <a:srgbClr val="000000">
-              <a:alpha val="35000"/>
+              <a:alpha val="25500"/>
             </a:srgbClr>
           </a:outerShdw>
         </a:effectLst>
@@ -11302,7 +11691,7 @@
       </p:grpSpPr>
       <p:sp>
         <p:nvSpPr>
-          <p:cNvPr id="2" name="Заголовок 1"/>
+          <p:cNvPr id="8" name="Заголовок 7"/>
           <p:cNvSpPr>
             <a:spLocks noGrp="1"/>
           </p:cNvSpPr>
@@ -11312,25 +11701,139 @@
         </p:nvSpPr>
         <p:spPr>
           <a:xfrm>
-            <a:off x="685800" y="2130425"/>
-            <a:ext cx="7772400" cy="1470025"/>
+            <a:off x="422030" y="1371600"/>
+            <a:ext cx="8229600" cy="1828800"/>
           </a:xfrm>
         </p:spPr>
+        <p:txBody>
+          <a:bodyPr vert="horz" lIns="45720" tIns="0" rIns="45720" bIns="0" anchor="b">
+            <a:normAutofit/>
+            <a:scene3d>
+              <a:camera prst="orthographicFront"/>
+              <a:lightRig rig="soft" dir="t">
+                <a:rot lat="0" lon="0" rev="17220000"/>
+              </a:lightRig>
+            </a:scene3d>
+            <a:sp3d prstMaterial="softEdge">
+              <a:bevelT w="38100" h="38100"/>
+            </a:sp3d>
+          </a:bodyPr>
+          <a:lstStyle>
+            <a:lvl1pPr>
+              <a:defRPr sz="4800" b="1" cap="all" baseline="0">
+                <a:ln w="6350">
+                  <a:noFill/>
+                </a:ln>
+                <a:gradFill>
+                  <a:gsLst>
+                    <a:gs pos="0">
+                      <a:schemeClr val="accent1">
+                        <a:tint val="73000"/>
+                        <a:satMod val="145000"/>
+                      </a:schemeClr>
+                    </a:gs>
+                    <a:gs pos="73000">
+                      <a:schemeClr val="accent1">
+                        <a:tint val="73000"/>
+                        <a:satMod val="145000"/>
+                      </a:schemeClr>
+                    </a:gs>
+                    <a:gs pos="100000">
+                      <a:schemeClr val="accent1">
+                        <a:tint val="83000"/>
+                        <a:satMod val="143000"/>
+                      </a:schemeClr>
+                    </a:gs>
+                  </a:gsLst>
+                  <a:lin ang="4800000" scaled="1"/>
+                </a:gradFill>
+                <a:effectLst>
+                  <a:outerShdw blurRad="127000" dist="200000" dir="2700000" algn="tl" rotWithShape="0">
+                    <a:srgbClr val="000000">
+                      <a:alpha val="30000"/>
+                    </a:srgbClr>
+                  </a:outerShdw>
+                </a:effectLst>
+              </a:defRPr>
+            </a:lvl1pPr>
+          </a:lstStyle>
+          <a:p>
+            <a:r>
+              <a:rPr kumimoji="0" lang="ru-RU" smtClean="0"/>
+              <a:t>Образец заголовка</a:t>
+            </a:r>
+            <a:endParaRPr kumimoji="0" lang="en-US"/>
+          </a:p>
+        </p:txBody>
+      </p:sp>
+      <p:sp>
+        <p:nvSpPr>
+          <p:cNvPr id="28" name="Дата 27"/>
+          <p:cNvSpPr>
+            <a:spLocks noGrp="1"/>
+          </p:cNvSpPr>
+          <p:nvPr>
+            <p:ph type="dt" sz="half" idx="10"/>
+          </p:nvPr>
+        </p:nvSpPr>
+        <p:spPr/>
         <p:txBody>
           <a:bodyPr/>
           <a:lstStyle/>
           <a:p>
-            <a:r>
+            <a:fld id="{5B5CC06F-0F59-4AE7-909C-C5FEFEA5062E}" type="datetimeFigureOut">
               <a:rPr lang="ru-RU" smtClean="0"/>
-              <a:t>Образец заголовка</a:t>
-            </a:r>
+              <a:t>13.04.2026</a:t>
+            </a:fld>
             <a:endParaRPr lang="ru-RU"/>
           </a:p>
         </p:txBody>
       </p:sp>
       <p:sp>
         <p:nvSpPr>
-          <p:cNvPr id="3" name="Подзаголовок 2"/>
+          <p:cNvPr id="17" name="Нижний колонтитул 16"/>
+          <p:cNvSpPr>
+            <a:spLocks noGrp="1"/>
+          </p:cNvSpPr>
+          <p:nvPr>
+            <p:ph type="ftr" sz="quarter" idx="11"/>
+          </p:nvPr>
+        </p:nvSpPr>
+        <p:spPr/>
+        <p:txBody>
+          <a:bodyPr/>
+          <a:lstStyle/>
+          <a:p>
+            <a:endParaRPr lang="ru-RU"/>
+          </a:p>
+        </p:txBody>
+      </p:sp>
+      <p:sp>
+        <p:nvSpPr>
+          <p:cNvPr id="29" name="Номер слайда 28"/>
+          <p:cNvSpPr>
+            <a:spLocks noGrp="1"/>
+          </p:cNvSpPr>
+          <p:nvPr>
+            <p:ph type="sldNum" sz="quarter" idx="12"/>
+          </p:nvPr>
+        </p:nvSpPr>
+        <p:spPr/>
+        <p:txBody>
+          <a:bodyPr/>
+          <a:lstStyle/>
+          <a:p>
+            <a:fld id="{A2630A44-7D09-42A2-8A89-076861053AEB}" type="slidenum">
+              <a:rPr lang="ru-RU" smtClean="0"/>
+              <a:t>‹#›</a:t>
+            </a:fld>
+            <a:endParaRPr lang="ru-RU"/>
+          </a:p>
+        </p:txBody>
+      </p:sp>
+      <p:sp>
+        <p:nvSpPr>
+          <p:cNvPr id="9" name="Подзаголовок 8"/>
           <p:cNvSpPr>
             <a:spLocks noGrp="1"/>
           </p:cNvSpPr>
@@ -11340,7 +11843,7 @@
         </p:nvSpPr>
         <p:spPr>
           <a:xfrm>
-            <a:off x="1371600" y="3886200"/>
+            <a:off x="1371600" y="3331698"/>
             <a:ext cx="6400800" cy="1752600"/>
           </a:xfrm>
         </p:spPr>
@@ -11351,99 +11854,141 @@
               <a:buNone/>
               <a:defRPr>
                 <a:solidFill>
-                  <a:schemeClr val="tx1">
-                    <a:tint val="75000"/>
-                  </a:schemeClr>
+                  <a:schemeClr val="tx1"/>
                 </a:solidFill>
               </a:defRPr>
             </a:lvl1pPr>
             <a:lvl2pPr marL="457200" indent="0" algn="ctr">
               <a:buNone/>
-              <a:defRPr>
-                <a:solidFill>
-                  <a:schemeClr val="tx1">
-                    <a:tint val="75000"/>
-                  </a:schemeClr>
-                </a:solidFill>
-              </a:defRPr>
             </a:lvl2pPr>
             <a:lvl3pPr marL="914400" indent="0" algn="ctr">
               <a:buNone/>
-              <a:defRPr>
-                <a:solidFill>
-                  <a:schemeClr val="tx1">
-                    <a:tint val="75000"/>
-                  </a:schemeClr>
-                </a:solidFill>
-              </a:defRPr>
             </a:lvl3pPr>
             <a:lvl4pPr marL="1371600" indent="0" algn="ctr">
               <a:buNone/>
-              <a:defRPr>
-                <a:solidFill>
-                  <a:schemeClr val="tx1">
-                    <a:tint val="75000"/>
-                  </a:schemeClr>
-                </a:solidFill>
-              </a:defRPr>
             </a:lvl4pPr>
             <a:lvl5pPr marL="1828800" indent="0" algn="ctr">
               <a:buNone/>
-              <a:defRPr>
-                <a:solidFill>
-                  <a:schemeClr val="tx1">
-                    <a:tint val="75000"/>
-                  </a:schemeClr>
-                </a:solidFill>
-              </a:defRPr>
             </a:lvl5pPr>
             <a:lvl6pPr marL="2286000" indent="0" algn="ctr">
               <a:buNone/>
-              <a:defRPr>
-                <a:solidFill>
-                  <a:schemeClr val="tx1">
-                    <a:tint val="75000"/>
-                  </a:schemeClr>
-                </a:solidFill>
-              </a:defRPr>
             </a:lvl6pPr>
             <a:lvl7pPr marL="2743200" indent="0" algn="ctr">
               <a:buNone/>
-              <a:defRPr>
-                <a:solidFill>
-                  <a:schemeClr val="tx1">
-                    <a:tint val="75000"/>
-                  </a:schemeClr>
-                </a:solidFill>
-              </a:defRPr>
             </a:lvl7pPr>
             <a:lvl8pPr marL="3200400" indent="0" algn="ctr">
               <a:buNone/>
-              <a:defRPr>
-                <a:solidFill>
-                  <a:schemeClr val="tx1">
-                    <a:tint val="75000"/>
-                  </a:schemeClr>
-                </a:solidFill>
-              </a:defRPr>
             </a:lvl8pPr>
             <a:lvl9pPr marL="3657600" indent="0" algn="ctr">
               <a:buNone/>
-              <a:defRPr>
-                <a:solidFill>
-                  <a:schemeClr val="tx1">
-                    <a:tint val="75000"/>
-                  </a:schemeClr>
-                </a:solidFill>
-              </a:defRPr>
             </a:lvl9pPr>
           </a:lstStyle>
           <a:p>
             <a:r>
+              <a:rPr kumimoji="0" lang="ru-RU" smtClean="0"/>
+              <a:t>Образец подзаголовка</a:t>
+            </a:r>
+            <a:endParaRPr kumimoji="0" lang="en-US"/>
+          </a:p>
+        </p:txBody>
+      </p:sp>
+    </p:spTree>
+  </p:cSld>
+  <p:clrMapOvr>
+    <a:masterClrMapping/>
+  </p:clrMapOvr>
+</p:sldLayout>
+</file>
+
+<file path=ppt/slideLayouts/slideLayout10.xml><?xml version="1.0" encoding="utf-8"?>
+<p:sldLayout xmlns:a="http://schemas.openxmlformats.org/drawingml/2006/main" xmlns:r="http://schemas.openxmlformats.org/officeDocument/2006/relationships" xmlns:p="http://schemas.openxmlformats.org/presentationml/2006/main" type="vertTx" preserve="1">
+  <p:cSld name="Заголовок и вертикальный текст">
+    <p:spTree>
+      <p:nvGrpSpPr>
+        <p:cNvPr id="1" name=""/>
+        <p:cNvGrpSpPr/>
+        <p:nvPr/>
+      </p:nvGrpSpPr>
+      <p:grpSpPr>
+        <a:xfrm>
+          <a:off x="0" y="0"/>
+          <a:ext cx="0" cy="0"/>
+          <a:chOff x="0" y="0"/>
+          <a:chExt cx="0" cy="0"/>
+        </a:xfrm>
+      </p:grpSpPr>
+      <p:sp>
+        <p:nvSpPr>
+          <p:cNvPr id="2" name="Заголовок 1"/>
+          <p:cNvSpPr>
+            <a:spLocks noGrp="1"/>
+          </p:cNvSpPr>
+          <p:nvPr>
+            <p:ph type="title"/>
+          </p:nvPr>
+        </p:nvSpPr>
+        <p:spPr/>
+        <p:txBody>
+          <a:bodyPr/>
+          <a:lstStyle/>
+          <a:p>
+            <a:r>
+              <a:rPr kumimoji="0" lang="ru-RU" smtClean="0"/>
+              <a:t>Образец заголовка</a:t>
+            </a:r>
+            <a:endParaRPr kumimoji="0" lang="en-US"/>
+          </a:p>
+        </p:txBody>
+      </p:sp>
+      <p:sp>
+        <p:nvSpPr>
+          <p:cNvPr id="3" name="Вертикальный текст 2"/>
+          <p:cNvSpPr>
+            <a:spLocks noGrp="1"/>
+          </p:cNvSpPr>
+          <p:nvPr>
+            <p:ph type="body" orient="vert" idx="1"/>
+          </p:nvPr>
+        </p:nvSpPr>
+        <p:spPr/>
+        <p:txBody>
+          <a:bodyPr vert="eaVert"/>
+          <a:lstStyle/>
+          <a:p>
+            <a:pPr lvl="0" eaLnBrk="1" latinLnBrk="0" hangingPunct="1"/>
+            <a:r>
               <a:rPr lang="ru-RU" smtClean="0"/>
-              <a:t>Образец подзаголовка</a:t>
-            </a:r>
-            <a:endParaRPr lang="ru-RU"/>
+              <a:t>Образец текста</a:t>
+            </a:r>
+          </a:p>
+          <a:p>
+            <a:pPr lvl="1" eaLnBrk="1" latinLnBrk="0" hangingPunct="1"/>
+            <a:r>
+              <a:rPr lang="ru-RU" smtClean="0"/>
+              <a:t>Второй уровень</a:t>
+            </a:r>
+          </a:p>
+          <a:p>
+            <a:pPr lvl="2" eaLnBrk="1" latinLnBrk="0" hangingPunct="1"/>
+            <a:r>
+              <a:rPr lang="ru-RU" smtClean="0"/>
+              <a:t>Третий уровень</a:t>
+            </a:r>
+          </a:p>
+          <a:p>
+            <a:pPr lvl="3" eaLnBrk="1" latinLnBrk="0" hangingPunct="1"/>
+            <a:r>
+              <a:rPr lang="ru-RU" smtClean="0"/>
+              <a:t>Четвертый уровень</a:t>
+            </a:r>
+          </a:p>
+          <a:p>
+            <a:pPr lvl="4" eaLnBrk="1" latinLnBrk="0" hangingPunct="1"/>
+            <a:r>
+              <a:rPr lang="ru-RU" smtClean="0"/>
+              <a:t>Пятый уровень</a:t>
+            </a:r>
+            <a:endParaRPr kumimoji="0" lang="en-US"/>
           </a:p>
         </p:txBody>
       </p:sp>
@@ -11464,7 +12009,7 @@
           <a:p>
             <a:fld id="{5B5CC06F-0F59-4AE7-909C-C5FEFEA5062E}" type="datetimeFigureOut">
               <a:rPr lang="ru-RU" smtClean="0"/>
-              <a:t>09.04.2026</a:t>
+              <a:t>13.04.2026</a:t>
             </a:fld>
             <a:endParaRPr lang="ru-RU"/>
           </a:p>
@@ -11513,11 +12058,6 @@
         </p:txBody>
       </p:sp>
     </p:spTree>
-    <p:extLst>
-      <p:ext uri="{BB962C8B-B14F-4D97-AF65-F5344CB8AC3E}">
-        <p14:creationId xmlns:p14="http://schemas.microsoft.com/office/powerpoint/2010/main" val="2177516501"/>
-      </p:ext>
-    </p:extLst>
   </p:cSld>
   <p:clrMapOvr>
     <a:masterClrMapping/>
@@ -11525,9 +12065,9 @@
 </p:sldLayout>
 </file>
 
-<file path=ppt/slideLayouts/slideLayout10.xml><?xml version="1.0" encoding="utf-8"?>
-<p:sldLayout xmlns:a="http://schemas.openxmlformats.org/drawingml/2006/main" xmlns:r="http://schemas.openxmlformats.org/officeDocument/2006/relationships" xmlns:p="http://schemas.openxmlformats.org/presentationml/2006/main" type="vertTx" preserve="1">
-  <p:cSld name="Заголовок и вертикальный текст">
+<file path=ppt/slideLayouts/slideLayout11.xml><?xml version="1.0" encoding="utf-8"?>
+<p:sldLayout xmlns:a="http://schemas.openxmlformats.org/drawingml/2006/main" xmlns:r="http://schemas.openxmlformats.org/officeDocument/2006/relationships" xmlns:p="http://schemas.openxmlformats.org/presentationml/2006/main" type="vertTitleAndTx" preserve="1">
+  <p:cSld name="Вертикальный заголовок и текст">
     <p:spTree>
       <p:nvGrpSpPr>
         <p:cNvPr id="1" name=""/>
@@ -11544,24 +12084,29 @@
       </p:grpSpPr>
       <p:sp>
         <p:nvSpPr>
-          <p:cNvPr id="2" name="Заголовок 1"/>
+          <p:cNvPr id="2" name="Вертикальный заголовок 1"/>
           <p:cNvSpPr>
             <a:spLocks noGrp="1"/>
           </p:cNvSpPr>
           <p:nvPr>
-            <p:ph type="title"/>
+            <p:ph type="title" orient="vert"/>
           </p:nvPr>
         </p:nvSpPr>
-        <p:spPr/>
+        <p:spPr>
+          <a:xfrm>
+            <a:off x="6629400" y="274638"/>
+            <a:ext cx="2057400" cy="5851525"/>
+          </a:xfrm>
+        </p:spPr>
         <p:txBody>
-          <a:bodyPr/>
+          <a:bodyPr vert="eaVert"/>
           <a:lstStyle/>
           <a:p>
             <a:r>
-              <a:rPr lang="ru-RU" smtClean="0"/>
+              <a:rPr kumimoji="0" lang="ru-RU" smtClean="0"/>
               <a:t>Образец заголовка</a:t>
             </a:r>
-            <a:endParaRPr lang="ru-RU"/>
+            <a:endParaRPr kumimoji="0" lang="en-US"/>
           </a:p>
         </p:txBody>
       </p:sp>
@@ -11575,45 +12120,50 @@
             <p:ph type="body" orient="vert" idx="1"/>
           </p:nvPr>
         </p:nvSpPr>
-        <p:spPr/>
+        <p:spPr>
+          <a:xfrm>
+            <a:off x="457200" y="274638"/>
+            <a:ext cx="6019800" cy="5851525"/>
+          </a:xfrm>
+        </p:spPr>
         <p:txBody>
           <a:bodyPr vert="eaVert"/>
           <a:lstStyle/>
           <a:p>
-            <a:pPr lvl="0"/>
+            <a:pPr lvl="0" eaLnBrk="1" latinLnBrk="0" hangingPunct="1"/>
             <a:r>
               <a:rPr lang="ru-RU" smtClean="0"/>
               <a:t>Образец текста</a:t>
             </a:r>
           </a:p>
           <a:p>
-            <a:pPr lvl="1"/>
+            <a:pPr lvl="1" eaLnBrk="1" latinLnBrk="0" hangingPunct="1"/>
             <a:r>
               <a:rPr lang="ru-RU" smtClean="0"/>
               <a:t>Второй уровень</a:t>
             </a:r>
           </a:p>
           <a:p>
-            <a:pPr lvl="2"/>
+            <a:pPr lvl="2" eaLnBrk="1" latinLnBrk="0" hangingPunct="1"/>
             <a:r>
               <a:rPr lang="ru-RU" smtClean="0"/>
               <a:t>Третий уровень</a:t>
             </a:r>
           </a:p>
           <a:p>
-            <a:pPr lvl="3"/>
+            <a:pPr lvl="3" eaLnBrk="1" latinLnBrk="0" hangingPunct="1"/>
             <a:r>
               <a:rPr lang="ru-RU" smtClean="0"/>
               <a:t>Четвертый уровень</a:t>
             </a:r>
           </a:p>
           <a:p>
-            <a:pPr lvl="4"/>
+            <a:pPr lvl="4" eaLnBrk="1" latinLnBrk="0" hangingPunct="1"/>
             <a:r>
               <a:rPr lang="ru-RU" smtClean="0"/>
               <a:t>Пятый уровень</a:t>
             </a:r>
-            <a:endParaRPr lang="ru-RU"/>
+            <a:endParaRPr kumimoji="0" lang="en-US"/>
           </a:p>
         </p:txBody>
       </p:sp>
@@ -11634,7 +12184,7 @@
           <a:p>
             <a:fld id="{5B5CC06F-0F59-4AE7-909C-C5FEFEA5062E}" type="datetimeFigureOut">
               <a:rPr lang="ru-RU" smtClean="0"/>
-              <a:t>09.04.2026</a:t>
+              <a:t>13.04.2026</a:t>
             </a:fld>
             <a:endParaRPr lang="ru-RU"/>
           </a:p>
@@ -11683,11 +12233,6 @@
         </p:txBody>
       </p:sp>
     </p:spTree>
-    <p:extLst>
-      <p:ext uri="{BB962C8B-B14F-4D97-AF65-F5344CB8AC3E}">
-        <p14:creationId xmlns:p14="http://schemas.microsoft.com/office/powerpoint/2010/main" val="2056362813"/>
-      </p:ext>
-    </p:extLst>
   </p:cSld>
   <p:clrMapOvr>
     <a:masterClrMapping/>
@@ -11695,9 +12240,9 @@
 </p:sldLayout>
 </file>
 
-<file path=ppt/slideLayouts/slideLayout11.xml><?xml version="1.0" encoding="utf-8"?>
-<p:sldLayout xmlns:a="http://schemas.openxmlformats.org/drawingml/2006/main" xmlns:r="http://schemas.openxmlformats.org/officeDocument/2006/relationships" xmlns:p="http://schemas.openxmlformats.org/presentationml/2006/main" type="vertTitleAndTx" preserve="1">
-  <p:cSld name="Вертикальный заголовок и текст">
+<file path=ppt/slideLayouts/slideLayout2.xml><?xml version="1.0" encoding="utf-8"?>
+<p:sldLayout xmlns:a="http://schemas.openxmlformats.org/drawingml/2006/main" xmlns:r="http://schemas.openxmlformats.org/officeDocument/2006/relationships" xmlns:p="http://schemas.openxmlformats.org/presentationml/2006/main" type="obj" preserve="1">
+  <p:cSld name="Заголовок и объект">
     <p:spTree>
       <p:nvGrpSpPr>
         <p:cNvPr id="1" name=""/>
@@ -11714,86 +12259,76 @@
       </p:grpSpPr>
       <p:sp>
         <p:nvSpPr>
-          <p:cNvPr id="2" name="Вертикальный заголовок 1"/>
+          <p:cNvPr id="2" name="Заголовок 1"/>
           <p:cNvSpPr>
             <a:spLocks noGrp="1"/>
           </p:cNvSpPr>
           <p:nvPr>
-            <p:ph type="title" orient="vert"/>
+            <p:ph type="title"/>
           </p:nvPr>
         </p:nvSpPr>
-        <p:spPr>
-          <a:xfrm>
-            <a:off x="6629400" y="274638"/>
-            <a:ext cx="2057400" cy="5851525"/>
-          </a:xfrm>
-        </p:spPr>
+        <p:spPr/>
         <p:txBody>
-          <a:bodyPr vert="eaVert"/>
+          <a:bodyPr/>
           <a:lstStyle/>
           <a:p>
             <a:r>
-              <a:rPr lang="ru-RU" smtClean="0"/>
+              <a:rPr kumimoji="0" lang="ru-RU" smtClean="0"/>
               <a:t>Образец заголовка</a:t>
             </a:r>
-            <a:endParaRPr lang="ru-RU"/>
+            <a:endParaRPr kumimoji="0" lang="en-US"/>
           </a:p>
         </p:txBody>
       </p:sp>
       <p:sp>
         <p:nvSpPr>
-          <p:cNvPr id="3" name="Вертикальный текст 2"/>
+          <p:cNvPr id="3" name="Объект 2"/>
           <p:cNvSpPr>
             <a:spLocks noGrp="1"/>
           </p:cNvSpPr>
           <p:nvPr>
-            <p:ph type="body" orient="vert" idx="1"/>
+            <p:ph idx="1"/>
           </p:nvPr>
         </p:nvSpPr>
-        <p:spPr>
-          <a:xfrm>
-            <a:off x="457200" y="274638"/>
-            <a:ext cx="6019800" cy="5851525"/>
-          </a:xfrm>
-        </p:spPr>
+        <p:spPr/>
         <p:txBody>
-          <a:bodyPr vert="eaVert"/>
+          <a:bodyPr/>
           <a:lstStyle/>
           <a:p>
-            <a:pPr lvl="0"/>
+            <a:pPr lvl="0" eaLnBrk="1" latinLnBrk="0" hangingPunct="1"/>
             <a:r>
               <a:rPr lang="ru-RU" smtClean="0"/>
               <a:t>Образец текста</a:t>
             </a:r>
           </a:p>
           <a:p>
-            <a:pPr lvl="1"/>
+            <a:pPr lvl="1" eaLnBrk="1" latinLnBrk="0" hangingPunct="1"/>
             <a:r>
               <a:rPr lang="ru-RU" smtClean="0"/>
               <a:t>Второй уровень</a:t>
             </a:r>
           </a:p>
           <a:p>
-            <a:pPr lvl="2"/>
+            <a:pPr lvl="2" eaLnBrk="1" latinLnBrk="0" hangingPunct="1"/>
             <a:r>
               <a:rPr lang="ru-RU" smtClean="0"/>
               <a:t>Третий уровень</a:t>
             </a:r>
           </a:p>
           <a:p>
-            <a:pPr lvl="3"/>
+            <a:pPr lvl="3" eaLnBrk="1" latinLnBrk="0" hangingPunct="1"/>
             <a:r>
               <a:rPr lang="ru-RU" smtClean="0"/>
               <a:t>Четвертый уровень</a:t>
             </a:r>
           </a:p>
           <a:p>
-            <a:pPr lvl="4"/>
+            <a:pPr lvl="4" eaLnBrk="1" latinLnBrk="0" hangingPunct="1"/>
             <a:r>
               <a:rPr lang="ru-RU" smtClean="0"/>
               <a:t>Пятый уровень</a:t>
             </a:r>
-            <a:endParaRPr lang="ru-RU"/>
+            <a:endParaRPr kumimoji="0" lang="en-US"/>
           </a:p>
         </p:txBody>
       </p:sp>
@@ -11814,7 +12349,7 @@
           <a:p>
             <a:fld id="{5B5CC06F-0F59-4AE7-909C-C5FEFEA5062E}" type="datetimeFigureOut">
               <a:rPr lang="ru-RU" smtClean="0"/>
-              <a:t>09.04.2026</a:t>
+              <a:t>13.04.2026</a:t>
             </a:fld>
             <a:endParaRPr lang="ru-RU"/>
           </a:p>
@@ -11863,11 +12398,6 @@
         </p:txBody>
       </p:sp>
     </p:spTree>
-    <p:extLst>
-      <p:ext uri="{BB962C8B-B14F-4D97-AF65-F5344CB8AC3E}">
-        <p14:creationId xmlns:p14="http://schemas.microsoft.com/office/powerpoint/2010/main" val="2801369875"/>
-      </p:ext>
-    </p:extLst>
   </p:cSld>
   <p:clrMapOvr>
     <a:masterClrMapping/>
@@ -11875,9 +12405,14 @@
 </p:sldLayout>
 </file>
 
-<file path=ppt/slideLayouts/slideLayout2.xml><?xml version="1.0" encoding="utf-8"?>
-<p:sldLayout xmlns:a="http://schemas.openxmlformats.org/drawingml/2006/main" xmlns:r="http://schemas.openxmlformats.org/officeDocument/2006/relationships" xmlns:p="http://schemas.openxmlformats.org/presentationml/2006/main" type="obj" preserve="1">
-  <p:cSld name="Заголовок и объект">
+<file path=ppt/slideLayouts/slideLayout3.xml><?xml version="1.0" encoding="utf-8"?>
+<p:sldLayout xmlns:a="http://schemas.openxmlformats.org/drawingml/2006/main" xmlns:r="http://schemas.openxmlformats.org/officeDocument/2006/relationships" xmlns:p="http://schemas.openxmlformats.org/presentationml/2006/main" type="secHead" preserve="1">
+  <p:cSld name="Заголовок раздела">
+    <p:bg>
+      <p:bgRef idx="1003">
+        <a:schemeClr val="bg2"/>
+      </p:bgRef>
+    </p:bg>
     <p:spTree>
       <p:nvGrpSpPr>
         <p:cNvPr id="1" name=""/>
@@ -11902,68 +12437,142 @@
             <p:ph type="title"/>
           </p:nvPr>
         </p:nvSpPr>
-        <p:spPr/>
+        <p:spPr>
+          <a:xfrm>
+            <a:off x="1600200" y="609600"/>
+            <a:ext cx="7086600" cy="1828800"/>
+          </a:xfrm>
+        </p:spPr>
         <p:txBody>
-          <a:bodyPr/>
-          <a:lstStyle/>
+          <a:bodyPr vert="horz" bIns="0" anchor="b">
+            <a:noAutofit/>
+            <a:scene3d>
+              <a:camera prst="orthographicFront"/>
+              <a:lightRig rig="soft" dir="t">
+                <a:rot lat="0" lon="0" rev="17220000"/>
+              </a:lightRig>
+            </a:scene3d>
+            <a:sp3d prstMaterial="softEdge">
+              <a:bevelT w="38100" h="38100"/>
+              <a:contourClr>
+                <a:schemeClr val="tx2">
+                  <a:shade val="50000"/>
+                </a:schemeClr>
+              </a:contourClr>
+            </a:sp3d>
+          </a:bodyPr>
+          <a:lstStyle>
+            <a:lvl1pPr algn="l" rtl="0">
+              <a:spcBef>
+                <a:spcPct val="0"/>
+              </a:spcBef>
+              <a:buNone/>
+              <a:defRPr sz="4800" b="1" cap="none" baseline="0">
+                <a:ln w="6350">
+                  <a:noFill/>
+                </a:ln>
+                <a:solidFill>
+                  <a:schemeClr val="accent1">
+                    <a:tint val="90000"/>
+                    <a:satMod val="120000"/>
+                  </a:schemeClr>
+                </a:solidFill>
+                <a:effectLst>
+                  <a:outerShdw blurRad="114300" dist="101600" dir="2700000" algn="tl" rotWithShape="0">
+                    <a:srgbClr val="000000">
+                      <a:alpha val="40000"/>
+                    </a:srgbClr>
+                  </a:outerShdw>
+                </a:effectLst>
+                <a:latin typeface="+mj-lt"/>
+                <a:ea typeface="+mj-ea"/>
+                <a:cs typeface="+mj-cs"/>
+              </a:defRPr>
+            </a:lvl1pPr>
+          </a:lstStyle>
           <a:p>
             <a:r>
-              <a:rPr lang="ru-RU" smtClean="0"/>
+              <a:rPr kumimoji="0" lang="ru-RU" smtClean="0"/>
               <a:t>Образец заголовка</a:t>
             </a:r>
-            <a:endParaRPr lang="ru-RU"/>
+            <a:endParaRPr kumimoji="0" lang="en-US"/>
           </a:p>
         </p:txBody>
       </p:sp>
       <p:sp>
         <p:nvSpPr>
-          <p:cNvPr id="3" name="Объект 2"/>
+          <p:cNvPr id="3" name="Текст 2"/>
           <p:cNvSpPr>
             <a:spLocks noGrp="1"/>
           </p:cNvSpPr>
           <p:nvPr>
-            <p:ph idx="1"/>
+            <p:ph type="body" idx="1"/>
           </p:nvPr>
         </p:nvSpPr>
-        <p:spPr/>
+        <p:spPr>
+          <a:xfrm>
+            <a:off x="1600200" y="2507786"/>
+            <a:ext cx="7086600" cy="1509712"/>
+          </a:xfrm>
+        </p:spPr>
         <p:txBody>
-          <a:bodyPr/>
-          <a:lstStyle/>
+          <a:bodyPr anchor="t"/>
+          <a:lstStyle>
+            <a:lvl1pPr marL="73152" indent="0" algn="l">
+              <a:buNone/>
+              <a:defRPr sz="2000">
+                <a:solidFill>
+                  <a:schemeClr val="tx1"/>
+                </a:solidFill>
+              </a:defRPr>
+            </a:lvl1pPr>
+            <a:lvl2pPr>
+              <a:buNone/>
+              <a:defRPr sz="1800">
+                <a:solidFill>
+                  <a:schemeClr val="tx1">
+                    <a:tint val="75000"/>
+                  </a:schemeClr>
+                </a:solidFill>
+              </a:defRPr>
+            </a:lvl2pPr>
+            <a:lvl3pPr>
+              <a:buNone/>
+              <a:defRPr sz="1600">
+                <a:solidFill>
+                  <a:schemeClr val="tx1">
+                    <a:tint val="75000"/>
+                  </a:schemeClr>
+                </a:solidFill>
+              </a:defRPr>
+            </a:lvl3pPr>
+            <a:lvl4pPr>
+              <a:buNone/>
+              <a:defRPr sz="1400">
+                <a:solidFill>
+                  <a:schemeClr val="tx1">
+                    <a:tint val="75000"/>
+                  </a:schemeClr>
+                </a:solidFill>
+              </a:defRPr>
+            </a:lvl4pPr>
+            <a:lvl5pPr>
+              <a:buNone/>
+              <a:defRPr sz="1400">
+                <a:solidFill>
+                  <a:schemeClr val="tx1">
+                    <a:tint val="75000"/>
+                  </a:schemeClr>
+                </a:solidFill>
+              </a:defRPr>
+            </a:lvl5pPr>
+          </a:lstStyle>
           <a:p>
-            <a:pPr lvl="0"/>
-            <a:r>
-              <a:rPr lang="ru-RU" smtClean="0"/>
+            <a:pPr lvl="0" eaLnBrk="1" latinLnBrk="0" hangingPunct="1"/>
+            <a:r>
+              <a:rPr kumimoji="0" lang="ru-RU" smtClean="0"/>
               <a:t>Образец текста</a:t>
             </a:r>
-          </a:p>
-          <a:p>
-            <a:pPr lvl="1"/>
-            <a:r>
-              <a:rPr lang="ru-RU" smtClean="0"/>
-              <a:t>Второй уровень</a:t>
-            </a:r>
-          </a:p>
-          <a:p>
-            <a:pPr lvl="2"/>
-            <a:r>
-              <a:rPr lang="ru-RU" smtClean="0"/>
-              <a:t>Третий уровень</a:t>
-            </a:r>
-          </a:p>
-          <a:p>
-            <a:pPr lvl="3"/>
-            <a:r>
-              <a:rPr lang="ru-RU" smtClean="0"/>
-              <a:t>Четвертый уровень</a:t>
-            </a:r>
-          </a:p>
-          <a:p>
-            <a:pPr lvl="4"/>
-            <a:r>
-              <a:rPr lang="ru-RU" smtClean="0"/>
-              <a:t>Пятый уровень</a:t>
-            </a:r>
-            <a:endParaRPr lang="ru-RU"/>
           </a:p>
         </p:txBody>
       </p:sp>
@@ -11984,7 +12593,7 @@
           <a:p>
             <a:fld id="{5B5CC06F-0F59-4AE7-909C-C5FEFEA5062E}" type="datetimeFigureOut">
               <a:rPr lang="ru-RU" smtClean="0"/>
-              <a:t>09.04.2026</a:t>
+              <a:t>13.04.2026</a:t>
             </a:fld>
             <a:endParaRPr lang="ru-RU"/>
           </a:p>
@@ -12019,7 +12628,12 @@
             <p:ph type="sldNum" sz="quarter" idx="12"/>
           </p:nvPr>
         </p:nvSpPr>
-        <p:spPr/>
+        <p:spPr>
+          <a:xfrm>
+            <a:off x="7924800" y="6416675"/>
+            <a:ext cx="762000" cy="365125"/>
+          </a:xfrm>
+        </p:spPr>
         <p:txBody>
           <a:bodyPr/>
           <a:lstStyle/>
@@ -12033,260 +12647,9 @@
         </p:txBody>
       </p:sp>
     </p:spTree>
-    <p:extLst>
-      <p:ext uri="{BB962C8B-B14F-4D97-AF65-F5344CB8AC3E}">
-        <p14:creationId xmlns:p14="http://schemas.microsoft.com/office/powerpoint/2010/main" val="3922816206"/>
-      </p:ext>
-    </p:extLst>
   </p:cSld>
   <p:clrMapOvr>
-    <a:masterClrMapping/>
-  </p:clrMapOvr>
-</p:sldLayout>
-</file>
-
-<file path=ppt/slideLayouts/slideLayout3.xml><?xml version="1.0" encoding="utf-8"?>
-<p:sldLayout xmlns:a="http://schemas.openxmlformats.org/drawingml/2006/main" xmlns:r="http://schemas.openxmlformats.org/officeDocument/2006/relationships" xmlns:p="http://schemas.openxmlformats.org/presentationml/2006/main" type="secHead" preserve="1">
-  <p:cSld name="Заголовок раздела">
-    <p:spTree>
-      <p:nvGrpSpPr>
-        <p:cNvPr id="1" name=""/>
-        <p:cNvGrpSpPr/>
-        <p:nvPr/>
-      </p:nvGrpSpPr>
-      <p:grpSpPr>
-        <a:xfrm>
-          <a:off x="0" y="0"/>
-          <a:ext cx="0" cy="0"/>
-          <a:chOff x="0" y="0"/>
-          <a:chExt cx="0" cy="0"/>
-        </a:xfrm>
-      </p:grpSpPr>
-      <p:sp>
-        <p:nvSpPr>
-          <p:cNvPr id="2" name="Заголовок 1"/>
-          <p:cNvSpPr>
-            <a:spLocks noGrp="1"/>
-          </p:cNvSpPr>
-          <p:nvPr>
-            <p:ph type="title"/>
-          </p:nvPr>
-        </p:nvSpPr>
-        <p:spPr>
-          <a:xfrm>
-            <a:off x="722313" y="4406900"/>
-            <a:ext cx="7772400" cy="1362075"/>
-          </a:xfrm>
-        </p:spPr>
-        <p:txBody>
-          <a:bodyPr anchor="t"/>
-          <a:lstStyle>
-            <a:lvl1pPr algn="l">
-              <a:defRPr sz="4000" b="1" cap="all"/>
-            </a:lvl1pPr>
-          </a:lstStyle>
-          <a:p>
-            <a:r>
-              <a:rPr lang="ru-RU" smtClean="0"/>
-              <a:t>Образец заголовка</a:t>
-            </a:r>
-            <a:endParaRPr lang="ru-RU"/>
-          </a:p>
-        </p:txBody>
-      </p:sp>
-      <p:sp>
-        <p:nvSpPr>
-          <p:cNvPr id="3" name="Текст 2"/>
-          <p:cNvSpPr>
-            <a:spLocks noGrp="1"/>
-          </p:cNvSpPr>
-          <p:nvPr>
-            <p:ph type="body" idx="1"/>
-          </p:nvPr>
-        </p:nvSpPr>
-        <p:spPr>
-          <a:xfrm>
-            <a:off x="722313" y="2906713"/>
-            <a:ext cx="7772400" cy="1500187"/>
-          </a:xfrm>
-        </p:spPr>
-        <p:txBody>
-          <a:bodyPr anchor="b"/>
-          <a:lstStyle>
-            <a:lvl1pPr marL="0" indent="0">
-              <a:buNone/>
-              <a:defRPr sz="2000">
-                <a:solidFill>
-                  <a:schemeClr val="tx1">
-                    <a:tint val="75000"/>
-                  </a:schemeClr>
-                </a:solidFill>
-              </a:defRPr>
-            </a:lvl1pPr>
-            <a:lvl2pPr marL="457200" indent="0">
-              <a:buNone/>
-              <a:defRPr sz="1800">
-                <a:solidFill>
-                  <a:schemeClr val="tx1">
-                    <a:tint val="75000"/>
-                  </a:schemeClr>
-                </a:solidFill>
-              </a:defRPr>
-            </a:lvl2pPr>
-            <a:lvl3pPr marL="914400" indent="0">
-              <a:buNone/>
-              <a:defRPr sz="1600">
-                <a:solidFill>
-                  <a:schemeClr val="tx1">
-                    <a:tint val="75000"/>
-                  </a:schemeClr>
-                </a:solidFill>
-              </a:defRPr>
-            </a:lvl3pPr>
-            <a:lvl4pPr marL="1371600" indent="0">
-              <a:buNone/>
-              <a:defRPr sz="1400">
-                <a:solidFill>
-                  <a:schemeClr val="tx1">
-                    <a:tint val="75000"/>
-                  </a:schemeClr>
-                </a:solidFill>
-              </a:defRPr>
-            </a:lvl4pPr>
-            <a:lvl5pPr marL="1828800" indent="0">
-              <a:buNone/>
-              <a:defRPr sz="1400">
-                <a:solidFill>
-                  <a:schemeClr val="tx1">
-                    <a:tint val="75000"/>
-                  </a:schemeClr>
-                </a:solidFill>
-              </a:defRPr>
-            </a:lvl5pPr>
-            <a:lvl6pPr marL="2286000" indent="0">
-              <a:buNone/>
-              <a:defRPr sz="1400">
-                <a:solidFill>
-                  <a:schemeClr val="tx1">
-                    <a:tint val="75000"/>
-                  </a:schemeClr>
-                </a:solidFill>
-              </a:defRPr>
-            </a:lvl6pPr>
-            <a:lvl7pPr marL="2743200" indent="0">
-              <a:buNone/>
-              <a:defRPr sz="1400">
-                <a:solidFill>
-                  <a:schemeClr val="tx1">
-                    <a:tint val="75000"/>
-                  </a:schemeClr>
-                </a:solidFill>
-              </a:defRPr>
-            </a:lvl7pPr>
-            <a:lvl8pPr marL="3200400" indent="0">
-              <a:buNone/>
-              <a:defRPr sz="1400">
-                <a:solidFill>
-                  <a:schemeClr val="tx1">
-                    <a:tint val="75000"/>
-                  </a:schemeClr>
-                </a:solidFill>
-              </a:defRPr>
-            </a:lvl8pPr>
-            <a:lvl9pPr marL="3657600" indent="0">
-              <a:buNone/>
-              <a:defRPr sz="1400">
-                <a:solidFill>
-                  <a:schemeClr val="tx1">
-                    <a:tint val="75000"/>
-                  </a:schemeClr>
-                </a:solidFill>
-              </a:defRPr>
-            </a:lvl9pPr>
-          </a:lstStyle>
-          <a:p>
-            <a:pPr lvl="0"/>
-            <a:r>
-              <a:rPr lang="ru-RU" smtClean="0"/>
-              <a:t>Образец текста</a:t>
-            </a:r>
-          </a:p>
-        </p:txBody>
-      </p:sp>
-      <p:sp>
-        <p:nvSpPr>
-          <p:cNvPr id="4" name="Дата 3"/>
-          <p:cNvSpPr>
-            <a:spLocks noGrp="1"/>
-          </p:cNvSpPr>
-          <p:nvPr>
-            <p:ph type="dt" sz="half" idx="10"/>
-          </p:nvPr>
-        </p:nvSpPr>
-        <p:spPr/>
-        <p:txBody>
-          <a:bodyPr/>
-          <a:lstStyle/>
-          <a:p>
-            <a:fld id="{5B5CC06F-0F59-4AE7-909C-C5FEFEA5062E}" type="datetimeFigureOut">
-              <a:rPr lang="ru-RU" smtClean="0"/>
-              <a:t>09.04.2026</a:t>
-            </a:fld>
-            <a:endParaRPr lang="ru-RU"/>
-          </a:p>
-        </p:txBody>
-      </p:sp>
-      <p:sp>
-        <p:nvSpPr>
-          <p:cNvPr id="5" name="Нижний колонтитул 4"/>
-          <p:cNvSpPr>
-            <a:spLocks noGrp="1"/>
-          </p:cNvSpPr>
-          <p:nvPr>
-            <p:ph type="ftr" sz="quarter" idx="11"/>
-          </p:nvPr>
-        </p:nvSpPr>
-        <p:spPr/>
-        <p:txBody>
-          <a:bodyPr/>
-          <a:lstStyle/>
-          <a:p>
-            <a:endParaRPr lang="ru-RU"/>
-          </a:p>
-        </p:txBody>
-      </p:sp>
-      <p:sp>
-        <p:nvSpPr>
-          <p:cNvPr id="6" name="Номер слайда 5"/>
-          <p:cNvSpPr>
-            <a:spLocks noGrp="1"/>
-          </p:cNvSpPr>
-          <p:nvPr>
-            <p:ph type="sldNum" sz="quarter" idx="12"/>
-          </p:nvPr>
-        </p:nvSpPr>
-        <p:spPr/>
-        <p:txBody>
-          <a:bodyPr/>
-          <a:lstStyle/>
-          <a:p>
-            <a:fld id="{A2630A44-7D09-42A2-8A89-076861053AEB}" type="slidenum">
-              <a:rPr lang="ru-RU" smtClean="0"/>
-              <a:t>‹#›</a:t>
-            </a:fld>
-            <a:endParaRPr lang="ru-RU"/>
-          </a:p>
-        </p:txBody>
-      </p:sp>
-    </p:spTree>
-    <p:extLst>
-      <p:ext uri="{BB962C8B-B14F-4D97-AF65-F5344CB8AC3E}">
-        <p14:creationId xmlns:p14="http://schemas.microsoft.com/office/powerpoint/2010/main" val="3098106232"/>
-      </p:ext>
-    </p:extLst>
-  </p:cSld>
-  <p:clrMapOvr>
-    <a:masterClrMapping/>
+    <a:overrideClrMapping bg1="dk1" tx1="lt1" bg2="dk2" tx2="lt2" accent1="accent1" accent2="accent2" accent3="accent3" accent4="accent4" accent5="accent5" accent6="accent6" hlink="hlink" folHlink="folHlink"/>
   </p:clrMapOvr>
 </p:sldLayout>
 </file>
@@ -12324,10 +12687,10 @@
           <a:lstStyle/>
           <a:p>
             <a:r>
-              <a:rPr lang="ru-RU" smtClean="0"/>
+              <a:rPr kumimoji="0" lang="ru-RU" smtClean="0"/>
               <a:t>Образец заголовка</a:t>
             </a:r>
-            <a:endParaRPr lang="ru-RU"/>
+            <a:endParaRPr kumimoji="0" lang="en-US"/>
           </a:p>
         </p:txBody>
       </p:sp>
@@ -12351,7 +12714,7 @@
           <a:bodyPr/>
           <a:lstStyle>
             <a:lvl1pPr>
-              <a:defRPr sz="2800"/>
+              <a:defRPr sz="2600"/>
             </a:lvl1pPr>
             <a:lvl2pPr>
               <a:defRPr sz="2400"/>
@@ -12365,54 +12728,42 @@
             <a:lvl5pPr>
               <a:defRPr sz="1800"/>
             </a:lvl5pPr>
-            <a:lvl6pPr>
-              <a:defRPr sz="1800"/>
-            </a:lvl6pPr>
-            <a:lvl7pPr>
-              <a:defRPr sz="1800"/>
-            </a:lvl7pPr>
-            <a:lvl8pPr>
-              <a:defRPr sz="1800"/>
-            </a:lvl8pPr>
-            <a:lvl9pPr>
-              <a:defRPr sz="1800"/>
-            </a:lvl9pPr>
           </a:lstStyle>
           <a:p>
-            <a:pPr lvl="0"/>
+            <a:pPr lvl="0" eaLnBrk="1" latinLnBrk="0" hangingPunct="1"/>
             <a:r>
               <a:rPr lang="ru-RU" smtClean="0"/>
               <a:t>Образец текста</a:t>
             </a:r>
           </a:p>
           <a:p>
-            <a:pPr lvl="1"/>
+            <a:pPr lvl="1" eaLnBrk="1" latinLnBrk="0" hangingPunct="1"/>
             <a:r>
               <a:rPr lang="ru-RU" smtClean="0"/>
               <a:t>Второй уровень</a:t>
             </a:r>
           </a:p>
           <a:p>
-            <a:pPr lvl="2"/>
+            <a:pPr lvl="2" eaLnBrk="1" latinLnBrk="0" hangingPunct="1"/>
             <a:r>
               <a:rPr lang="ru-RU" smtClean="0"/>
               <a:t>Третий уровень</a:t>
             </a:r>
           </a:p>
           <a:p>
-            <a:pPr lvl="3"/>
+            <a:pPr lvl="3" eaLnBrk="1" latinLnBrk="0" hangingPunct="1"/>
             <a:r>
               <a:rPr lang="ru-RU" smtClean="0"/>
               <a:t>Четвертый уровень</a:t>
             </a:r>
           </a:p>
           <a:p>
-            <a:pPr lvl="4"/>
+            <a:pPr lvl="4" eaLnBrk="1" latinLnBrk="0" hangingPunct="1"/>
             <a:r>
               <a:rPr lang="ru-RU" smtClean="0"/>
               <a:t>Пятый уровень</a:t>
             </a:r>
-            <a:endParaRPr lang="ru-RU"/>
+            <a:endParaRPr kumimoji="0" lang="en-US"/>
           </a:p>
         </p:txBody>
       </p:sp>
@@ -12436,7 +12787,7 @@
           <a:bodyPr/>
           <a:lstStyle>
             <a:lvl1pPr>
-              <a:defRPr sz="2800"/>
+              <a:defRPr sz="2600"/>
             </a:lvl1pPr>
             <a:lvl2pPr>
               <a:defRPr sz="2400"/>
@@ -12450,54 +12801,42 @@
             <a:lvl5pPr>
               <a:defRPr sz="1800"/>
             </a:lvl5pPr>
-            <a:lvl6pPr>
-              <a:defRPr sz="1800"/>
-            </a:lvl6pPr>
-            <a:lvl7pPr>
-              <a:defRPr sz="1800"/>
-            </a:lvl7pPr>
-            <a:lvl8pPr>
-              <a:defRPr sz="1800"/>
-            </a:lvl8pPr>
-            <a:lvl9pPr>
-              <a:defRPr sz="1800"/>
-            </a:lvl9pPr>
           </a:lstStyle>
           <a:p>
-            <a:pPr lvl="0"/>
+            <a:pPr lvl="0" eaLnBrk="1" latinLnBrk="0" hangingPunct="1"/>
             <a:r>
               <a:rPr lang="ru-RU" smtClean="0"/>
               <a:t>Образец текста</a:t>
             </a:r>
           </a:p>
           <a:p>
-            <a:pPr lvl="1"/>
+            <a:pPr lvl="1" eaLnBrk="1" latinLnBrk="0" hangingPunct="1"/>
             <a:r>
               <a:rPr lang="ru-RU" smtClean="0"/>
               <a:t>Второй уровень</a:t>
             </a:r>
           </a:p>
           <a:p>
-            <a:pPr lvl="2"/>
+            <a:pPr lvl="2" eaLnBrk="1" latinLnBrk="0" hangingPunct="1"/>
             <a:r>
               <a:rPr lang="ru-RU" smtClean="0"/>
               <a:t>Третий уровень</a:t>
             </a:r>
           </a:p>
           <a:p>
-            <a:pPr lvl="3"/>
+            <a:pPr lvl="3" eaLnBrk="1" latinLnBrk="0" hangingPunct="1"/>
             <a:r>
               <a:rPr lang="ru-RU" smtClean="0"/>
               <a:t>Четвертый уровень</a:t>
             </a:r>
           </a:p>
           <a:p>
-            <a:pPr lvl="4"/>
+            <a:pPr lvl="4" eaLnBrk="1" latinLnBrk="0" hangingPunct="1"/>
             <a:r>
               <a:rPr lang="ru-RU" smtClean="0"/>
               <a:t>Пятый уровень</a:t>
             </a:r>
-            <a:endParaRPr lang="ru-RU"/>
+            <a:endParaRPr kumimoji="0" lang="en-US"/>
           </a:p>
         </p:txBody>
       </p:sp>
@@ -12518,7 +12857,7 @@
           <a:p>
             <a:fld id="{5B5CC06F-0F59-4AE7-909C-C5FEFEA5062E}" type="datetimeFigureOut">
               <a:rPr lang="ru-RU" smtClean="0"/>
-              <a:t>09.04.2026</a:t>
+              <a:t>13.04.2026</a:t>
             </a:fld>
             <a:endParaRPr lang="ru-RU"/>
           </a:p>
@@ -12567,11 +12906,6 @@
         </p:txBody>
       </p:sp>
     </p:spTree>
-    <p:extLst>
-      <p:ext uri="{BB962C8B-B14F-4D97-AF65-F5344CB8AC3E}">
-        <p14:creationId xmlns:p14="http://schemas.microsoft.com/office/powerpoint/2010/main" val="2595322350"/>
-      </p:ext>
-    </p:extLst>
   </p:cSld>
   <p:clrMapOvr>
     <a:masterClrMapping/>
@@ -12606,9 +12940,14 @@
             <p:ph type="title"/>
           </p:nvPr>
         </p:nvSpPr>
-        <p:spPr/>
+        <p:spPr>
+          <a:xfrm>
+            <a:off x="457200" y="273050"/>
+            <a:ext cx="8229600" cy="1143000"/>
+          </a:xfrm>
+        </p:spPr>
         <p:txBody>
-          <a:bodyPr/>
+          <a:bodyPr anchor="ctr"/>
           <a:lstStyle>
             <a:lvl1pPr>
               <a:defRPr/>
@@ -12616,10 +12955,10 @@
           </a:lstStyle>
           <a:p>
             <a:r>
-              <a:rPr lang="ru-RU" smtClean="0"/>
+              <a:rPr kumimoji="0" lang="ru-RU" smtClean="0"/>
               <a:t>Образец заголовка</a:t>
             </a:r>
-            <a:endParaRPr lang="ru-RU"/>
+            <a:endParaRPr kumimoji="0" lang="en-US"/>
           </a:p>
         </p:txBody>
       </p:sp>
@@ -12635,54 +12974,42 @@
         </p:nvSpPr>
         <p:spPr>
           <a:xfrm>
-            <a:off x="457200" y="1535113"/>
-            <a:ext cx="4040188" cy="639762"/>
+            <a:off x="457200" y="1535112"/>
+            <a:ext cx="4040188" cy="750887"/>
           </a:xfrm>
         </p:spPr>
         <p:txBody>
-          <a:bodyPr anchor="b"/>
+          <a:bodyPr anchor="ctr"/>
           <a:lstStyle>
             <a:lvl1pPr marL="0" indent="0">
               <a:buNone/>
-              <a:defRPr sz="2400" b="1"/>
+              <a:defRPr sz="2400" b="0" cap="all" baseline="0">
+                <a:solidFill>
+                  <a:schemeClr val="tx1"/>
+                </a:solidFill>
+              </a:defRPr>
             </a:lvl1pPr>
-            <a:lvl2pPr marL="457200" indent="0">
+            <a:lvl2pPr>
               <a:buNone/>
               <a:defRPr sz="2000" b="1"/>
             </a:lvl2pPr>
-            <a:lvl3pPr marL="914400" indent="0">
+            <a:lvl3pPr>
               <a:buNone/>
               <a:defRPr sz="1800" b="1"/>
             </a:lvl3pPr>
-            <a:lvl4pPr marL="1371600" indent="0">
+            <a:lvl4pPr>
               <a:buNone/>
               <a:defRPr sz="1600" b="1"/>
             </a:lvl4pPr>
-            <a:lvl5pPr marL="1828800" indent="0">
+            <a:lvl5pPr>
               <a:buNone/>
               <a:defRPr sz="1600" b="1"/>
             </a:lvl5pPr>
-            <a:lvl6pPr marL="2286000" indent="0">
-              <a:buNone/>
-              <a:defRPr sz="1600" b="1"/>
-            </a:lvl6pPr>
-            <a:lvl7pPr marL="2743200" indent="0">
-              <a:buNone/>
-              <a:defRPr sz="1600" b="1"/>
-            </a:lvl7pPr>
-            <a:lvl8pPr marL="3200400" indent="0">
-              <a:buNone/>
-              <a:defRPr sz="1600" b="1"/>
-            </a:lvl8pPr>
-            <a:lvl9pPr marL="3657600" indent="0">
-              <a:buNone/>
-              <a:defRPr sz="1600" b="1"/>
-            </a:lvl9pPr>
           </a:lstStyle>
           <a:p>
-            <a:pPr lvl="0"/>
-            <a:r>
-              <a:rPr lang="ru-RU" smtClean="0"/>
+            <a:pPr lvl="0" eaLnBrk="1" latinLnBrk="0" hangingPunct="1"/>
+            <a:r>
+              <a:rPr kumimoji="0" lang="ru-RU" smtClean="0"/>
               <a:t>Образец текста</a:t>
             </a:r>
           </a:p>
@@ -12690,18 +13017,71 @@
       </p:sp>
       <p:sp>
         <p:nvSpPr>
-          <p:cNvPr id="4" name="Объект 3"/>
+          <p:cNvPr id="4" name="Текст 3"/>
           <p:cNvSpPr>
             <a:spLocks noGrp="1"/>
           </p:cNvSpPr>
           <p:nvPr>
-            <p:ph sz="half" idx="2"/>
+            <p:ph type="body" sz="half" idx="3"/>
           </p:nvPr>
         </p:nvSpPr>
         <p:spPr>
           <a:xfrm>
-            <a:off x="457200" y="2174875"/>
-            <a:ext cx="4040188" cy="3951288"/>
+            <a:off x="4645025" y="1535112"/>
+            <a:ext cx="4041775" cy="750887"/>
+          </a:xfrm>
+        </p:spPr>
+        <p:txBody>
+          <a:bodyPr anchor="ctr"/>
+          <a:lstStyle>
+            <a:lvl1pPr marL="0" indent="0">
+              <a:buNone/>
+              <a:defRPr sz="2400" b="0" cap="all" baseline="0">
+                <a:solidFill>
+                  <a:schemeClr val="tx1"/>
+                </a:solidFill>
+              </a:defRPr>
+            </a:lvl1pPr>
+            <a:lvl2pPr>
+              <a:buNone/>
+              <a:defRPr sz="2000" b="1"/>
+            </a:lvl2pPr>
+            <a:lvl3pPr>
+              <a:buNone/>
+              <a:defRPr sz="1800" b="1"/>
+            </a:lvl3pPr>
+            <a:lvl4pPr>
+              <a:buNone/>
+              <a:defRPr sz="1600" b="1"/>
+            </a:lvl4pPr>
+            <a:lvl5pPr>
+              <a:buNone/>
+              <a:defRPr sz="1600" b="1"/>
+            </a:lvl5pPr>
+          </a:lstStyle>
+          <a:p>
+            <a:pPr lvl="0" eaLnBrk="1" latinLnBrk="0" hangingPunct="1"/>
+            <a:r>
+              <a:rPr kumimoji="0" lang="ru-RU" smtClean="0"/>
+              <a:t>Образец текста</a:t>
+            </a:r>
+          </a:p>
+        </p:txBody>
+      </p:sp>
+      <p:sp>
+        <p:nvSpPr>
+          <p:cNvPr id="5" name="Объект 4"/>
+          <p:cNvSpPr>
+            <a:spLocks noGrp="1"/>
+          </p:cNvSpPr>
+          <p:nvPr>
+            <p:ph sz="quarter" idx="2"/>
+          </p:nvPr>
+        </p:nvSpPr>
+        <p:spPr>
+          <a:xfrm>
+            <a:off x="457200" y="2362200"/>
+            <a:ext cx="4040188" cy="3763963"/>
           </a:xfrm>
         </p:spPr>
         <p:txBody>
@@ -12722,119 +13102,42 @@
             <a:lvl5pPr>
               <a:defRPr sz="1600"/>
             </a:lvl5pPr>
-            <a:lvl6pPr>
-              <a:defRPr sz="1600"/>
-            </a:lvl6pPr>
-            <a:lvl7pPr>
-              <a:defRPr sz="1600"/>
-            </a:lvl7pPr>
-            <a:lvl8pPr>
-              <a:defRPr sz="1600"/>
-            </a:lvl8pPr>
-            <a:lvl9pPr>
-              <a:defRPr sz="1600"/>
-            </a:lvl9pPr>
           </a:lstStyle>
           <a:p>
-            <a:pPr lvl="0"/>
+            <a:pPr lvl="0" eaLnBrk="1" latinLnBrk="0" hangingPunct="1"/>
             <a:r>
               <a:rPr lang="ru-RU" smtClean="0"/>
               <a:t>Образец текста</a:t>
             </a:r>
           </a:p>
           <a:p>
-            <a:pPr lvl="1"/>
+            <a:pPr lvl="1" eaLnBrk="1" latinLnBrk="0" hangingPunct="1"/>
             <a:r>
               <a:rPr lang="ru-RU" smtClean="0"/>
               <a:t>Второй уровень</a:t>
             </a:r>
           </a:p>
           <a:p>
-            <a:pPr lvl="2"/>
+            <a:pPr lvl="2" eaLnBrk="1" latinLnBrk="0" hangingPunct="1"/>
             <a:r>
               <a:rPr lang="ru-RU" smtClean="0"/>
               <a:t>Третий уровень</a:t>
             </a:r>
           </a:p>
           <a:p>
-            <a:pPr lvl="3"/>
+            <a:pPr lvl="3" eaLnBrk="1" latinLnBrk="0" hangingPunct="1"/>
             <a:r>
               <a:rPr lang="ru-RU" smtClean="0"/>
               <a:t>Четвертый уровень</a:t>
             </a:r>
           </a:p>
           <a:p>
-            <a:pPr lvl="4"/>
+            <a:pPr lvl="4" eaLnBrk="1" latinLnBrk="0" hangingPunct="1"/>
             <a:r>
               <a:rPr lang="ru-RU" smtClean="0"/>
               <a:t>Пятый уровень</a:t>
             </a:r>
-            <a:endParaRPr lang="ru-RU"/>
-          </a:p>
-        </p:txBody>
-      </p:sp>
-      <p:sp>
-        <p:nvSpPr>
-          <p:cNvPr id="5" name="Текст 4"/>
-          <p:cNvSpPr>
-            <a:spLocks noGrp="1"/>
-          </p:cNvSpPr>
-          <p:nvPr>
-            <p:ph type="body" sz="quarter" idx="3"/>
-          </p:nvPr>
-        </p:nvSpPr>
-        <p:spPr>
-          <a:xfrm>
-            <a:off x="4645025" y="1535113"/>
-            <a:ext cx="4041775" cy="639762"/>
-          </a:xfrm>
-        </p:spPr>
-        <p:txBody>
-          <a:bodyPr anchor="b"/>
-          <a:lstStyle>
-            <a:lvl1pPr marL="0" indent="0">
-              <a:buNone/>
-              <a:defRPr sz="2400" b="1"/>
-            </a:lvl1pPr>
-            <a:lvl2pPr marL="457200" indent="0">
-              <a:buNone/>
-              <a:defRPr sz="2000" b="1"/>
-            </a:lvl2pPr>
-            <a:lvl3pPr marL="914400" indent="0">
-              <a:buNone/>
-              <a:defRPr sz="1800" b="1"/>
-            </a:lvl3pPr>
-            <a:lvl4pPr marL="1371600" indent="0">
-              <a:buNone/>
-              <a:defRPr sz="1600" b="1"/>
-            </a:lvl4pPr>
-            <a:lvl5pPr marL="1828800" indent="0">
-              <a:buNone/>
-              <a:defRPr sz="1600" b="1"/>
-            </a:lvl5pPr>
-            <a:lvl6pPr marL="2286000" indent="0">
-              <a:buNone/>
-              <a:defRPr sz="1600" b="1"/>
-            </a:lvl6pPr>
-            <a:lvl7pPr marL="2743200" indent="0">
-              <a:buNone/>
-              <a:defRPr sz="1600" b="1"/>
-            </a:lvl7pPr>
-            <a:lvl8pPr marL="3200400" indent="0">
-              <a:buNone/>
-              <a:defRPr sz="1600" b="1"/>
-            </a:lvl8pPr>
-            <a:lvl9pPr marL="3657600" indent="0">
-              <a:buNone/>
-              <a:defRPr sz="1600" b="1"/>
-            </a:lvl9pPr>
-          </a:lstStyle>
-          <a:p>
-            <a:pPr lvl="0"/>
-            <a:r>
-              <a:rPr lang="ru-RU" smtClean="0"/>
-              <a:t>Образец текста</a:t>
-            </a:r>
+            <a:endParaRPr kumimoji="0" lang="en-US"/>
           </a:p>
         </p:txBody>
       </p:sp>
@@ -12850,8 +13153,8 @@
         </p:nvSpPr>
         <p:spPr>
           <a:xfrm>
-            <a:off x="4645025" y="2174875"/>
-            <a:ext cx="4041775" cy="3951288"/>
+            <a:off x="4645025" y="2362200"/>
+            <a:ext cx="4041775" cy="3763963"/>
           </a:xfrm>
         </p:spPr>
         <p:txBody>
@@ -12872,54 +13175,42 @@
             <a:lvl5pPr>
               <a:defRPr sz="1600"/>
             </a:lvl5pPr>
-            <a:lvl6pPr>
-              <a:defRPr sz="1600"/>
-            </a:lvl6pPr>
-            <a:lvl7pPr>
-              <a:defRPr sz="1600"/>
-            </a:lvl7pPr>
-            <a:lvl8pPr>
-              <a:defRPr sz="1600"/>
-            </a:lvl8pPr>
-            <a:lvl9pPr>
-              <a:defRPr sz="1600"/>
-            </a:lvl9pPr>
           </a:lstStyle>
           <a:p>
-            <a:pPr lvl="0"/>
+            <a:pPr lvl="0" eaLnBrk="1" latinLnBrk="0" hangingPunct="1"/>
             <a:r>
               <a:rPr lang="ru-RU" smtClean="0"/>
               <a:t>Образец текста</a:t>
             </a:r>
           </a:p>
           <a:p>
-            <a:pPr lvl="1"/>
+            <a:pPr lvl="1" eaLnBrk="1" latinLnBrk="0" hangingPunct="1"/>
             <a:r>
               <a:rPr lang="ru-RU" smtClean="0"/>
               <a:t>Второй уровень</a:t>
             </a:r>
           </a:p>
           <a:p>
-            <a:pPr lvl="2"/>
+            <a:pPr lvl="2" eaLnBrk="1" latinLnBrk="0" hangingPunct="1"/>
             <a:r>
               <a:rPr lang="ru-RU" smtClean="0"/>
               <a:t>Третий уровень</a:t>
             </a:r>
           </a:p>
           <a:p>
-            <a:pPr lvl="3"/>
+            <a:pPr lvl="3" eaLnBrk="1" latinLnBrk="0" hangingPunct="1"/>
             <a:r>
               <a:rPr lang="ru-RU" smtClean="0"/>
               <a:t>Четвертый уровень</a:t>
             </a:r>
           </a:p>
           <a:p>
-            <a:pPr lvl="4"/>
+            <a:pPr lvl="4" eaLnBrk="1" latinLnBrk="0" hangingPunct="1"/>
             <a:r>
               <a:rPr lang="ru-RU" smtClean="0"/>
               <a:t>Пятый уровень</a:t>
             </a:r>
-            <a:endParaRPr lang="ru-RU"/>
+            <a:endParaRPr kumimoji="0" lang="en-US"/>
           </a:p>
         </p:txBody>
       </p:sp>
@@ -12940,7 +13231,7 @@
           <a:p>
             <a:fld id="{5B5CC06F-0F59-4AE7-909C-C5FEFEA5062E}" type="datetimeFigureOut">
               <a:rPr lang="ru-RU" smtClean="0"/>
-              <a:t>09.04.2026</a:t>
+              <a:t>13.04.2026</a:t>
             </a:fld>
             <a:endParaRPr lang="ru-RU"/>
           </a:p>
@@ -12989,11 +13280,6 @@
         </p:txBody>
       </p:sp>
     </p:spTree>
-    <p:extLst>
-      <p:ext uri="{BB962C8B-B14F-4D97-AF65-F5344CB8AC3E}">
-        <p14:creationId xmlns:p14="http://schemas.microsoft.com/office/powerpoint/2010/main" val="140281935"/>
-      </p:ext>
-    </p:extLst>
   </p:cSld>
   <p:clrMapOvr>
     <a:masterClrMapping/>
@@ -13034,10 +13320,10 @@
           <a:lstStyle/>
           <a:p>
             <a:r>
-              <a:rPr lang="ru-RU" smtClean="0"/>
+              <a:rPr kumimoji="0" lang="ru-RU" smtClean="0"/>
               <a:t>Образец заголовка</a:t>
             </a:r>
-            <a:endParaRPr lang="ru-RU"/>
+            <a:endParaRPr kumimoji="0" lang="en-US"/>
           </a:p>
         </p:txBody>
       </p:sp>
@@ -13058,7 +13344,7 @@
           <a:p>
             <a:fld id="{5B5CC06F-0F59-4AE7-909C-C5FEFEA5062E}" type="datetimeFigureOut">
               <a:rPr lang="ru-RU" smtClean="0"/>
-              <a:t>09.04.2026</a:t>
+              <a:t>13.04.2026</a:t>
             </a:fld>
             <a:endParaRPr lang="ru-RU"/>
           </a:p>
@@ -13107,11 +13393,6 @@
         </p:txBody>
       </p:sp>
     </p:spTree>
-    <p:extLst>
-      <p:ext uri="{BB962C8B-B14F-4D97-AF65-F5344CB8AC3E}">
-        <p14:creationId xmlns:p14="http://schemas.microsoft.com/office/powerpoint/2010/main" val="4213947733"/>
-      </p:ext>
-    </p:extLst>
   </p:cSld>
   <p:clrMapOvr>
     <a:masterClrMapping/>
@@ -13153,7 +13434,7 @@
           <a:p>
             <a:fld id="{5B5CC06F-0F59-4AE7-909C-C5FEFEA5062E}" type="datetimeFigureOut">
               <a:rPr lang="ru-RU" smtClean="0"/>
-              <a:t>09.04.2026</a:t>
+              <a:t>13.04.2026</a:t>
             </a:fld>
             <a:endParaRPr lang="ru-RU"/>
           </a:p>
@@ -13202,11 +13483,6 @@
         </p:txBody>
       </p:sp>
     </p:spTree>
-    <p:extLst>
-      <p:ext uri="{BB962C8B-B14F-4D97-AF65-F5344CB8AC3E}">
-        <p14:creationId xmlns:p14="http://schemas.microsoft.com/office/powerpoint/2010/main" val="124411279"/>
-      </p:ext>
-    </p:extLst>
   </p:cSld>
   <p:clrMapOvr>
     <a:masterClrMapping/>
@@ -13248,29 +13524,92 @@
           </a:xfrm>
         </p:spPr>
         <p:txBody>
-          <a:bodyPr anchor="b"/>
+          <a:bodyPr vert="horz" anchor="b">
+            <a:normAutofit/>
+            <a:sp3d prstMaterial="softEdge"/>
+          </a:bodyPr>
           <a:lstStyle>
             <a:lvl1pPr algn="l">
-              <a:defRPr sz="2000" b="1"/>
+              <a:buNone/>
+              <a:defRPr sz="2200" b="0">
+                <a:ln w="6350">
+                  <a:noFill/>
+                </a:ln>
+                <a:solidFill>
+                  <a:schemeClr val="accent1">
+                    <a:tint val="73000"/>
+                    <a:satMod val="180000"/>
+                  </a:schemeClr>
+                </a:solidFill>
+              </a:defRPr>
             </a:lvl1pPr>
           </a:lstStyle>
           <a:p>
             <a:r>
-              <a:rPr lang="ru-RU" smtClean="0"/>
+              <a:rPr kumimoji="0" lang="ru-RU" smtClean="0"/>
               <a:t>Образец заголовка</a:t>
             </a:r>
-            <a:endParaRPr lang="ru-RU"/>
+            <a:endParaRPr kumimoji="0" lang="en-US"/>
           </a:p>
         </p:txBody>
       </p:sp>
       <p:sp>
         <p:nvSpPr>
-          <p:cNvPr id="3" name="Объект 2"/>
+          <p:cNvPr id="3" name="Текст 2"/>
           <p:cNvSpPr>
             <a:spLocks noGrp="1"/>
           </p:cNvSpPr>
           <p:nvPr>
-            <p:ph idx="1"/>
+            <p:ph type="body" idx="2"/>
+          </p:nvPr>
+        </p:nvSpPr>
+        <p:spPr>
+          <a:xfrm>
+            <a:off x="457200" y="1524000"/>
+            <a:ext cx="3008313" cy="4602163"/>
+          </a:xfrm>
+        </p:spPr>
+        <p:txBody>
+          <a:bodyPr/>
+          <a:lstStyle>
+            <a:lvl1pPr marL="0" indent="0">
+              <a:buNone/>
+              <a:defRPr sz="1400"/>
+            </a:lvl1pPr>
+            <a:lvl2pPr>
+              <a:buNone/>
+              <a:defRPr sz="1200"/>
+            </a:lvl2pPr>
+            <a:lvl3pPr>
+              <a:buNone/>
+              <a:defRPr sz="1000"/>
+            </a:lvl3pPr>
+            <a:lvl4pPr>
+              <a:buNone/>
+              <a:defRPr sz="900"/>
+            </a:lvl4pPr>
+            <a:lvl5pPr>
+              <a:buNone/>
+              <a:defRPr sz="900"/>
+            </a:lvl5pPr>
+          </a:lstStyle>
+          <a:p>
+            <a:pPr lvl="0" eaLnBrk="1" latinLnBrk="0" hangingPunct="1"/>
+            <a:r>
+              <a:rPr kumimoji="0" lang="ru-RU" smtClean="0"/>
+              <a:t>Образец текста</a:t>
+            </a:r>
+          </a:p>
+        </p:txBody>
+      </p:sp>
+      <p:sp>
+        <p:nvSpPr>
+          <p:cNvPr id="4" name="Объект 3"/>
+          <p:cNvSpPr>
+            <a:spLocks noGrp="1"/>
+          </p:cNvSpPr>
+          <p:nvPr>
+            <p:ph sz="half" idx="1"/>
           </p:nvPr>
         </p:nvSpPr>
         <p:spPr>
@@ -13283,133 +13622,56 @@
           <a:bodyPr/>
           <a:lstStyle>
             <a:lvl1pPr>
-              <a:defRPr sz="3200"/>
+              <a:defRPr sz="2600"/>
             </a:lvl1pPr>
             <a:lvl2pPr>
-              <a:defRPr sz="2800"/>
+              <a:defRPr sz="2400"/>
             </a:lvl2pPr>
             <a:lvl3pPr>
-              <a:defRPr sz="2400"/>
+              <a:defRPr sz="2200"/>
             </a:lvl3pPr>
             <a:lvl4pPr>
               <a:defRPr sz="2000"/>
             </a:lvl4pPr>
             <a:lvl5pPr>
-              <a:defRPr sz="2000"/>
+              <a:defRPr sz="1800"/>
             </a:lvl5pPr>
-            <a:lvl6pPr>
-              <a:defRPr sz="2000"/>
-            </a:lvl6pPr>
-            <a:lvl7pPr>
-              <a:defRPr sz="2000"/>
-            </a:lvl7pPr>
-            <a:lvl8pPr>
-              <a:defRPr sz="2000"/>
-            </a:lvl8pPr>
-            <a:lvl9pPr>
-              <a:defRPr sz="2000"/>
-            </a:lvl9pPr>
           </a:lstStyle>
           <a:p>
-            <a:pPr lvl="0"/>
+            <a:pPr lvl="0" eaLnBrk="1" latinLnBrk="0" hangingPunct="1"/>
             <a:r>
               <a:rPr lang="ru-RU" smtClean="0"/>
               <a:t>Образец текста</a:t>
             </a:r>
           </a:p>
           <a:p>
-            <a:pPr lvl="1"/>
+            <a:pPr lvl="1" eaLnBrk="1" latinLnBrk="0" hangingPunct="1"/>
             <a:r>
               <a:rPr lang="ru-RU" smtClean="0"/>
               <a:t>Второй уровень</a:t>
             </a:r>
           </a:p>
           <a:p>
-            <a:pPr lvl="2"/>
+            <a:pPr lvl="2" eaLnBrk="1" latinLnBrk="0" hangingPunct="1"/>
             <a:r>
               <a:rPr lang="ru-RU" smtClean="0"/>
               <a:t>Третий уровень</a:t>
             </a:r>
           </a:p>
           <a:p>
-            <a:pPr lvl="3"/>
+            <a:pPr lvl="3" eaLnBrk="1" latinLnBrk="0" hangingPunct="1"/>
             <a:r>
               <a:rPr lang="ru-RU" smtClean="0"/>
               <a:t>Четвертый уровень</a:t>
             </a:r>
           </a:p>
           <a:p>
-            <a:pPr lvl="4"/>
+            <a:pPr lvl="4" eaLnBrk="1" latinLnBrk="0" hangingPunct="1"/>
             <a:r>
               <a:rPr lang="ru-RU" smtClean="0"/>
               <a:t>Пятый уровень</a:t>
             </a:r>
-            <a:endParaRPr lang="ru-RU"/>
-          </a:p>
-        </p:txBody>
-      </p:sp>
-      <p:sp>
-        <p:nvSpPr>
-          <p:cNvPr id="4" name="Текст 3"/>
-          <p:cNvSpPr>
-            <a:spLocks noGrp="1"/>
-          </p:cNvSpPr>
-          <p:nvPr>
-            <p:ph type="body" sz="half" idx="2"/>
-          </p:nvPr>
-        </p:nvSpPr>
-        <p:spPr>
-          <a:xfrm>
-            <a:off x="457200" y="1435100"/>
-            <a:ext cx="3008313" cy="4691063"/>
-          </a:xfrm>
-        </p:spPr>
-        <p:txBody>
-          <a:bodyPr/>
-          <a:lstStyle>
-            <a:lvl1pPr marL="0" indent="0">
-              <a:buNone/>
-              <a:defRPr sz="1400"/>
-            </a:lvl1pPr>
-            <a:lvl2pPr marL="457200" indent="0">
-              <a:buNone/>
-              <a:defRPr sz="1200"/>
-            </a:lvl2pPr>
-            <a:lvl3pPr marL="914400" indent="0">
-              <a:buNone/>
-              <a:defRPr sz="1000"/>
-            </a:lvl3pPr>
-            <a:lvl4pPr marL="1371600" indent="0">
-              <a:buNone/>
-              <a:defRPr sz="900"/>
-            </a:lvl4pPr>
-            <a:lvl5pPr marL="1828800" indent="0">
-              <a:buNone/>
-              <a:defRPr sz="900"/>
-            </a:lvl5pPr>
-            <a:lvl6pPr marL="2286000" indent="0">
-              <a:buNone/>
-              <a:defRPr sz="900"/>
-            </a:lvl6pPr>
-            <a:lvl7pPr marL="2743200" indent="0">
-              <a:buNone/>
-              <a:defRPr sz="900"/>
-            </a:lvl7pPr>
-            <a:lvl8pPr marL="3200400" indent="0">
-              <a:buNone/>
-              <a:defRPr sz="900"/>
-            </a:lvl8pPr>
-            <a:lvl9pPr marL="3657600" indent="0">
-              <a:buNone/>
-              <a:defRPr sz="900"/>
-            </a:lvl9pPr>
-          </a:lstStyle>
-          <a:p>
-            <a:pPr lvl="0"/>
-            <a:r>
-              <a:rPr lang="ru-RU" smtClean="0"/>
-              <a:t>Образец текста</a:t>
-            </a:r>
+            <a:endParaRPr kumimoji="0" lang="en-US"/>
           </a:p>
         </p:txBody>
       </p:sp>
@@ -13430,7 +13692,7 @@
           <a:p>
             <a:fld id="{5B5CC06F-0F59-4AE7-909C-C5FEFEA5062E}" type="datetimeFigureOut">
               <a:rPr lang="ru-RU" smtClean="0"/>
-              <a:t>09.04.2026</a:t>
+              <a:t>13.04.2026</a:t>
             </a:fld>
             <a:endParaRPr lang="ru-RU"/>
           </a:p>
@@ -13479,11 +13741,6 @@
         </p:txBody>
       </p:sp>
     </p:spTree>
-    <p:extLst>
-      <p:ext uri="{BB962C8B-B14F-4D97-AF65-F5344CB8AC3E}">
-        <p14:creationId xmlns:p14="http://schemas.microsoft.com/office/powerpoint/2010/main" val="2914289149"/>
-      </p:ext>
-    </p:extLst>
   </p:cSld>
   <p:clrMapOvr>
     <a:masterClrMapping/>
@@ -13520,23 +13777,26 @@
         </p:nvSpPr>
         <p:spPr>
           <a:xfrm>
-            <a:off x="1792288" y="4800600"/>
-            <a:ext cx="5486400" cy="566738"/>
+            <a:off x="1828800" y="609600"/>
+            <a:ext cx="5486400" cy="522288"/>
           </a:xfrm>
         </p:spPr>
         <p:txBody>
-          <a:bodyPr anchor="b"/>
+          <a:bodyPr lIns="45720" rIns="45720" bIns="0" anchor="b">
+            <a:sp3d prstMaterial="softEdge"/>
+          </a:bodyPr>
           <a:lstStyle>
-            <a:lvl1pPr algn="l">
+            <a:lvl1pPr algn="ctr">
+              <a:buNone/>
               <a:defRPr sz="2000" b="1"/>
             </a:lvl1pPr>
           </a:lstStyle>
           <a:p>
             <a:r>
-              <a:rPr lang="ru-RU" smtClean="0"/>
+              <a:rPr kumimoji="0" lang="ru-RU" smtClean="0"/>
               <a:t>Образец заголовка</a:t>
             </a:r>
-            <a:endParaRPr lang="ru-RU"/>
+            <a:endParaRPr kumimoji="0" lang="en-US"/>
           </a:p>
         </p:txBody>
       </p:sp>
@@ -13552,52 +13812,85 @@
         </p:nvSpPr>
         <p:spPr>
           <a:xfrm>
-            <a:off x="1792288" y="612775"/>
-            <a:ext cx="5486400" cy="4114800"/>
+            <a:off x="1828800" y="1831975"/>
+            <a:ext cx="5486400" cy="3962400"/>
           </a:xfrm>
+          <a:solidFill>
+            <a:schemeClr val="bg2"/>
+          </a:solidFill>
+          <a:ln w="44450" cap="sq" cmpd="sng" algn="ctr">
+            <a:solidFill>
+              <a:srgbClr val="FFFFFF"/>
+            </a:solidFill>
+            <a:prstDash val="solid"/>
+            <a:miter lim="800000"/>
+          </a:ln>
+          <a:effectLst>
+            <a:outerShdw blurRad="190500" dist="228600" dir="2700000" sy="90000">
+              <a:srgbClr val="000000">
+                <a:alpha val="25000"/>
+              </a:srgbClr>
+            </a:outerShdw>
+          </a:effectLst>
+          <a:scene3d>
+            <a:camera prst="orthographicFront">
+              <a:rot lat="0" lon="0" rev="0"/>
+            </a:camera>
+            <a:lightRig rig="balanced" dir="tr">
+              <a:rot lat="0" lon="0" rev="2700000"/>
+            </a:lightRig>
+          </a:scene3d>
+          <a:sp3d prstMaterial="matte">
+            <a:contourClr>
+              <a:schemeClr val="tx2">
+                <a:shade val="50000"/>
+              </a:schemeClr>
+            </a:contourClr>
+          </a:sp3d>
         </p:spPr>
+        <p:style>
+          <a:lnRef idx="3">
+            <a:schemeClr val="lt1"/>
+          </a:lnRef>
+          <a:fillRef idx="1">
+            <a:schemeClr val="accent1"/>
+          </a:fillRef>
+          <a:effectRef idx="1">
+            <a:schemeClr val="accent1"/>
+          </a:effectRef>
+          <a:fontRef idx="minor">
+            <a:schemeClr val="lt1"/>
+          </a:fontRef>
+        </p:style>
         <p:txBody>
-          <a:bodyPr/>
+          <a:bodyPr anchor="t"/>
           <a:lstStyle>
-            <a:lvl1pPr marL="0" indent="0">
+            <a:lvl1pPr indent="0">
               <a:buNone/>
               <a:defRPr sz="3200"/>
             </a:lvl1pPr>
-            <a:lvl2pPr marL="457200" indent="0">
-              <a:buNone/>
-              <a:defRPr sz="2800"/>
-            </a:lvl2pPr>
-            <a:lvl3pPr marL="914400" indent="0">
-              <a:buNone/>
-              <a:defRPr sz="2400"/>
-            </a:lvl3pPr>
-            <a:lvl4pPr marL="1371600" indent="0">
-              <a:buNone/>
-              <a:defRPr sz="2000"/>
-            </a:lvl4pPr>
-            <a:lvl5pPr marL="1828800" indent="0">
-              <a:buNone/>
-              <a:defRPr sz="2000"/>
-            </a:lvl5pPr>
-            <a:lvl6pPr marL="2286000" indent="0">
-              <a:buNone/>
-              <a:defRPr sz="2000"/>
-            </a:lvl6pPr>
-            <a:lvl7pPr marL="2743200" indent="0">
-              <a:buNone/>
-              <a:defRPr sz="2000"/>
-            </a:lvl7pPr>
-            <a:lvl8pPr marL="3200400" indent="0">
-              <a:buNone/>
-              <a:defRPr sz="2000"/>
-            </a:lvl8pPr>
-            <a:lvl9pPr marL="3657600" indent="0">
-              <a:buNone/>
-              <a:defRPr sz="2000"/>
-            </a:lvl9pPr>
           </a:lstStyle>
           <a:p>
-            <a:endParaRPr lang="ru-RU"/>
+            <a:pPr marL="0" algn="l" rtl="0" eaLnBrk="1" latinLnBrk="0" hangingPunct="1"/>
+            <a:r>
+              <a:rPr kumimoji="0" lang="ru-RU" smtClean="0">
+                <a:solidFill>
+                  <a:schemeClr val="lt1"/>
+                </a:solidFill>
+                <a:latin typeface="+mn-lt"/>
+                <a:ea typeface="+mn-ea"/>
+                <a:cs typeface="+mn-cs"/>
+              </a:rPr>
+              <a:t>Вставка рисунка</a:t>
+            </a:r>
+            <a:endParaRPr kumimoji="0" lang="en-US" dirty="0">
+              <a:solidFill>
+                <a:schemeClr val="lt1"/>
+              </a:solidFill>
+              <a:latin typeface="+mn-lt"/>
+              <a:ea typeface="+mn-ea"/>
+              <a:cs typeface="+mn-cs"/>
+            </a:endParaRPr>
           </a:p>
         </p:txBody>
       </p:sp>
@@ -13613,54 +13906,34 @@
         </p:nvSpPr>
         <p:spPr>
           <a:xfrm>
-            <a:off x="1792288" y="5367338"/>
-            <a:ext cx="5486400" cy="804862"/>
+            <a:off x="1828800" y="1166787"/>
+            <a:ext cx="5486400" cy="530352"/>
           </a:xfrm>
         </p:spPr>
         <p:txBody>
-          <a:bodyPr/>
+          <a:bodyPr lIns="45720" tIns="45720" rIns="45720" anchor="t"/>
           <a:lstStyle>
-            <a:lvl1pPr marL="0" indent="0">
+            <a:lvl1pPr marL="0" indent="0" algn="ctr">
               <a:buNone/>
               <a:defRPr sz="1400"/>
             </a:lvl1pPr>
-            <a:lvl2pPr marL="457200" indent="0">
-              <a:buNone/>
+            <a:lvl2pPr>
               <a:defRPr sz="1200"/>
             </a:lvl2pPr>
-            <a:lvl3pPr marL="914400" indent="0">
-              <a:buNone/>
+            <a:lvl3pPr>
               <a:defRPr sz="1000"/>
             </a:lvl3pPr>
-            <a:lvl4pPr marL="1371600" indent="0">
-              <a:buNone/>
+            <a:lvl4pPr>
               <a:defRPr sz="900"/>
             </a:lvl4pPr>
-            <a:lvl5pPr marL="1828800" indent="0">
-              <a:buNone/>
+            <a:lvl5pPr>
               <a:defRPr sz="900"/>
             </a:lvl5pPr>
-            <a:lvl6pPr marL="2286000" indent="0">
-              <a:buNone/>
-              <a:defRPr sz="900"/>
-            </a:lvl6pPr>
-            <a:lvl7pPr marL="2743200" indent="0">
-              <a:buNone/>
-              <a:defRPr sz="900"/>
-            </a:lvl7pPr>
-            <a:lvl8pPr marL="3200400" indent="0">
-              <a:buNone/>
-              <a:defRPr sz="900"/>
-            </a:lvl8pPr>
-            <a:lvl9pPr marL="3657600" indent="0">
-              <a:buNone/>
-              <a:defRPr sz="900"/>
-            </a:lvl9pPr>
           </a:lstStyle>
           <a:p>
-            <a:pPr lvl="0"/>
-            <a:r>
-              <a:rPr lang="ru-RU" smtClean="0"/>
+            <a:pPr lvl="0" eaLnBrk="1" latinLnBrk="0" hangingPunct="1"/>
+            <a:r>
+              <a:rPr kumimoji="0" lang="ru-RU" smtClean="0"/>
               <a:t>Образец текста</a:t>
             </a:r>
           </a:p>
@@ -13683,7 +13956,7 @@
           <a:p>
             <a:fld id="{5B5CC06F-0F59-4AE7-909C-C5FEFEA5062E}" type="datetimeFigureOut">
               <a:rPr lang="ru-RU" smtClean="0"/>
-              <a:t>09.04.2026</a:t>
+              <a:t>13.04.2026</a:t>
             </a:fld>
             <a:endParaRPr lang="ru-RU"/>
           </a:p>
@@ -13732,11 +14005,6 @@
         </p:txBody>
       </p:sp>
     </p:spTree>
-    <p:extLst>
-      <p:ext uri="{BB962C8B-B14F-4D97-AF65-F5344CB8AC3E}">
-        <p14:creationId xmlns:p14="http://schemas.microsoft.com/office/powerpoint/2010/main" val="739275212"/>
-      </p:ext>
-    </p:extLst>
   </p:cSld>
   <p:clrMapOvr>
     <a:masterClrMapping/>
@@ -13748,8 +14016,8 @@
 <p:sldMaster xmlns:a="http://schemas.openxmlformats.org/drawingml/2006/main" xmlns:r="http://schemas.openxmlformats.org/officeDocument/2006/relationships" xmlns:p="http://schemas.openxmlformats.org/presentationml/2006/main">
   <p:cSld>
     <p:bg>
-      <p:bgRef idx="1001">
-        <a:schemeClr val="bg1"/>
+      <p:bgRef idx="1003">
+        <a:schemeClr val="bg2"/>
       </p:bgRef>
     </p:bg>
     <p:spTree>
@@ -13768,7 +14036,7 @@
       </p:grpSpPr>
       <p:sp>
         <p:nvSpPr>
-          <p:cNvPr id="2" name="Заголовок 1"/>
+          <p:cNvPr id="22" name="Заголовок 21"/>
           <p:cNvSpPr>
             <a:spLocks noGrp="1"/>
           </p:cNvSpPr>
@@ -13786,22 +14054,31 @@
           </a:prstGeom>
         </p:spPr>
         <p:txBody>
-          <a:bodyPr vert="horz" lIns="91440" tIns="45720" rIns="91440" bIns="45720" rtlCol="0" anchor="ctr">
+          <a:bodyPr vert="horz" anchor="ctr">
             <a:normAutofit/>
+            <a:scene3d>
+              <a:camera prst="orthographicFront"/>
+              <a:lightRig rig="soft" dir="t">
+                <a:rot lat="0" lon="0" rev="16800000"/>
+              </a:lightRig>
+            </a:scene3d>
+            <a:sp3d prstMaterial="softEdge">
+              <a:bevelT w="38100" h="38100"/>
+            </a:sp3d>
           </a:bodyPr>
           <a:lstStyle/>
           <a:p>
             <a:r>
-              <a:rPr lang="ru-RU" smtClean="0"/>
+              <a:rPr kumimoji="0" lang="ru-RU" smtClean="0"/>
               <a:t>Образец заголовка</a:t>
             </a:r>
-            <a:endParaRPr lang="ru-RU"/>
+            <a:endParaRPr kumimoji="0" lang="en-US"/>
           </a:p>
         </p:txBody>
       </p:sp>
       <p:sp>
         <p:nvSpPr>
-          <p:cNvPr id="3" name="Текст 2"/>
+          <p:cNvPr id="13" name="Текст 12"/>
           <p:cNvSpPr>
             <a:spLocks noGrp="1"/>
           </p:cNvSpPr>
@@ -13812,58 +14089,58 @@
         <p:spPr>
           <a:xfrm>
             <a:off x="457200" y="1600200"/>
-            <a:ext cx="8229600" cy="4525963"/>
+            <a:ext cx="8229600" cy="4709160"/>
           </a:xfrm>
           <a:prstGeom prst="rect">
             <a:avLst/>
           </a:prstGeom>
         </p:spPr>
         <p:txBody>
-          <a:bodyPr vert="horz" lIns="91440" tIns="45720" rIns="91440" bIns="45720" rtlCol="0">
+          <a:bodyPr vert="horz">
             <a:normAutofit/>
           </a:bodyPr>
           <a:lstStyle/>
           <a:p>
-            <a:pPr lvl="0"/>
-            <a:r>
-              <a:rPr lang="ru-RU" smtClean="0"/>
+            <a:pPr lvl="0" eaLnBrk="1" latinLnBrk="0" hangingPunct="1"/>
+            <a:r>
+              <a:rPr kumimoji="0" lang="ru-RU" smtClean="0"/>
               <a:t>Образец текста</a:t>
             </a:r>
           </a:p>
           <a:p>
-            <a:pPr lvl="1"/>
-            <a:r>
-              <a:rPr lang="ru-RU" smtClean="0"/>
+            <a:pPr lvl="1" eaLnBrk="1" latinLnBrk="0" hangingPunct="1"/>
+            <a:r>
+              <a:rPr kumimoji="0" lang="ru-RU" smtClean="0"/>
               <a:t>Второй уровень</a:t>
             </a:r>
           </a:p>
           <a:p>
-            <a:pPr lvl="2"/>
-            <a:r>
-              <a:rPr lang="ru-RU" smtClean="0"/>
+            <a:pPr lvl="2" eaLnBrk="1" latinLnBrk="0" hangingPunct="1"/>
+            <a:r>
+              <a:rPr kumimoji="0" lang="ru-RU" smtClean="0"/>
               <a:t>Третий уровень</a:t>
             </a:r>
           </a:p>
           <a:p>
-            <a:pPr lvl="3"/>
-            <a:r>
-              <a:rPr lang="ru-RU" smtClean="0"/>
+            <a:pPr lvl="3" eaLnBrk="1" latinLnBrk="0" hangingPunct="1"/>
+            <a:r>
+              <a:rPr kumimoji="0" lang="ru-RU" smtClean="0"/>
               <a:t>Четвертый уровень</a:t>
             </a:r>
           </a:p>
           <a:p>
-            <a:pPr lvl="4"/>
-            <a:r>
-              <a:rPr lang="ru-RU" smtClean="0"/>
+            <a:pPr lvl="4" eaLnBrk="1" latinLnBrk="0" hangingPunct="1"/>
+            <a:r>
+              <a:rPr kumimoji="0" lang="ru-RU" smtClean="0"/>
               <a:t>Пятый уровень</a:t>
             </a:r>
-            <a:endParaRPr lang="ru-RU"/>
+            <a:endParaRPr kumimoji="0" lang="en-US"/>
           </a:p>
         </p:txBody>
       </p:sp>
       <p:sp>
         <p:nvSpPr>
-          <p:cNvPr id="4" name="Дата 3"/>
+          <p:cNvPr id="14" name="Дата 13"/>
           <p:cNvSpPr>
             <a:spLocks noGrp="1"/>
           </p:cNvSpPr>
@@ -13873,7 +14150,7 @@
         </p:nvSpPr>
         <p:spPr>
           <a:xfrm>
-            <a:off x="457200" y="6356350"/>
+            <a:off x="457200" y="6416675"/>
             <a:ext cx="2133600" cy="365125"/>
           </a:xfrm>
           <a:prstGeom prst="rect">
@@ -13881,13 +14158,13 @@
           </a:prstGeom>
         </p:spPr>
         <p:txBody>
-          <a:bodyPr vert="horz" lIns="91440" tIns="45720" rIns="91440" bIns="45720" rtlCol="0" anchor="ctr"/>
+          <a:bodyPr vert="horz" anchor="b"/>
           <a:lstStyle>
-            <a:lvl1pPr algn="l">
-              <a:defRPr sz="1200">
+            <a:lvl1pPr algn="l" eaLnBrk="1" latinLnBrk="0" hangingPunct="1">
+              <a:defRPr kumimoji="0" sz="1200">
                 <a:solidFill>
                   <a:schemeClr val="tx1">
-                    <a:tint val="75000"/>
+                    <a:shade val="50000"/>
                   </a:schemeClr>
                 </a:solidFill>
               </a:defRPr>
@@ -13896,7 +14173,7 @@
           <a:p>
             <a:fld id="{5B5CC06F-0F59-4AE7-909C-C5FEFEA5062E}" type="datetimeFigureOut">
               <a:rPr lang="ru-RU" smtClean="0"/>
-              <a:t>09.04.2026</a:t>
+              <a:t>13.04.2026</a:t>
             </a:fld>
             <a:endParaRPr lang="ru-RU"/>
           </a:p>
@@ -13904,7 +14181,7 @@
       </p:sp>
       <p:sp>
         <p:nvSpPr>
-          <p:cNvPr id="5" name="Нижний колонтитул 4"/>
+          <p:cNvPr id="3" name="Нижний колонтитул 2"/>
           <p:cNvSpPr>
             <a:spLocks noGrp="1"/>
           </p:cNvSpPr>
@@ -13914,7 +14191,7 @@
         </p:nvSpPr>
         <p:spPr>
           <a:xfrm>
-            <a:off x="3124200" y="6356350"/>
+            <a:off x="3124200" y="6416675"/>
             <a:ext cx="2895600" cy="365125"/>
           </a:xfrm>
           <a:prstGeom prst="rect">
@@ -13922,13 +14199,13 @@
           </a:prstGeom>
         </p:spPr>
         <p:txBody>
-          <a:bodyPr vert="horz" lIns="91440" tIns="45720" rIns="91440" bIns="45720" rtlCol="0" anchor="ctr"/>
+          <a:bodyPr vert="horz" anchor="b"/>
           <a:lstStyle>
-            <a:lvl1pPr algn="ctr">
-              <a:defRPr sz="1200">
+            <a:lvl1pPr algn="ctr" eaLnBrk="1" latinLnBrk="0" hangingPunct="1">
+              <a:defRPr kumimoji="0" sz="1200">
                 <a:solidFill>
                   <a:schemeClr val="tx1">
-                    <a:tint val="75000"/>
+                    <a:shade val="50000"/>
                   </a:schemeClr>
                 </a:solidFill>
               </a:defRPr>
@@ -13941,7 +14218,7 @@
       </p:sp>
       <p:sp>
         <p:nvSpPr>
-          <p:cNvPr id="6" name="Номер слайда 5"/>
+          <p:cNvPr id="23" name="Номер слайда 22"/>
           <p:cNvSpPr>
             <a:spLocks noGrp="1"/>
           </p:cNvSpPr>
@@ -13951,21 +14228,21 @@
         </p:nvSpPr>
         <p:spPr>
           <a:xfrm>
-            <a:off x="6553200" y="6356350"/>
-            <a:ext cx="2133600" cy="365125"/>
+            <a:off x="7924800" y="6416675"/>
+            <a:ext cx="762000" cy="365125"/>
           </a:xfrm>
           <a:prstGeom prst="rect">
             <a:avLst/>
           </a:prstGeom>
         </p:spPr>
         <p:txBody>
-          <a:bodyPr vert="horz" lIns="91440" tIns="45720" rIns="91440" bIns="45720" rtlCol="0" anchor="ctr"/>
+          <a:bodyPr vert="horz" lIns="0" rIns="0" anchor="b"/>
           <a:lstStyle>
-            <a:lvl1pPr algn="r">
-              <a:defRPr sz="1200">
+            <a:lvl1pPr algn="r" eaLnBrk="1" latinLnBrk="0" hangingPunct="1">
+              <a:defRPr kumimoji="0" sz="1200">
                 <a:solidFill>
                   <a:schemeClr val="tx1">
-                    <a:tint val="75000"/>
+                    <a:shade val="50000"/>
                   </a:schemeClr>
                 </a:solidFill>
               </a:defRPr>
@@ -13981,37 +14258,62 @@
         </p:txBody>
       </p:sp>
     </p:spTree>
-    <p:extLst>
-      <p:ext uri="{BB962C8B-B14F-4D97-AF65-F5344CB8AC3E}">
-        <p14:creationId xmlns:p14="http://schemas.microsoft.com/office/powerpoint/2010/main" val="4102548325"/>
-      </p:ext>
-    </p:extLst>
   </p:cSld>
-  <p:clrMap bg1="lt1" tx1="dk1" bg2="lt2" tx2="dk2" accent1="accent1" accent2="accent2" accent3="accent3" accent4="accent4" accent5="accent5" accent6="accent6" hlink="hlink" folHlink="folHlink"/>
+  <p:clrMap bg1="dk1" tx1="lt1" bg2="dk2" tx2="lt2" accent1="accent1" accent2="accent2" accent3="accent3" accent4="accent4" accent5="accent5" accent6="accent6" hlink="hlink" folHlink="folHlink"/>
   <p:sldLayoutIdLst>
-    <p:sldLayoutId id="2147483649" r:id="rId1"/>
-    <p:sldLayoutId id="2147483650" r:id="rId2"/>
-    <p:sldLayoutId id="2147483651" r:id="rId3"/>
-    <p:sldLayoutId id="2147483652" r:id="rId4"/>
-    <p:sldLayoutId id="2147483653" r:id="rId5"/>
-    <p:sldLayoutId id="2147483654" r:id="rId6"/>
-    <p:sldLayoutId id="2147483655" r:id="rId7"/>
-    <p:sldLayoutId id="2147483656" r:id="rId8"/>
-    <p:sldLayoutId id="2147483657" r:id="rId9"/>
-    <p:sldLayoutId id="2147483658" r:id="rId10"/>
-    <p:sldLayoutId id="2147483659" r:id="rId11"/>
+    <p:sldLayoutId id="2147483757" r:id="rId1"/>
+    <p:sldLayoutId id="2147483758" r:id="rId2"/>
+    <p:sldLayoutId id="2147483759" r:id="rId3"/>
+    <p:sldLayoutId id="2147483760" r:id="rId4"/>
+    <p:sldLayoutId id="2147483761" r:id="rId5"/>
+    <p:sldLayoutId id="2147483762" r:id="rId6"/>
+    <p:sldLayoutId id="2147483763" r:id="rId7"/>
+    <p:sldLayoutId id="2147483764" r:id="rId8"/>
+    <p:sldLayoutId id="2147483765" r:id="rId9"/>
+    <p:sldLayoutId id="2147483766" r:id="rId10"/>
+    <p:sldLayoutId id="2147483767" r:id="rId11"/>
   </p:sldLayoutIdLst>
   <p:txStyles>
     <p:titleStyle>
-      <a:lvl1pPr algn="ctr" defTabSz="914400" rtl="0" eaLnBrk="1" latinLnBrk="0" hangingPunct="1">
+      <a:lvl1pPr algn="ctr" rtl="0" eaLnBrk="1" latinLnBrk="0" hangingPunct="1">
         <a:spcBef>
           <a:spcPct val="0"/>
         </a:spcBef>
         <a:buNone/>
-        <a:defRPr sz="4400" kern="1200">
-          <a:solidFill>
-            <a:schemeClr val="tx1"/>
-          </a:solidFill>
+        <a:defRPr kumimoji="0" sz="4100" b="1" kern="1200" cap="none" baseline="0">
+          <a:ln w="6350">
+            <a:noFill/>
+          </a:ln>
+          <a:gradFill>
+            <a:gsLst>
+              <a:gs pos="0">
+                <a:schemeClr val="accent1">
+                  <a:tint val="73000"/>
+                  <a:satMod val="145000"/>
+                </a:schemeClr>
+              </a:gs>
+              <a:gs pos="73000">
+                <a:schemeClr val="accent1">
+                  <a:tint val="73000"/>
+                  <a:satMod val="145000"/>
+                </a:schemeClr>
+              </a:gs>
+              <a:gs pos="100000">
+                <a:schemeClr val="accent1">
+                  <a:tint val="83000"/>
+                  <a:satMod val="143000"/>
+                </a:schemeClr>
+              </a:gs>
+            </a:gsLst>
+            <a:lin ang="4800000" scaled="1"/>
+          </a:gradFill>
+          <a:effectLst>
+            <a:outerShdw blurRad="114300" dist="101600" dir="2700000" algn="tl" rotWithShape="0">
+              <a:srgbClr val="000000">
+                <a:alpha val="40000"/>
+              </a:srgbClr>
+            </a:outerShdw>
+          </a:effectLst>
           <a:latin typeface="+mj-lt"/>
           <a:ea typeface="+mj-ea"/>
           <a:cs typeface="+mj-cs"/>
@@ -14019,13 +14321,19 @@
       </a:lvl1pPr>
     </p:titleStyle>
     <p:bodyStyle>
-      <a:lvl1pPr marL="342900" indent="-342900" algn="l" defTabSz="914400" rtl="0" eaLnBrk="1" latinLnBrk="0" hangingPunct="1">
+      <a:lvl1pPr marL="548640" indent="-411480" algn="l" rtl="0" eaLnBrk="1" latinLnBrk="0" hangingPunct="1">
         <a:spcBef>
           <a:spcPct val="20000"/>
         </a:spcBef>
-        <a:buFont typeface="Arial" pitchFamily="34" charset="0"/>
-        <a:buChar char="•"/>
-        <a:defRPr sz="3200" kern="1200">
+        <a:buClr>
+          <a:schemeClr val="tx1">
+            <a:shade val="95000"/>
+          </a:schemeClr>
+        </a:buClr>
+        <a:buSzPct val="65000"/>
+        <a:buFont typeface="Wingdings 2"/>
+        <a:buChar char=""/>
+        <a:defRPr kumimoji="0" sz="2800" kern="1200">
           <a:solidFill>
             <a:schemeClr val="tx1"/>
           </a:solidFill>
@@ -14034,13 +14342,17 @@
           <a:cs typeface="+mn-cs"/>
         </a:defRPr>
       </a:lvl1pPr>
-      <a:lvl2pPr marL="742950" indent="-285750" algn="l" defTabSz="914400" rtl="0" eaLnBrk="1" latinLnBrk="0" hangingPunct="1">
+      <a:lvl2pPr marL="868680" indent="-283464" algn="l" rtl="0" eaLnBrk="1" latinLnBrk="0" hangingPunct="1">
         <a:spcBef>
           <a:spcPct val="20000"/>
         </a:spcBef>
-        <a:buFont typeface="Arial" pitchFamily="34" charset="0"/>
-        <a:buChar char="–"/>
-        <a:defRPr sz="2800" kern="1200">
+        <a:buClr>
+          <a:schemeClr val="tx1"/>
+        </a:buClr>
+        <a:buSzPct val="80000"/>
+        <a:buFont typeface="Wingdings 2"/>
+        <a:buChar char=""/>
+        <a:defRPr kumimoji="0" sz="2400" kern="1200">
           <a:solidFill>
             <a:schemeClr val="tx1"/>
           </a:solidFill>
@@ -14049,13 +14361,17 @@
           <a:cs typeface="+mn-cs"/>
         </a:defRPr>
       </a:lvl2pPr>
-      <a:lvl3pPr marL="1143000" indent="-228600" algn="l" defTabSz="914400" rtl="0" eaLnBrk="1" latinLnBrk="0" hangingPunct="1">
+      <a:lvl3pPr marL="1133856" indent="-228600" algn="l" rtl="0" eaLnBrk="1" latinLnBrk="0" hangingPunct="1">
         <a:spcBef>
           <a:spcPct val="20000"/>
         </a:spcBef>
-        <a:buFont typeface="Arial" pitchFamily="34" charset="0"/>
-        <a:buChar char="•"/>
-        <a:defRPr sz="2400" kern="1200">
+        <a:buClr>
+          <a:schemeClr val="tx1"/>
+        </a:buClr>
+        <a:buSzPct val="95000"/>
+        <a:buFont typeface="Wingdings"/>
+        <a:buChar char=""/>
+        <a:defRPr kumimoji="0" sz="2200" kern="1200">
           <a:solidFill>
             <a:schemeClr val="tx1"/>
           </a:solidFill>
@@ -14064,13 +14380,17 @@
           <a:cs typeface="+mn-cs"/>
         </a:defRPr>
       </a:lvl3pPr>
-      <a:lvl4pPr marL="1600200" indent="-228600" algn="l" defTabSz="914400" rtl="0" eaLnBrk="1" latinLnBrk="0" hangingPunct="1">
+      <a:lvl4pPr marL="1353312" indent="-182880" algn="l" rtl="0" eaLnBrk="1" latinLnBrk="0" hangingPunct="1">
         <a:spcBef>
           <a:spcPct val="20000"/>
         </a:spcBef>
-        <a:buFont typeface="Arial" pitchFamily="34" charset="0"/>
-        <a:buChar char="–"/>
-        <a:defRPr sz="2000" kern="1200">
+        <a:buClr>
+          <a:schemeClr val="tx1"/>
+        </a:buClr>
+        <a:buSzPct val="100000"/>
+        <a:buFont typeface="Wingdings 3"/>
+        <a:buChar char=""/>
+        <a:defRPr kumimoji="0" sz="2000" kern="1200">
           <a:solidFill>
             <a:schemeClr val="tx1"/>
           </a:solidFill>
@@ -14079,13 +14399,16 @@
           <a:cs typeface="+mn-cs"/>
         </a:defRPr>
       </a:lvl4pPr>
-      <a:lvl5pPr marL="2057400" indent="-228600" algn="l" defTabSz="914400" rtl="0" eaLnBrk="1" latinLnBrk="0" hangingPunct="1">
+      <a:lvl5pPr marL="1545336" indent="-182880" algn="l" rtl="0" eaLnBrk="1" latinLnBrk="0" hangingPunct="1">
         <a:spcBef>
           <a:spcPct val="20000"/>
         </a:spcBef>
-        <a:buFont typeface="Arial" pitchFamily="34" charset="0"/>
-        <a:buChar char="»"/>
-        <a:defRPr sz="2000" kern="1200">
+        <a:buClr>
+          <a:schemeClr val="tx1"/>
+        </a:buClr>
+        <a:buFont typeface="Wingdings 2"/>
+        <a:buChar char=""/>
+        <a:defRPr kumimoji="0" sz="2000" kern="1200">
           <a:solidFill>
             <a:schemeClr val="tx1"/>
           </a:solidFill>
@@ -14094,13 +14417,16 @@
           <a:cs typeface="+mn-cs"/>
         </a:defRPr>
       </a:lvl5pPr>
-      <a:lvl6pPr marL="2514600" indent="-228600" algn="l" defTabSz="914400" rtl="0" eaLnBrk="1" latinLnBrk="0" hangingPunct="1">
+      <a:lvl6pPr marL="1764792" indent="-182880" algn="l" rtl="0" eaLnBrk="1" latinLnBrk="0" hangingPunct="1">
         <a:spcBef>
           <a:spcPct val="20000"/>
         </a:spcBef>
-        <a:buFont typeface="Arial" pitchFamily="34" charset="0"/>
-        <a:buChar char="•"/>
-        <a:defRPr sz="2000" kern="1200">
+        <a:buClr>
+          <a:schemeClr val="tx1"/>
+        </a:buClr>
+        <a:buFont typeface="Wingdings 3"/>
+        <a:buChar char=""/>
+        <a:defRPr kumimoji="0" sz="1800" kern="1200">
           <a:solidFill>
             <a:schemeClr val="tx1"/>
           </a:solidFill>
@@ -14109,13 +14435,16 @@
           <a:cs typeface="+mn-cs"/>
         </a:defRPr>
       </a:lvl6pPr>
-      <a:lvl7pPr marL="2971800" indent="-228600" algn="l" defTabSz="914400" rtl="0" eaLnBrk="1" latinLnBrk="0" hangingPunct="1">
+      <a:lvl7pPr marL="1965960" indent="-182880" algn="l" rtl="0" eaLnBrk="1" latinLnBrk="0" hangingPunct="1">
         <a:spcBef>
           <a:spcPct val="20000"/>
         </a:spcBef>
-        <a:buFont typeface="Arial" pitchFamily="34" charset="0"/>
-        <a:buChar char="•"/>
-        <a:defRPr sz="2000" kern="1200">
+        <a:buClr>
+          <a:schemeClr val="tx1"/>
+        </a:buClr>
+        <a:buFont typeface="Wingdings 2"/>
+        <a:buChar char=""/>
+        <a:defRPr kumimoji="0" sz="1600" kern="1200">
           <a:solidFill>
             <a:schemeClr val="tx1"/>
           </a:solidFill>
@@ -14124,13 +14453,16 @@
           <a:cs typeface="+mn-cs"/>
         </a:defRPr>
       </a:lvl7pPr>
-      <a:lvl8pPr marL="3429000" indent="-228600" algn="l" defTabSz="914400" rtl="0" eaLnBrk="1" latinLnBrk="0" hangingPunct="1">
+      <a:lvl8pPr marL="2167128" indent="-182880" algn="l" rtl="0" eaLnBrk="1" latinLnBrk="0" hangingPunct="1">
         <a:spcBef>
           <a:spcPct val="20000"/>
         </a:spcBef>
-        <a:buFont typeface="Arial" pitchFamily="34" charset="0"/>
-        <a:buChar char="•"/>
-        <a:defRPr sz="2000" kern="1200">
+        <a:buClr>
+          <a:schemeClr val="tx1"/>
+        </a:buClr>
+        <a:buFont typeface="Wingdings 2"/>
+        <a:buChar char=""/>
+        <a:defRPr kumimoji="0" sz="1400" kern="1200">
           <a:solidFill>
             <a:schemeClr val="tx1"/>
           </a:solidFill>
@@ -14139,13 +14471,16 @@
           <a:cs typeface="+mn-cs"/>
         </a:defRPr>
       </a:lvl8pPr>
-      <a:lvl9pPr marL="3886200" indent="-228600" algn="l" defTabSz="914400" rtl="0" eaLnBrk="1" latinLnBrk="0" hangingPunct="1">
+      <a:lvl9pPr marL="2368296" indent="-182880" algn="l" rtl="0" eaLnBrk="1" latinLnBrk="0" hangingPunct="1">
         <a:spcBef>
           <a:spcPct val="20000"/>
         </a:spcBef>
-        <a:buFont typeface="Arial" pitchFamily="34" charset="0"/>
-        <a:buChar char="•"/>
-        <a:defRPr sz="2000" kern="1200">
+        <a:buClr>
+          <a:schemeClr val="tx1"/>
+        </a:buClr>
+        <a:buFont typeface="Wingdings 2"/>
+        <a:buChar char=""/>
+        <a:defRPr kumimoji="0" sz="1400" kern="1200" baseline="0">
           <a:solidFill>
             <a:schemeClr val="tx1"/>
           </a:solidFill>
@@ -14156,11 +14491,8 @@
       </a:lvl9pPr>
     </p:bodyStyle>
     <p:otherStyle>
-      <a:defPPr>
-        <a:defRPr lang="ru-RU"/>
-      </a:defPPr>
-      <a:lvl1pPr marL="0" algn="l" defTabSz="914400" rtl="0" eaLnBrk="1" latinLnBrk="0" hangingPunct="1">
-        <a:defRPr sz="1800" kern="1200">
+      <a:lvl1pPr marL="0" algn="l" rtl="0" eaLnBrk="1" latinLnBrk="0" hangingPunct="1">
+        <a:defRPr kumimoji="0" kern="1200">
           <a:solidFill>
             <a:schemeClr val="tx1"/>
           </a:solidFill>
@@ -14169,8 +14501,8 @@
           <a:cs typeface="+mn-cs"/>
         </a:defRPr>
       </a:lvl1pPr>
-      <a:lvl2pPr marL="457200" algn="l" defTabSz="914400" rtl="0" eaLnBrk="1" latinLnBrk="0" hangingPunct="1">
-        <a:defRPr sz="1800" kern="1200">
+      <a:lvl2pPr marL="457200" algn="l" rtl="0" eaLnBrk="1" latinLnBrk="0" hangingPunct="1">
+        <a:defRPr kumimoji="0" kern="1200">
           <a:solidFill>
             <a:schemeClr val="tx1"/>
           </a:solidFill>
@@ -14179,8 +14511,8 @@
           <a:cs typeface="+mn-cs"/>
         </a:defRPr>
       </a:lvl2pPr>
-      <a:lvl3pPr marL="914400" algn="l" defTabSz="914400" rtl="0" eaLnBrk="1" latinLnBrk="0" hangingPunct="1">
-        <a:defRPr sz="1800" kern="1200">
+      <a:lvl3pPr marL="914400" algn="l" rtl="0" eaLnBrk="1" latinLnBrk="0" hangingPunct="1">
+        <a:defRPr kumimoji="0" kern="1200">
           <a:solidFill>
             <a:schemeClr val="tx1"/>
           </a:solidFill>
@@ -14189,8 +14521,8 @@
           <a:cs typeface="+mn-cs"/>
         </a:defRPr>
       </a:lvl3pPr>
-      <a:lvl4pPr marL="1371600" algn="l" defTabSz="914400" rtl="0" eaLnBrk="1" latinLnBrk="0" hangingPunct="1">
-        <a:defRPr sz="1800" kern="1200">
+      <a:lvl4pPr marL="1371600" algn="l" rtl="0" eaLnBrk="1" latinLnBrk="0" hangingPunct="1">
+        <a:defRPr kumimoji="0" kern="1200">
           <a:solidFill>
             <a:schemeClr val="tx1"/>
           </a:solidFill>
@@ -14199,8 +14531,8 @@
           <a:cs typeface="+mn-cs"/>
         </a:defRPr>
       </a:lvl4pPr>
-      <a:lvl5pPr marL="1828800" algn="l" defTabSz="914400" rtl="0" eaLnBrk="1" latinLnBrk="0" hangingPunct="1">
-        <a:defRPr sz="1800" kern="1200">
+      <a:lvl5pPr marL="1828800" algn="l" rtl="0" eaLnBrk="1" latinLnBrk="0" hangingPunct="1">
+        <a:defRPr kumimoji="0" kern="1200">
           <a:solidFill>
             <a:schemeClr val="tx1"/>
           </a:solidFill>
@@ -14209,8 +14541,8 @@
           <a:cs typeface="+mn-cs"/>
         </a:defRPr>
       </a:lvl5pPr>
-      <a:lvl6pPr marL="2286000" algn="l" defTabSz="914400" rtl="0" eaLnBrk="1" latinLnBrk="0" hangingPunct="1">
-        <a:defRPr sz="1800" kern="1200">
+      <a:lvl6pPr marL="2286000" algn="l" rtl="0" eaLnBrk="1" latinLnBrk="0" hangingPunct="1">
+        <a:defRPr kumimoji="0" kern="1200">
           <a:solidFill>
             <a:schemeClr val="tx1"/>
           </a:solidFill>
@@ -14219,8 +14551,8 @@
           <a:cs typeface="+mn-cs"/>
         </a:defRPr>
       </a:lvl6pPr>
-      <a:lvl7pPr marL="2743200" algn="l" defTabSz="914400" rtl="0" eaLnBrk="1" latinLnBrk="0" hangingPunct="1">
-        <a:defRPr sz="1800" kern="1200">
+      <a:lvl7pPr marL="2743200" algn="l" rtl="0" eaLnBrk="1" latinLnBrk="0" hangingPunct="1">
+        <a:defRPr kumimoji="0" kern="1200">
           <a:solidFill>
             <a:schemeClr val="tx1"/>
           </a:solidFill>
@@ -14229,8 +14561,8 @@
           <a:cs typeface="+mn-cs"/>
         </a:defRPr>
       </a:lvl7pPr>
-      <a:lvl8pPr marL="3200400" algn="l" defTabSz="914400" rtl="0" eaLnBrk="1" latinLnBrk="0" hangingPunct="1">
-        <a:defRPr sz="1800" kern="1200">
+      <a:lvl8pPr marL="3200400" algn="l" rtl="0" eaLnBrk="1" latinLnBrk="0" hangingPunct="1">
+        <a:defRPr kumimoji="0" kern="1200">
           <a:solidFill>
             <a:schemeClr val="tx1"/>
           </a:solidFill>
@@ -14239,8 +14571,8 @@
           <a:cs typeface="+mn-cs"/>
         </a:defRPr>
       </a:lvl8pPr>
-      <a:lvl9pPr marL="3657600" algn="l" defTabSz="914400" rtl="0" eaLnBrk="1" latinLnBrk="0" hangingPunct="1">
-        <a:defRPr sz="1800" kern="1200">
+      <a:lvl9pPr marL="3657600" algn="l" rtl="0" eaLnBrk="1" latinLnBrk="0" hangingPunct="1">
+        <a:defRPr kumimoji="0" kern="1200">
           <a:solidFill>
             <a:schemeClr val="tx1"/>
           </a:solidFill>
@@ -14289,32 +14621,32 @@
         </p:spPr>
         <p:txBody>
           <a:bodyPr>
-            <a:normAutofit fontScale="90000"/>
+            <a:noAutofit/>
           </a:bodyPr>
           <a:lstStyle/>
           <a:p>
             <a:pPr algn="l"/>
             <a:r>
-              <a:rPr lang="ru-RU" dirty="0" smtClean="0"/>
+              <a:rPr lang="ru-RU" sz="3600" dirty="0" smtClean="0"/>
               <a:t>Система автоматизации оформления договоров </a:t>
             </a:r>
             <a:r>
-              <a:rPr lang="ru-RU" dirty="0" err="1" smtClean="0"/>
+              <a:rPr lang="ru-RU" sz="3600" dirty="0" err="1" smtClean="0"/>
               <a:t>автоэксперта</a:t>
             </a:r>
             <a:r>
-              <a:rPr lang="ru-RU" dirty="0" smtClean="0"/>
+              <a:rPr lang="ru-RU" sz="3600" dirty="0" smtClean="0"/>
               <a:t> на базе </a:t>
             </a:r>
             <a:r>
-              <a:rPr lang="ru-RU" dirty="0" err="1" smtClean="0"/>
+              <a:rPr lang="ru-RU" sz="3600" dirty="0" err="1" smtClean="0"/>
               <a:t>Telegram</a:t>
             </a:r>
             <a:r>
-              <a:rPr lang="ru-RU" dirty="0" smtClean="0"/>
+              <a:rPr lang="ru-RU" sz="3600" dirty="0" smtClean="0"/>
               <a:t>-бота</a:t>
             </a:r>
-            <a:endParaRPr lang="ru-RU" dirty="0"/>
+            <a:endParaRPr lang="ru-RU" sz="3600" dirty="0"/>
           </a:p>
         </p:txBody>
       </p:sp>
@@ -14330,19 +14662,19 @@
         </p:nvSpPr>
         <p:spPr>
           <a:xfrm>
-            <a:off x="1115616" y="3886200"/>
-            <a:ext cx="7128792" cy="1752600"/>
+            <a:off x="827584" y="4221088"/>
+            <a:ext cx="4608512" cy="1752600"/>
           </a:xfrm>
         </p:spPr>
         <p:txBody>
           <a:bodyPr>
-            <a:normAutofit lnSpcReduction="10000"/>
+            <a:normAutofit/>
           </a:bodyPr>
           <a:lstStyle/>
           <a:p>
             <a:pPr algn="l"/>
             <a:r>
-              <a:rPr lang="ru-RU" sz="2400" dirty="0" smtClean="0">
+              <a:rPr lang="ru-RU" sz="1800" dirty="0" smtClean="0">
                 <a:solidFill>
                   <a:schemeClr val="tx1"/>
                 </a:solidFill>
@@ -14350,7 +14682,7 @@
               <a:t>Автор</a:t>
             </a:r>
             <a:r>
-              <a:rPr lang="en-US" sz="2400" dirty="0" smtClean="0">
+              <a:rPr lang="en-US" sz="1800" dirty="0" smtClean="0">
                 <a:solidFill>
                   <a:schemeClr val="tx1"/>
                 </a:solidFill>
@@ -14358,7 +14690,7 @@
               <a:t>:</a:t>
             </a:r>
             <a:r>
-              <a:rPr lang="ru-RU" sz="2400" dirty="0" smtClean="0">
+              <a:rPr lang="ru-RU" sz="1800" dirty="0" smtClean="0">
                 <a:solidFill>
                   <a:schemeClr val="tx1"/>
                 </a:solidFill>
@@ -14366,7 +14698,7 @@
               <a:t> </a:t>
             </a:r>
             <a:r>
-              <a:rPr lang="en-US" sz="2400" dirty="0" smtClean="0">
+              <a:rPr lang="en-US" sz="1800" dirty="0" smtClean="0">
                 <a:solidFill>
                   <a:schemeClr val="tx1"/>
                 </a:solidFill>
@@ -14374,7 +14706,7 @@
               <a:t> </a:t>
             </a:r>
             <a:r>
-              <a:rPr lang="ru-RU" sz="2400" dirty="0" err="1" smtClean="0">
+              <a:rPr lang="ru-RU" sz="1800" dirty="0" err="1" smtClean="0">
                 <a:solidFill>
                   <a:schemeClr val="tx1"/>
                 </a:solidFill>
@@ -14382,7 +14714,7 @@
               <a:t>Пукальчук</a:t>
             </a:r>
             <a:r>
-              <a:rPr lang="ru-RU" sz="2400" dirty="0" smtClean="0">
+              <a:rPr lang="ru-RU" sz="1800" dirty="0" smtClean="0">
                 <a:solidFill>
                   <a:schemeClr val="tx1"/>
                 </a:solidFill>
@@ -14390,14 +14722,14 @@
               <a:t> И.Н, группа </a:t>
             </a:r>
             <a:r>
-              <a:rPr lang="en-US" sz="2400" dirty="0" smtClean="0">
+              <a:rPr lang="en-US" sz="1800" dirty="0" smtClean="0">
                 <a:solidFill>
                   <a:schemeClr val="tx1"/>
                 </a:solidFill>
               </a:rPr>
               <a:t>Python 52</a:t>
             </a:r>
-            <a:endParaRPr lang="ru-RU" sz="2400" dirty="0" smtClean="0">
+            <a:endParaRPr lang="ru-RU" sz="1800" dirty="0" smtClean="0">
               <a:solidFill>
                 <a:schemeClr val="tx1"/>
               </a:solidFill>
@@ -14406,7 +14738,7 @@
           <a:p>
             <a:pPr algn="l"/>
             <a:r>
-              <a:rPr lang="ru-RU" sz="2400" dirty="0" smtClean="0">
+              <a:rPr lang="ru-RU" sz="1800" dirty="0" smtClean="0">
                 <a:solidFill>
                   <a:schemeClr val="tx1"/>
                 </a:solidFill>
@@ -14414,7 +14746,7 @@
               <a:t>Руководитель</a:t>
             </a:r>
             <a:r>
-              <a:rPr lang="en-US" sz="2400" dirty="0" smtClean="0">
+              <a:rPr lang="en-US" sz="1800" dirty="0" smtClean="0">
                 <a:solidFill>
                   <a:schemeClr val="tx1"/>
                 </a:solidFill>
@@ -14422,7 +14754,7 @@
               <a:t>:</a:t>
             </a:r>
             <a:r>
-              <a:rPr lang="ru-RU" sz="2400" dirty="0" smtClean="0">
+              <a:rPr lang="ru-RU" sz="1800" dirty="0" smtClean="0">
                 <a:solidFill>
                   <a:schemeClr val="tx1"/>
                 </a:solidFill>
@@ -14433,7 +14765,7 @@
           <a:p>
             <a:pPr algn="l"/>
             <a:r>
-              <a:rPr lang="ru-RU" sz="2400" dirty="0" smtClean="0">
+              <a:rPr lang="ru-RU" sz="1800" dirty="0" smtClean="0">
                 <a:solidFill>
                   <a:schemeClr val="tx1"/>
                 </a:solidFill>
@@ -14441,7 +14773,7 @@
               <a:t>Учреждение</a:t>
             </a:r>
             <a:r>
-              <a:rPr lang="en-US" sz="2400" dirty="0" smtClean="0">
+              <a:rPr lang="en-US" sz="1800" dirty="0" smtClean="0">
                 <a:solidFill>
                   <a:schemeClr val="tx1"/>
                 </a:solidFill>
@@ -14449,7 +14781,7 @@
               <a:t>: “</a:t>
             </a:r>
             <a:r>
-              <a:rPr lang="ru-RU" sz="2400" dirty="0" smtClean="0">
+              <a:rPr lang="ru-RU" sz="1800" dirty="0" smtClean="0">
                 <a:solidFill>
                   <a:schemeClr val="tx1"/>
                 </a:solidFill>
@@ -14457,7 +14789,7 @@
               <a:t>Академия ТОП </a:t>
             </a:r>
             <a:r>
-              <a:rPr lang="en-US" sz="2400" dirty="0" smtClean="0">
+              <a:rPr lang="en-US" sz="1800" dirty="0" smtClean="0">
                 <a:solidFill>
                   <a:schemeClr val="tx1"/>
                 </a:solidFill>
@@ -14468,7 +14800,7 @@
           <a:p>
             <a:pPr algn="l"/>
             <a:r>
-              <a:rPr lang="ru-RU" sz="2400" dirty="0" smtClean="0">
+              <a:rPr lang="ru-RU" sz="1800" dirty="0" smtClean="0">
                 <a:solidFill>
                   <a:schemeClr val="tx1"/>
                 </a:solidFill>
@@ -14476,7 +14808,7 @@
               <a:t>Город</a:t>
             </a:r>
             <a:r>
-              <a:rPr lang="en-US" sz="2400" dirty="0" smtClean="0">
+              <a:rPr lang="en-US" sz="1800" dirty="0" smtClean="0">
                 <a:solidFill>
                   <a:schemeClr val="tx1"/>
                 </a:solidFill>
@@ -14484,7 +14816,7 @@
               <a:t>: </a:t>
             </a:r>
             <a:r>
-              <a:rPr lang="ru-RU" sz="2400" dirty="0" smtClean="0">
+              <a:rPr lang="ru-RU" sz="1800" dirty="0" smtClean="0">
                 <a:solidFill>
                   <a:schemeClr val="tx1"/>
                 </a:solidFill>
@@ -14544,7 +14876,9 @@
         </p:nvSpPr>
         <p:spPr/>
         <p:txBody>
-          <a:bodyPr/>
+          <a:bodyPr>
+            <a:normAutofit/>
+          </a:bodyPr>
           <a:lstStyle/>
           <a:p>
             <a:r>
@@ -14653,7 +14987,7 @@
         </p:blipFill>
         <p:spPr>
           <a:xfrm>
-            <a:off x="4621715" y="3545494"/>
+            <a:off x="4716016" y="3068960"/>
             <a:ext cx="4342774" cy="1783235"/>
           </a:xfrm>
           <a:prstGeom prst="rect">
@@ -14683,7 +15017,7 @@
         </p:blipFill>
         <p:spPr>
           <a:xfrm>
-            <a:off x="278704" y="3356992"/>
+            <a:off x="143507" y="3914854"/>
             <a:ext cx="4437311" cy="1874682"/>
           </a:xfrm>
           <a:prstGeom prst="rect">
@@ -14738,7 +15072,9 @@
           </a:xfrm>
         </p:spPr>
         <p:txBody>
-          <a:bodyPr/>
+          <a:bodyPr>
+            <a:normAutofit/>
+          </a:bodyPr>
           <a:lstStyle/>
           <a:p>
             <a:r>
@@ -15089,7 +15425,9 @@
           </a:xfrm>
         </p:spPr>
         <p:txBody>
-          <a:bodyPr/>
+          <a:bodyPr>
+            <a:normAutofit/>
+          </a:bodyPr>
           <a:lstStyle/>
           <a:p>
             <a:r>
@@ -15301,7 +15639,9 @@
         </p:nvSpPr>
         <p:spPr/>
         <p:txBody>
-          <a:bodyPr/>
+          <a:bodyPr>
+            <a:normAutofit fontScale="90000"/>
+          </a:bodyPr>
           <a:lstStyle/>
           <a:p>
             <a:r>
@@ -15313,72 +15653,6 @@
               <a:t>PostgreSQL</a:t>
             </a:r>
             <a:endParaRPr lang="ru-RU" dirty="0"/>
-          </a:p>
-        </p:txBody>
-      </p:sp>
-      <p:sp>
-        <p:nvSpPr>
-          <p:cNvPr id="7" name="Заголовок 1"/>
-          <p:cNvSpPr txBox="1">
-            <a:spLocks/>
-          </p:cNvSpPr>
-          <p:nvPr/>
-        </p:nvSpPr>
-        <p:spPr>
-          <a:xfrm>
-            <a:off x="323528" y="5062219"/>
-            <a:ext cx="8517632" cy="1143000"/>
-          </a:xfrm>
-          <a:prstGeom prst="rect">
-            <a:avLst/>
-          </a:prstGeom>
-        </p:spPr>
-        <p:txBody>
-          <a:bodyPr vert="horz" lIns="91440" tIns="45720" rIns="91440" bIns="45720" rtlCol="0" anchor="ctr">
-            <a:normAutofit/>
-          </a:bodyPr>
-          <a:lstStyle>
-            <a:lvl1pPr algn="ctr" defTabSz="914400" rtl="0" eaLnBrk="1" latinLnBrk="0" hangingPunct="1">
-              <a:spcBef>
-                <a:spcPct val="0"/>
-              </a:spcBef>
-              <a:buNone/>
-              <a:defRPr sz="4400" kern="1200">
-                <a:solidFill>
-                  <a:schemeClr val="tx1"/>
-                </a:solidFill>
-                <a:latin typeface="+mj-lt"/>
-                <a:ea typeface="+mj-ea"/>
-                <a:cs typeface="+mj-cs"/>
-              </a:defRPr>
-            </a:lvl1pPr>
-          </a:lstStyle>
-          <a:p>
-            <a:r>
-              <a:rPr lang="ru-RU" sz="2400" dirty="0" smtClean="0"/>
-              <a:t>Пример хранения заявок в базе данных </a:t>
-            </a:r>
-            <a:r>
-              <a:rPr lang="ru-RU" sz="2400" dirty="0" err="1" smtClean="0"/>
-              <a:t>PostgreSQL</a:t>
-            </a:r>
-            <a:r>
-              <a:rPr lang="ru-RU" sz="2400" dirty="0" smtClean="0"/>
-              <a:t> с указанием их статуса</a:t>
-            </a:r>
-            <a:r>
-              <a:rPr lang="en-US" sz="2400" dirty="0" smtClean="0"/>
-              <a:t>. (new,  </a:t>
-            </a:r>
-            <a:r>
-              <a:rPr lang="en-US" sz="2400" dirty="0" err="1" smtClean="0"/>
-              <a:t>in_progress</a:t>
-            </a:r>
-            <a:r>
-              <a:rPr lang="en-US" sz="2400" dirty="0" smtClean="0"/>
-              <a:t>,  done,  canceled)</a:t>
-            </a:r>
-            <a:endParaRPr lang="ru-RU" sz="2400" dirty="0"/>
           </a:p>
         </p:txBody>
       </p:sp>
@@ -15406,11 +15680,77 @@
         </p:blipFill>
         <p:spPr>
           <a:xfrm>
-            <a:off x="640160" y="1844824"/>
-            <a:ext cx="7884368" cy="2232248"/>
+            <a:off x="457200" y="2348880"/>
+            <a:ext cx="8229600" cy="2182115"/>
           </a:xfrm>
         </p:spPr>
       </p:pic>
+      <p:sp>
+        <p:nvSpPr>
+          <p:cNvPr id="7" name="Заголовок 1"/>
+          <p:cNvSpPr txBox="1">
+            <a:spLocks/>
+          </p:cNvSpPr>
+          <p:nvPr/>
+        </p:nvSpPr>
+        <p:spPr>
+          <a:xfrm>
+            <a:off x="323528" y="5062219"/>
+            <a:ext cx="8517632" cy="1143000"/>
+          </a:xfrm>
+          <a:prstGeom prst="rect">
+            <a:avLst/>
+          </a:prstGeom>
+        </p:spPr>
+        <p:txBody>
+          <a:bodyPr vert="horz" lIns="91440" tIns="45720" rIns="91440" bIns="45720" rtlCol="0" anchor="ctr">
+            <a:normAutofit lnSpcReduction="10000"/>
+          </a:bodyPr>
+          <a:lstStyle>
+            <a:lvl1pPr algn="ctr" defTabSz="914400" rtl="0" eaLnBrk="1" latinLnBrk="0" hangingPunct="1">
+              <a:spcBef>
+                <a:spcPct val="0"/>
+              </a:spcBef>
+              <a:buNone/>
+              <a:defRPr sz="4400" kern="1200">
+                <a:solidFill>
+                  <a:schemeClr val="tx1"/>
+                </a:solidFill>
+                <a:latin typeface="+mj-lt"/>
+                <a:ea typeface="+mj-ea"/>
+                <a:cs typeface="+mj-cs"/>
+              </a:defRPr>
+            </a:lvl1pPr>
+          </a:lstStyle>
+          <a:p>
+            <a:r>
+              <a:rPr lang="ru-RU" sz="2400" dirty="0" smtClean="0"/>
+              <a:t>Пример хранения заявок в базе данных </a:t>
+            </a:r>
+            <a:r>
+              <a:rPr lang="ru-RU" sz="2400" dirty="0" err="1" smtClean="0"/>
+              <a:t>PostgreSQL</a:t>
+            </a:r>
+            <a:r>
+              <a:rPr lang="ru-RU" sz="2400" dirty="0" smtClean="0"/>
+              <a:t> с указанием их статуса</a:t>
+            </a:r>
+            <a:r>
+              <a:rPr lang="en-US" sz="2400" dirty="0" smtClean="0"/>
+              <a:t>. (new,  </a:t>
+            </a:r>
+            <a:r>
+              <a:rPr lang="en-US" sz="2400" dirty="0" err="1" smtClean="0"/>
+              <a:t>in_progress</a:t>
+            </a:r>
+            <a:r>
+              <a:rPr lang="en-US" sz="2400" dirty="0" smtClean="0"/>
+              <a:t>,  done,  canceled)</a:t>
+            </a:r>
+            <a:endParaRPr lang="ru-RU" sz="2400" dirty="0"/>
+          </a:p>
+        </p:txBody>
+      </p:sp>
     </p:spTree>
     <p:extLst>
       <p:ext uri="{BB962C8B-B14F-4D97-AF65-F5344CB8AC3E}">
@@ -15453,7 +15793,9 @@
         </p:nvSpPr>
         <p:spPr/>
         <p:txBody>
-          <a:bodyPr/>
+          <a:bodyPr>
+            <a:normAutofit/>
+          </a:bodyPr>
           <a:lstStyle/>
           <a:p>
             <a:r>
@@ -15560,7 +15902,9 @@
         </p:nvSpPr>
         <p:spPr/>
         <p:txBody>
-          <a:bodyPr/>
+          <a:bodyPr>
+            <a:normAutofit/>
+          </a:bodyPr>
           <a:lstStyle/>
           <a:p>
             <a:r>
@@ -15790,7 +16134,12 @@
             <p:ph type="title"/>
           </p:nvPr>
         </p:nvSpPr>
-        <p:spPr/>
+        <p:spPr>
+          <a:xfrm>
+            <a:off x="683568" y="548680"/>
+            <a:ext cx="8183880" cy="1051560"/>
+          </a:xfrm>
+        </p:spPr>
         <p:txBody>
           <a:bodyPr/>
           <a:lstStyle/>
@@ -15815,8 +16164,8 @@
         </p:nvSpPr>
         <p:spPr>
           <a:xfrm>
-            <a:off x="457200" y="1600201"/>
-            <a:ext cx="8435280" cy="3629000"/>
+            <a:off x="323528" y="1600201"/>
+            <a:ext cx="8435280" cy="1900807"/>
           </a:xfrm>
         </p:spPr>
         <p:txBody>
@@ -15826,48 +16175,111 @@
           <a:lstStyle/>
           <a:p>
             <a:r>
-              <a:rPr lang="ru-RU" sz="2400" dirty="0" smtClean="0"/>
+              <a:rPr lang="ru-RU" sz="2000" dirty="0" smtClean="0"/>
               <a:t>Автоматизация документооборота снижает количество ошибок </a:t>
             </a:r>
           </a:p>
           <a:p>
             <a:r>
-              <a:rPr lang="ru-RU" sz="2400" dirty="0" smtClean="0"/>
+              <a:rPr lang="ru-RU" sz="2000" dirty="0" smtClean="0"/>
               <a:t>В сфере </a:t>
             </a:r>
             <a:r>
-              <a:rPr lang="ru-RU" sz="2400" dirty="0" err="1" smtClean="0"/>
+              <a:rPr lang="ru-RU" sz="2000" dirty="0" err="1" smtClean="0"/>
               <a:t>автоэкспертиз</a:t>
             </a:r>
             <a:r>
-              <a:rPr lang="ru-RU" sz="2400" dirty="0" smtClean="0"/>
+              <a:rPr lang="ru-RU" sz="2000" dirty="0" smtClean="0"/>
               <a:t> договора часто оформляются вручную </a:t>
             </a:r>
           </a:p>
           <a:p>
             <a:r>
-              <a:rPr lang="ru-RU" sz="2400" dirty="0" err="1" smtClean="0"/>
+              <a:rPr lang="ru-RU" sz="2000" dirty="0" err="1" smtClean="0"/>
               <a:t>Telegram</a:t>
             </a:r>
             <a:r>
-              <a:rPr lang="ru-RU" sz="2400" dirty="0" smtClean="0"/>
+              <a:rPr lang="ru-RU" sz="2000" dirty="0" smtClean="0"/>
               <a:t>-бот позволяет упростить взаимодействие с клиентом </a:t>
             </a:r>
           </a:p>
           <a:p>
             <a:r>
-              <a:rPr lang="ru-RU" sz="2400" dirty="0" smtClean="0"/>
+              <a:rPr lang="ru-RU" sz="2000" dirty="0" smtClean="0"/>
               <a:t>Хранение данных в </a:t>
             </a:r>
             <a:r>
-              <a:rPr lang="ru-RU" sz="2400" dirty="0" err="1" smtClean="0"/>
+              <a:rPr lang="ru-RU" sz="2000" dirty="0" err="1" smtClean="0"/>
               <a:t>PostgreSQL</a:t>
             </a:r>
             <a:r>
-              <a:rPr lang="ru-RU" sz="2400" dirty="0" smtClean="0"/>
+              <a:rPr lang="ru-RU" sz="2000" dirty="0" smtClean="0"/>
               <a:t> делает работу более надёжной</a:t>
             </a:r>
-            <a:endParaRPr lang="ru-RU" sz="2400" dirty="0"/>
+            <a:endParaRPr lang="ru-RU" sz="2000" dirty="0"/>
+          </a:p>
+        </p:txBody>
+      </p:sp>
+      <p:pic>
+        <p:nvPicPr>
+          <p:cNvPr id="8" name="Рисунок 7"/>
+          <p:cNvPicPr>
+            <a:picLocks noChangeAspect="1"/>
+          </p:cNvPicPr>
+          <p:nvPr/>
+        </p:nvPicPr>
+        <p:blipFill>
+          <a:blip r:embed="rId2">
+            <a:extLst>
+              <a:ext uri="{28A0092B-C50C-407E-A947-70E740481C1C}">
+                <a14:useLocalDpi xmlns:a14="http://schemas.microsoft.com/office/drawing/2010/main" val="0"/>
+              </a:ext>
+            </a:extLst>
+          </a:blip>
+          <a:stretch>
+            <a:fillRect/>
+          </a:stretch>
+        </p:blipFill>
+        <p:spPr>
+          <a:xfrm>
+            <a:off x="467544" y="3472753"/>
+            <a:ext cx="2304256" cy="2304256"/>
+          </a:xfrm>
+          <a:prstGeom prst="rect">
+            <a:avLst/>
+          </a:prstGeom>
+        </p:spPr>
+      </p:pic>
+      <p:sp>
+        <p:nvSpPr>
+          <p:cNvPr id="9" name="TextBox 8"/>
+          <p:cNvSpPr txBox="1"/>
+          <p:nvPr/>
+        </p:nvSpPr>
+        <p:spPr>
+          <a:xfrm>
+            <a:off x="2987824" y="4560386"/>
+            <a:ext cx="6336704" cy="369332"/>
+          </a:xfrm>
+          <a:prstGeom prst="rect">
+            <a:avLst/>
+          </a:prstGeom>
+          <a:noFill/>
+        </p:spPr>
+        <p:txBody>
+          <a:bodyPr wrap="square" rtlCol="0">
+            <a:spAutoFit/>
+          </a:bodyPr>
+          <a:lstStyle/>
+          <a:p>
+            <a:r>
+              <a:rPr lang="ru-RU" dirty="0" smtClean="0"/>
+              <a:t>Автоматизация </a:t>
+            </a:r>
+            <a:r>
+              <a:rPr lang="ru-RU" dirty="0"/>
+              <a:t>позволяет ускорить работу с документами.</a:t>
+            </a:r>
           </a:p>
         </p:txBody>
       </p:sp>
@@ -15934,7 +16346,12 @@
             <p:ph idx="1"/>
           </p:nvPr>
         </p:nvSpPr>
-        <p:spPr/>
+        <p:spPr>
+          <a:xfrm>
+            <a:off x="539552" y="4365104"/>
+            <a:ext cx="8229600" cy="2116832"/>
+          </a:xfrm>
+        </p:spPr>
         <p:txBody>
           <a:bodyPr>
             <a:normAutofit/>
@@ -15957,6 +16374,36 @@
           </a:p>
         </p:txBody>
       </p:sp>
+      <p:pic>
+        <p:nvPicPr>
+          <p:cNvPr id="5" name="Рисунок 4"/>
+          <p:cNvPicPr>
+            <a:picLocks noChangeAspect="1"/>
+          </p:cNvPicPr>
+          <p:nvPr/>
+        </p:nvPicPr>
+        <p:blipFill>
+          <a:blip r:embed="rId2">
+            <a:extLst>
+              <a:ext uri="{28A0092B-C50C-407E-A947-70E740481C1C}">
+                <a14:useLocalDpi xmlns:a14="http://schemas.microsoft.com/office/drawing/2010/main" val="0"/>
+              </a:ext>
+            </a:extLst>
+          </a:blip>
+          <a:stretch>
+            <a:fillRect/>
+          </a:stretch>
+        </p:blipFill>
+        <p:spPr>
+          <a:xfrm>
+            <a:off x="2699792" y="1196752"/>
+            <a:ext cx="3230829" cy="3230829"/>
+          </a:xfrm>
+          <a:prstGeom prst="rect">
+            <a:avLst/>
+          </a:prstGeom>
+        </p:spPr>
+      </p:pic>
     </p:spTree>
     <p:extLst>
       <p:ext uri="{BB962C8B-B14F-4D97-AF65-F5344CB8AC3E}">
@@ -16052,6 +16499,104 @@
               <a:t>PostgreSQL</a:t>
             </a:r>
             <a:endParaRPr lang="ru-RU" sz="2800" dirty="0"/>
+          </a:p>
+        </p:txBody>
+      </p:sp>
+      <p:sp>
+        <p:nvSpPr>
+          <p:cNvPr id="4" name="TextBox 3"/>
+          <p:cNvSpPr txBox="1"/>
+          <p:nvPr/>
+        </p:nvSpPr>
+        <p:spPr>
+          <a:xfrm>
+            <a:off x="1043608" y="4538536"/>
+            <a:ext cx="2431756" cy="523220"/>
+          </a:xfrm>
+          <a:prstGeom prst="rect">
+            <a:avLst/>
+          </a:prstGeom>
+          <a:noFill/>
+        </p:spPr>
+        <p:txBody>
+          <a:bodyPr wrap="none" rtlCol="0">
+            <a:spAutoFit/>
+          </a:bodyPr>
+          <a:lstStyle/>
+          <a:p>
+            <a:r>
+              <a:rPr lang="ru-RU" sz="2800" dirty="0"/>
+              <a:t>ручная работа </a:t>
+            </a:r>
+          </a:p>
+        </p:txBody>
+      </p:sp>
+      <p:sp>
+        <p:nvSpPr>
+          <p:cNvPr id="5" name="TextBox 4"/>
+          <p:cNvSpPr txBox="1"/>
+          <p:nvPr/>
+        </p:nvSpPr>
+        <p:spPr>
+          <a:xfrm>
+            <a:off x="5364088" y="4437112"/>
+            <a:ext cx="2403030" cy="523220"/>
+          </a:xfrm>
+          <a:prstGeom prst="rect">
+            <a:avLst/>
+          </a:prstGeom>
+          <a:noFill/>
+        </p:spPr>
+        <p:txBody>
+          <a:bodyPr wrap="none" rtlCol="0">
+            <a:spAutoFit/>
+          </a:bodyPr>
+          <a:lstStyle/>
+          <a:p>
+            <a:r>
+              <a:rPr lang="ru-RU" sz="2800" dirty="0"/>
+              <a:t>автоматизация</a:t>
+            </a:r>
+          </a:p>
+        </p:txBody>
+      </p:sp>
+      <p:sp>
+        <p:nvSpPr>
+          <p:cNvPr id="7" name="Стрелка вправо с вырезом 6"/>
+          <p:cNvSpPr/>
+          <p:nvPr/>
+        </p:nvSpPr>
+        <p:spPr>
+          <a:xfrm>
+            <a:off x="3788194" y="4532152"/>
+            <a:ext cx="978408" cy="484632"/>
+          </a:xfrm>
+          <a:prstGeom prst="notchedRightArrow">
+            <a:avLst/>
+          </a:prstGeom>
+        </p:spPr>
+        <p:style>
+          <a:lnRef idx="2">
+            <a:schemeClr val="accent1">
+              <a:shade val="50000"/>
+            </a:schemeClr>
+          </a:lnRef>
+          <a:fillRef idx="1">
+            <a:schemeClr val="accent1"/>
+          </a:fillRef>
+          <a:effectRef idx="0">
+            <a:schemeClr val="accent1"/>
+          </a:effectRef>
+          <a:fontRef idx="minor">
+            <a:schemeClr val="lt1"/>
+          </a:fontRef>
+        </p:style>
+        <p:txBody>
+          <a:bodyPr rtlCol="0" anchor="ctr"/>
+          <a:lstStyle/>
+          <a:p>
+            <a:pPr algn="ctr"/>
+            <a:endParaRPr lang="ru-RU"/>
           </a:p>
         </p:txBody>
       </p:sp>
@@ -16215,7 +16760,9 @@
         </p:nvSpPr>
         <p:spPr/>
         <p:txBody>
-          <a:bodyPr/>
+          <a:bodyPr>
+            <a:normAutofit/>
+          </a:bodyPr>
           <a:lstStyle/>
           <a:p>
             <a:r>
@@ -16343,7 +16890,9 @@
         </p:nvSpPr>
         <p:spPr/>
         <p:txBody>
-          <a:bodyPr/>
+          <a:bodyPr>
+            <a:normAutofit/>
+          </a:bodyPr>
           <a:lstStyle/>
           <a:p>
             <a:r>
@@ -16672,7 +17221,7 @@
         </p:spPr>
         <p:txBody>
           <a:bodyPr>
-            <a:normAutofit/>
+            <a:normAutofit fontScale="90000"/>
           </a:bodyPr>
           <a:lstStyle/>
           <a:p>
@@ -16684,6 +17233,35 @@
           </a:p>
         </p:txBody>
       </p:sp>
+      <p:pic>
+        <p:nvPicPr>
+          <p:cNvPr id="11" name="Объект 10"/>
+          <p:cNvPicPr>
+            <a:picLocks noGrp="1" noChangeAspect="1"/>
+          </p:cNvPicPr>
+          <p:nvPr>
+            <p:ph idx="1"/>
+          </p:nvPr>
+        </p:nvPicPr>
+        <p:blipFill>
+          <a:blip r:embed="rId2">
+            <a:extLst>
+              <a:ext uri="{28A0092B-C50C-407E-A947-70E740481C1C}">
+                <a14:useLocalDpi xmlns:a14="http://schemas.microsoft.com/office/drawing/2010/main" val="0"/>
+              </a:ext>
+            </a:extLst>
+          </a:blip>
+          <a:stretch>
+            <a:fillRect/>
+          </a:stretch>
+        </p:blipFill>
+        <p:spPr>
+          <a:xfrm>
+            <a:off x="6012160" y="2976980"/>
+            <a:ext cx="3115590" cy="3071811"/>
+          </a:xfrm>
+        </p:spPr>
+      </p:pic>
       <p:sp>
         <p:nvSpPr>
           <p:cNvPr id="7" name="Заголовок 1"/>
@@ -16747,7 +17325,7 @@
           <p:nvPr/>
         </p:nvPicPr>
         <p:blipFill>
-          <a:blip r:embed="rId2">
+          <a:blip r:embed="rId3">
             <a:extLst>
               <a:ext uri="{28A0092B-C50C-407E-A947-70E740481C1C}">
                 <a14:useLocalDpi xmlns:a14="http://schemas.microsoft.com/office/drawing/2010/main" val="0"/>
@@ -16766,35 +17344,6 @@
           <a:prstGeom prst="rect">
             <a:avLst/>
           </a:prstGeom>
-        </p:spPr>
-      </p:pic>
-      <p:pic>
-        <p:nvPicPr>
-          <p:cNvPr id="11" name="Объект 10"/>
-          <p:cNvPicPr>
-            <a:picLocks noGrp="1" noChangeAspect="1"/>
-          </p:cNvPicPr>
-          <p:nvPr>
-            <p:ph idx="1"/>
-          </p:nvPr>
-        </p:nvPicPr>
-        <p:blipFill>
-          <a:blip r:embed="rId3">
-            <a:extLst>
-              <a:ext uri="{28A0092B-C50C-407E-A947-70E740481C1C}">
-                <a14:useLocalDpi xmlns:a14="http://schemas.microsoft.com/office/drawing/2010/main" val="0"/>
-              </a:ext>
-            </a:extLst>
-          </a:blip>
-          <a:stretch>
-            <a:fillRect/>
-          </a:stretch>
-        </p:blipFill>
-        <p:spPr>
-          <a:xfrm>
-            <a:off x="6156176" y="3226068"/>
-            <a:ext cx="2748745" cy="2710121"/>
-          </a:xfrm>
         </p:spPr>
       </p:pic>
       <p:pic>
@@ -16849,7 +17398,7 @@
         </p:blipFill>
         <p:spPr>
           <a:xfrm>
-            <a:off x="1979712" y="1052736"/>
+            <a:off x="1979712" y="1055240"/>
             <a:ext cx="3804564" cy="2377762"/>
           </a:xfrm>
           <a:prstGeom prst="rect">
@@ -16951,9 +17500,9 @@
 </file>
 
 <file path=ppt/theme/theme1.xml><?xml version="1.0" encoding="utf-8"?>
-<a:theme xmlns:a="http://schemas.openxmlformats.org/drawingml/2006/main" name="Тема Office">
+<a:theme xmlns:a="http://schemas.openxmlformats.org/drawingml/2006/main" name="Апекс">
   <a:themeElements>
-    <a:clrScheme name="Стандартная">
+    <a:clrScheme name="Апекс">
       <a:dk1>
         <a:sysClr val="windowText" lastClr="000000"/>
       </a:dk1>
@@ -16961,48 +17510,87 @@
         <a:sysClr val="window" lastClr="FFFFFF"/>
       </a:lt1>
       <a:dk2>
-        <a:srgbClr val="1F497D"/>
+        <a:srgbClr val="69676D"/>
       </a:dk2>
       <a:lt2>
-        <a:srgbClr val="EEECE1"/>
+        <a:srgbClr val="C9C2D1"/>
       </a:lt2>
       <a:accent1>
-        <a:srgbClr val="4F81BD"/>
+        <a:srgbClr val="CEB966"/>
       </a:accent1>
       <a:accent2>
-        <a:srgbClr val="C0504D"/>
+        <a:srgbClr val="9CB084"/>
       </a:accent2>
       <a:accent3>
-        <a:srgbClr val="9BBB59"/>
+        <a:srgbClr val="6BB1C9"/>
       </a:accent3>
       <a:accent4>
-        <a:srgbClr val="8064A2"/>
+        <a:srgbClr val="6585CF"/>
       </a:accent4>
       <a:accent5>
-        <a:srgbClr val="4BACC6"/>
+        <a:srgbClr val="7E6BC9"/>
       </a:accent5>
       <a:accent6>
-        <a:srgbClr val="F79646"/>
+        <a:srgbClr val="A379BB"/>
       </a:accent6>
       <a:hlink>
-        <a:srgbClr val="0000FF"/>
+        <a:srgbClr val="410082"/>
       </a:hlink>
       <a:folHlink>
-        <a:srgbClr val="800080"/>
+        <a:srgbClr val="932968"/>
       </a:folHlink>
     </a:clrScheme>
-    <a:fontScheme name="Стандартная">
+    <a:fontScheme name="Апекс">
       <a:majorFont>
-        <a:latin typeface="Calibri"/>
+        <a:latin typeface="Lucida Sans"/>
         <a:ea typeface=""/>
         <a:cs typeface=""/>
-        <a:font script="Jpan" typeface="ＭＳ Ｐゴシック"/>
-        <a:font script="Hang" typeface="맑은 고딕"/>
+        <a:font script="Grek" typeface="Arial"/>
+        <a:font script="Cyrl" typeface="Arial"/>
+        <a:font script="Jpan" typeface="HG丸ｺﾞｼｯｸM-PRO"/>
+        <a:font script="Hang" typeface="휴먼옛체"/>
+        <a:font script="Hans" typeface="黑体"/>
+        <a:font script="Hant" typeface="微軟正黑體"/>
+        <a:font script="Arab" typeface="Tahoma"/>
+        <a:font script="Hebr" typeface="Levenim MT"/>
+        <a:font script="Thai" typeface="FreesiaUPC"/>
+        <a:font script="Ethi" typeface="Nyala"/>
+        <a:font script="Beng" typeface="Vrinda"/>
+        <a:font script="Gujr" typeface="Shruti"/>
+        <a:font script="Khmr" typeface="DaunPenh"/>
+        <a:font script="Knda" typeface="Tunga"/>
+        <a:font script="Guru" typeface="Raavi"/>
+        <a:font script="Cans" typeface="Euphemia"/>
+        <a:font script="Cher" typeface="Plantagenet Cherokee"/>
+        <a:font script="Yiii" typeface="Microsoft Yi Baiti"/>
+        <a:font script="Tibt" typeface="Microsoft Himalaya"/>
+        <a:font script="Thaa" typeface="MV Boli"/>
+        <a:font script="Deva" typeface="Mangal"/>
+        <a:font script="Telu" typeface="Gautami"/>
+        <a:font script="Taml" typeface="Latha"/>
+        <a:font script="Syrc" typeface="Estrangelo Edessa"/>
+        <a:font script="Orya" typeface="Kalinga"/>
+        <a:font script="Mlym" typeface="Kartika"/>
+        <a:font script="Laoo" typeface="DokChampa"/>
+        <a:font script="Sinh" typeface="Iskoola Pota"/>
+        <a:font script="Mong" typeface="Mongolian Baiti"/>
+        <a:font script="Viet" typeface="Tahoma"/>
+        <a:font script="Uigh" typeface="Microsoft Uighur"/>
+        <a:font script="Geor" typeface="Sylfaen"/>
+      </a:majorFont>
+      <a:minorFont>
+        <a:latin typeface="Book Antiqua"/>
+        <a:ea typeface=""/>
+        <a:cs typeface=""/>
+        <a:font script="Grek" typeface="Times New Roman"/>
+        <a:font script="Cyrl" typeface="Times New Roman"/>
+        <a:font script="Jpan" typeface="HG明朝B"/>
+        <a:font script="Hang" typeface="돋움"/>
         <a:font script="Hans" typeface="宋体"/>
         <a:font script="Hant" typeface="新細明體"/>
         <a:font script="Arab" typeface="Times New Roman"/>
-        <a:font script="Hebr" typeface="Times New Roman"/>
-        <a:font script="Thai" typeface="Angsana New"/>
+        <a:font script="Hebr" typeface="David"/>
+        <a:font script="Thai" typeface="EucrosiaUPC"/>
         <a:font script="Ethi" typeface="Nyala"/>
         <a:font script="Beng" typeface="Vrinda"/>
         <a:font script="Gujr" typeface="Shruti"/>
@@ -17026,101 +17614,75 @@
         <a:font script="Viet" typeface="Times New Roman"/>
         <a:font script="Uigh" typeface="Microsoft Uighur"/>
         <a:font script="Geor" typeface="Sylfaen"/>
-      </a:majorFont>
-      <a:minorFont>
-        <a:latin typeface="Calibri"/>
-        <a:ea typeface=""/>
-        <a:cs typeface=""/>
-        <a:font script="Jpan" typeface="ＭＳ Ｐゴシック"/>
-        <a:font script="Hang" typeface="맑은 고딕"/>
-        <a:font script="Hans" typeface="宋体"/>
-        <a:font script="Hant" typeface="新細明體"/>
-        <a:font script="Arab" typeface="Arial"/>
-        <a:font script="Hebr" typeface="Arial"/>
-        <a:font script="Thai" typeface="Cordia New"/>
-        <a:font script="Ethi" typeface="Nyala"/>
-        <a:font script="Beng" typeface="Vrinda"/>
-        <a:font script="Gujr" typeface="Shruti"/>
-        <a:font script="Khmr" typeface="DaunPenh"/>
-        <a:font script="Knda" typeface="Tunga"/>
-        <a:font script="Guru" typeface="Raavi"/>
-        <a:font script="Cans" typeface="Euphemia"/>
-        <a:font script="Cher" typeface="Plantagenet Cherokee"/>
-        <a:font script="Yiii" typeface="Microsoft Yi Baiti"/>
-        <a:font script="Tibt" typeface="Microsoft Himalaya"/>
-        <a:font script="Thaa" typeface="MV Boli"/>
-        <a:font script="Deva" typeface="Mangal"/>
-        <a:font script="Telu" typeface="Gautami"/>
-        <a:font script="Taml" typeface="Latha"/>
-        <a:font script="Syrc" typeface="Estrangelo Edessa"/>
-        <a:font script="Orya" typeface="Kalinga"/>
-        <a:font script="Mlym" typeface="Kartika"/>
-        <a:font script="Laoo" typeface="DokChampa"/>
-        <a:font script="Sinh" typeface="Iskoola Pota"/>
-        <a:font script="Mong" typeface="Mongolian Baiti"/>
-        <a:font script="Viet" typeface="Arial"/>
-        <a:font script="Uigh" typeface="Microsoft Uighur"/>
-        <a:font script="Geor" typeface="Sylfaen"/>
       </a:minorFont>
     </a:fontScheme>
-    <a:fmtScheme name="Стандартная">
+    <a:fmtScheme name="Апекс">
       <a:fillStyleLst>
         <a:solidFill>
           <a:schemeClr val="phClr"/>
         </a:solidFill>
         <a:gradFill rotWithShape="1">
           <a:gsLst>
-            <a:gs pos="0">
+            <a:gs pos="20000">
               <a:schemeClr val="phClr">
-                <a:tint val="50000"/>
-                <a:satMod val="300000"/>
-              </a:schemeClr>
-            </a:gs>
-            <a:gs pos="35000">
-              <a:schemeClr val="phClr">
-                <a:tint val="37000"/>
-                <a:satMod val="300000"/>
+                <a:tint val="9000"/>
               </a:schemeClr>
             </a:gs>
             <a:gs pos="100000">
               <a:schemeClr val="phClr">
-                <a:tint val="15000"/>
-                <a:satMod val="350000"/>
+                <a:tint val="70000"/>
+                <a:satMod val="100000"/>
               </a:schemeClr>
             </a:gs>
           </a:gsLst>
-          <a:lin ang="16200000" scaled="1"/>
+          <a:path path="circle">
+            <a:fillToRect l="-15000" t="-15000" r="115000" b="115000"/>
+          </a:path>
         </a:gradFill>
         <a:gradFill rotWithShape="1">
           <a:gsLst>
             <a:gs pos="0">
               <a:schemeClr val="phClr">
-                <a:shade val="51000"/>
-                <a:satMod val="130000"/>
+                <a:shade val="60000"/>
               </a:schemeClr>
             </a:gs>
-            <a:gs pos="80000">
+            <a:gs pos="33000">
               <a:schemeClr val="phClr">
-                <a:shade val="93000"/>
-                <a:satMod val="130000"/>
+                <a:tint val="86500"/>
+              </a:schemeClr>
+            </a:gs>
+            <a:gs pos="46750">
+              <a:schemeClr val="phClr">
+                <a:tint val="71000"/>
+                <a:satMod val="112000"/>
+              </a:schemeClr>
+            </a:gs>
+            <a:gs pos="53000">
+              <a:schemeClr val="phClr">
+                <a:tint val="71000"/>
+                <a:satMod val="112000"/>
+              </a:schemeClr>
+            </a:gs>
+            <a:gs pos="68000">
+              <a:schemeClr val="phClr">
+                <a:tint val="86000"/>
               </a:schemeClr>
             </a:gs>
             <a:gs pos="100000">
               <a:schemeClr val="phClr">
-                <a:shade val="94000"/>
-                <a:satMod val="135000"/>
+                <a:shade val="60000"/>
               </a:schemeClr>
             </a:gs>
           </a:gsLst>
-          <a:lin ang="16200000" scaled="0"/>
+          <a:lin ang="8350000" scaled="1"/>
         </a:gradFill>
       </a:fillStyleLst>
       <a:lnStyleLst>
         <a:ln w="9525" cap="flat" cmpd="sng" algn="ctr">
           <a:solidFill>
             <a:schemeClr val="phClr">
-              <a:shade val="95000"/>
-              <a:satMod val="105000"/>
+              <a:shade val="48000"/>
+              <a:satMod val="110000"/>
             </a:schemeClr>
           </a:solidFill>
           <a:prstDash val="solid"/>
@@ -17141,16 +17703,7 @@
       <a:effectStyleLst>
         <a:effectStyle>
           <a:effectLst>
-            <a:outerShdw blurRad="40000" dist="20000" dir="5400000" rotWithShape="0">
-              <a:srgbClr val="000000">
-                <a:alpha val="38000"/>
-              </a:srgbClr>
-            </a:outerShdw>
-          </a:effectLst>
-        </a:effectStyle>
-        <a:effectStyle>
-          <a:effectLst>
-            <a:outerShdw blurRad="40000" dist="23000" dir="5400000" rotWithShape="0">
+            <a:outerShdw blurRad="130000" dist="101600" dir="2700000" algn="tl" rotWithShape="0">
               <a:srgbClr val="000000">
                 <a:alpha val="35000"/>
               </a:srgbClr>
@@ -17159,22 +17712,31 @@
         </a:effectStyle>
         <a:effectStyle>
           <a:effectLst>
-            <a:outerShdw blurRad="40000" dist="23000" dir="5400000" rotWithShape="0">
+            <a:outerShdw blurRad="190500" dist="228600" dir="2700000" sy="90000" rotWithShape="0">
               <a:srgbClr val="000000">
-                <a:alpha val="35000"/>
+                <a:alpha val="25500"/>
+              </a:srgbClr>
+            </a:outerShdw>
+          </a:effectLst>
+        </a:effectStyle>
+        <a:effectStyle>
+          <a:effectLst>
+            <a:outerShdw blurRad="190500" dist="228600" dir="2700000" sy="90000" rotWithShape="0">
+              <a:srgbClr val="000000">
+                <a:alpha val="25500"/>
               </a:srgbClr>
             </a:outerShdw>
           </a:effectLst>
           <a:scene3d>
-            <a:camera prst="orthographicFront">
+            <a:camera prst="orthographicFront" fov="0">
               <a:rot lat="0" lon="0" rev="0"/>
             </a:camera>
-            <a:lightRig rig="threePt" dir="t">
-              <a:rot lat="0" lon="0" rev="1200000"/>
+            <a:lightRig rig="soft" dir="tl">
+              <a:rot lat="0" lon="0" rev="20100000"/>
             </a:lightRig>
           </a:scene3d>
           <a:sp3d>
-            <a:bevelT w="63500" h="25400"/>
+            <a:bevelT w="50800" h="50800"/>
           </a:sp3d>
         </a:effectStyle>
       </a:effectStyleLst>
@@ -17186,47 +17748,38 @@
           <a:gsLst>
             <a:gs pos="0">
               <a:schemeClr val="phClr">
-                <a:tint val="40000"/>
-                <a:satMod val="350000"/>
-              </a:schemeClr>
-            </a:gs>
-            <a:gs pos="40000">
-              <a:schemeClr val="phClr">
-                <a:tint val="45000"/>
-                <a:shade val="99000"/>
-                <a:satMod val="350000"/>
+                <a:tint val="50000"/>
+                <a:satMod val="180000"/>
               </a:schemeClr>
             </a:gs>
             <a:gs pos="100000">
               <a:schemeClr val="phClr">
-                <a:shade val="20000"/>
-                <a:satMod val="255000"/>
+                <a:shade val="45000"/>
+                <a:satMod val="120000"/>
               </a:schemeClr>
             </a:gs>
           </a:gsLst>
           <a:path path="circle">
-            <a:fillToRect l="50000" t="-80000" r="50000" b="180000"/>
+            <a:fillToRect r="100000" b="100000"/>
           </a:path>
         </a:gradFill>
-        <a:gradFill rotWithShape="1">
-          <a:gsLst>
-            <a:gs pos="0">
+        <a:blipFill>
+          <a:blip xmlns:r="http://schemas.openxmlformats.org/officeDocument/2006/relationships" r:embed="rId1">
+            <a:duotone>
               <a:schemeClr val="phClr">
-                <a:tint val="80000"/>
-                <a:satMod val="300000"/>
+                <a:shade val="3000"/>
+                <a:satMod val="110000"/>
               </a:schemeClr>
-            </a:gs>
-            <a:gs pos="100000">
               <a:schemeClr val="phClr">
-                <a:shade val="30000"/>
-                <a:satMod val="200000"/>
+                <a:tint val="60000"/>
+                <a:satMod val="425000"/>
               </a:schemeClr>
-            </a:gs>
-          </a:gsLst>
-          <a:path path="circle">
-            <a:fillToRect l="50000" t="50000" r="50000" b="50000"/>
-          </a:path>
-        </a:gradFill>
+            </a:duotone>
+          </a:blip>
+          <a:stretch>
+            <a:fillRect/>
+          </a:stretch>
+        </a:blipFill>
       </a:bgFillStyleLst>
     </a:fmtScheme>
   </a:themeElements>
